--- a/class/ppt/lesson-03.pptx
+++ b/class/ppt/lesson-03.pptx
@@ -2,20 +2,24 @@
 <file path=ppt/presentation.xml><?xml version="1.0" encoding="utf-8"?>
 <p:presentation xmlns:p="http://schemas.openxmlformats.org/presentationml/2006/main">
   <p:sldMasterIdLst>
-    <p:sldMasterId xmlns:r="http://schemas.openxmlformats.org/officeDocument/2006/relationships" id="2147483648" r:id="R69b91cb8af834f73"/>
+    <p:sldMasterId xmlns:r="http://schemas.openxmlformats.org/officeDocument/2006/relationships" id="2147483648" r:id="R4ffceee2ca6b4090"/>
   </p:sldMasterIdLst>
   <p:notesMasterIdLst>
-    <p:notesMasterId xmlns:r="http://schemas.openxmlformats.org/officeDocument/2006/relationships" r:id="R7b2d21e03aac4e2f"/>
+    <p:notesMasterId xmlns:r="http://schemas.openxmlformats.org/officeDocument/2006/relationships" r:id="Re7f3f1363fe34b32"/>
   </p:notesMasterIdLst>
   <p:sldIdLst>
-    <p:sldId xmlns:r="http://schemas.openxmlformats.org/officeDocument/2006/relationships" id="256" r:id="R715ce35df16f4106"/>
-    <p:sldId xmlns:r="http://schemas.openxmlformats.org/officeDocument/2006/relationships" id="257" r:id="R22815301fc284b17"/>
-    <p:sldId xmlns:r="http://schemas.openxmlformats.org/officeDocument/2006/relationships" id="258" r:id="R2900a546e1e242c0"/>
-    <p:sldId xmlns:r="http://schemas.openxmlformats.org/officeDocument/2006/relationships" id="259" r:id="R1594e01c16e94f79"/>
-    <p:sldId xmlns:r="http://schemas.openxmlformats.org/officeDocument/2006/relationships" id="260" r:id="Re5d6cf63206b4638"/>
-    <p:sldId xmlns:r="http://schemas.openxmlformats.org/officeDocument/2006/relationships" id="261" r:id="Rbac1077b54034198"/>
-    <p:sldId xmlns:r="http://schemas.openxmlformats.org/officeDocument/2006/relationships" id="262" r:id="Rad739f607f1e4e8d"/>
-    <p:sldId xmlns:r="http://schemas.openxmlformats.org/officeDocument/2006/relationships" id="263" r:id="Rd995863a5df54b95"/>
+    <p:sldId xmlns:r="http://schemas.openxmlformats.org/officeDocument/2006/relationships" id="256" r:id="R3b2a4b3823bb4af5"/>
+    <p:sldId xmlns:r="http://schemas.openxmlformats.org/officeDocument/2006/relationships" id="257" r:id="R6d6b2120de6f48af"/>
+    <p:sldId xmlns:r="http://schemas.openxmlformats.org/officeDocument/2006/relationships" id="258" r:id="R56a7157682ee4fe9"/>
+    <p:sldId xmlns:r="http://schemas.openxmlformats.org/officeDocument/2006/relationships" id="259" r:id="R0ef2d9fedd0c483e"/>
+    <p:sldId xmlns:r="http://schemas.openxmlformats.org/officeDocument/2006/relationships" id="260" r:id="R45325a5a02de4bc4"/>
+    <p:sldId xmlns:r="http://schemas.openxmlformats.org/officeDocument/2006/relationships" id="261" r:id="R78194f43519945aa"/>
+    <p:sldId xmlns:r="http://schemas.openxmlformats.org/officeDocument/2006/relationships" id="262" r:id="R38bb22b00b46472f"/>
+    <p:sldId xmlns:r="http://schemas.openxmlformats.org/officeDocument/2006/relationships" id="263" r:id="R060c1f3b85204d72"/>
+    <p:sldId xmlns:r="http://schemas.openxmlformats.org/officeDocument/2006/relationships" id="264" r:id="R58f26057c8464d5b"/>
+    <p:sldId xmlns:r="http://schemas.openxmlformats.org/officeDocument/2006/relationships" id="265" r:id="R84b9c0082fe149f6"/>
+    <p:sldId xmlns:r="http://schemas.openxmlformats.org/officeDocument/2006/relationships" id="266" r:id="R452ebc70b1bc43c4"/>
+    <p:sldId xmlns:r="http://schemas.openxmlformats.org/officeDocument/2006/relationships" id="267" r:id="Rbc4ed89dc1e34534"/>
   </p:sldIdLst>
   <p:sldSz cx="12192000" cy="6858000"/>
   <p:notesSz cx="6858000" cy="9144000"/>
@@ -449,7 +453,7 @@
           <a:lstStyle xmlns:a="http://schemas.openxmlformats.org/drawingml/2006/main"/>
           <a:p xmlns:a="http://schemas.openxmlformats.org/drawingml/2006/main">
             <a:r>
-              <a:t>開場：說明這堂課的實作成果與使用情境。</a:t>
+              <a:t>開場：上一堂像遊戲機，今天要裝成績收集箱。</a:t>
             </a:r>
           </a:p>
           <a:p xmlns:a="http://schemas.openxmlformats.org/drawingml/2006/main">
@@ -464,7 +468,302 @@
           </a:p>
           <a:p xmlns:a="http://schemas.openxmlformats.org/drawingml/2006/main">
             <a:r>
-              <a:t>- 本頁主要為課程設計與使用者指定內容，無外部非平凡主張。</a:t>
+              <a:t>- https://developers.google.com/apps-script/guides/web</a:t>
+            </a:r>
+          </a:p>
+          <a:p xmlns:a="http://schemas.openxmlformats.org/drawingml/2006/main">
+            <a:r>
+              <a:t>- https://developers.google.com/apps-script/guides/html/communication</a:t>
+            </a:r>
+          </a:p>
+          <a:p xmlns:a="http://schemas.openxmlformats.org/drawingml/2006/main">
+            <a:r>
+              <a:t>- https://developers.google.com/apps-script/reference/spreadsheet/sheet</a:t>
+            </a:r>
+          </a:p>
+        </p:txBody>
+      </p:sp>
+      <p:sp>
+        <p:nvSpPr>
+          <p:cNvPr id="4" name="Slide Number Placeholder 3"/>
+          <p:cNvSpPr>
+            <a:spLocks xmlns:a="http://schemas.openxmlformats.org/drawingml/2006/main" noGrp="1"/>
+          </p:cNvSpPr>
+          <p:nvPr>
+            <p:ph type="sldNum" idx="5"/>
+          </p:nvPr>
+        </p:nvSpPr>
+        <p:spPr/>
+        <p:txBody>
+          <a:bodyPr xmlns:a="http://schemas.openxmlformats.org/drawingml/2006/main"/>
+          <a:lstStyle xmlns:a="http://schemas.openxmlformats.org/drawingml/2006/main"/>
+          <a:p xmlns:a="http://schemas.openxmlformats.org/drawingml/2006/main"/>
+        </p:txBody>
+      </p:sp>
+    </p:spTree>
+  </p:cSld>
+  <p:clrMapOvr>
+    <a:masterClrMapping xmlns:a="http://schemas.openxmlformats.org/drawingml/2006/main"/>
+  </p:clrMapOvr>
+</p:notes>
+</file>
+
+<file path=ppt/notesSlides/notesSlide10.xml><?xml version="1.0" encoding="utf-8"?>
+<p:notes xmlns:p="http://schemas.openxmlformats.org/presentationml/2006/main">
+  <p:cSld>
+    <p:spTree>
+      <p:nvGrpSpPr>
+        <p:cNvPr id="1" name=""/>
+        <p:cNvGrpSpPr/>
+        <p:nvPr/>
+      </p:nvGrpSpPr>
+      <p:grpSpPr>
+        <a:xfrm xmlns:a="http://schemas.openxmlformats.org/drawingml/2006/main"/>
+      </p:grpSpPr>
+      <p:sp>
+        <p:nvSpPr>
+          <p:cNvPr id="2" name="Slide Image Placeholder 1"/>
+          <p:cNvSpPr>
+            <a:spLocks xmlns:a="http://schemas.openxmlformats.org/drawingml/2006/main" noGrp="1"/>
+          </p:cNvSpPr>
+          <p:nvPr>
+            <p:ph type="sldImg" idx="0"/>
+          </p:nvPr>
+        </p:nvSpPr>
+        <p:spPr/>
+      </p:sp>
+      <p:sp>
+        <p:nvSpPr>
+          <p:cNvPr id="3" name="Notes Placeholder 2"/>
+          <p:cNvSpPr>
+            <a:spLocks xmlns:a="http://schemas.openxmlformats.org/drawingml/2006/main" noGrp="1"/>
+          </p:cNvSpPr>
+          <p:nvPr>
+            <p:ph type="body" idx="1"/>
+          </p:nvPr>
+        </p:nvSpPr>
+        <p:spPr/>
+        <p:txBody>
+          <a:bodyPr xmlns:a="http://schemas.openxmlformats.org/drawingml/2006/main"/>
+          <a:lstStyle xmlns:a="http://schemas.openxmlformats.org/drawingml/2006/main"/>
+          <a:p xmlns:a="http://schemas.openxmlformats.org/drawingml/2006/main">
+            <a:r>
+              <a:t>依症狀分流：空白、權限、資料、版本、重複提交。</a:t>
+            </a:r>
+          </a:p>
+          <a:p xmlns:a="http://schemas.openxmlformats.org/drawingml/2006/main">
+            <a:r>
+              <a:t/>
+            </a:r>
+          </a:p>
+          <a:p xmlns:a="http://schemas.openxmlformats.org/drawingml/2006/main">
+            <a:r>
+              <a:t>[Sources]</a:t>
+            </a:r>
+          </a:p>
+          <a:p xmlns:a="http://schemas.openxmlformats.org/drawingml/2006/main">
+            <a:r>
+              <a:t>- https://developers.google.com/apps-script/guides/web</a:t>
+            </a:r>
+          </a:p>
+          <a:p xmlns:a="http://schemas.openxmlformats.org/drawingml/2006/main">
+            <a:r>
+              <a:t>- https://developers.google.com/apps-script/guides/html/communication</a:t>
+            </a:r>
+          </a:p>
+          <a:p xmlns:a="http://schemas.openxmlformats.org/drawingml/2006/main">
+            <a:r>
+              <a:t>- https://developers.google.com/apps-script/reference/spreadsheet/sheet</a:t>
+            </a:r>
+          </a:p>
+        </p:txBody>
+      </p:sp>
+      <p:sp>
+        <p:nvSpPr>
+          <p:cNvPr id="4" name="Slide Number Placeholder 3"/>
+          <p:cNvSpPr>
+            <a:spLocks xmlns:a="http://schemas.openxmlformats.org/drawingml/2006/main" noGrp="1"/>
+          </p:cNvSpPr>
+          <p:nvPr>
+            <p:ph type="sldNum" idx="5"/>
+          </p:nvPr>
+        </p:nvSpPr>
+        <p:spPr/>
+        <p:txBody>
+          <a:bodyPr xmlns:a="http://schemas.openxmlformats.org/drawingml/2006/main"/>
+          <a:lstStyle xmlns:a="http://schemas.openxmlformats.org/drawingml/2006/main"/>
+          <a:p xmlns:a="http://schemas.openxmlformats.org/drawingml/2006/main"/>
+        </p:txBody>
+      </p:sp>
+    </p:spTree>
+  </p:cSld>
+  <p:clrMapOvr>
+    <a:masterClrMapping xmlns:a="http://schemas.openxmlformats.org/drawingml/2006/main"/>
+  </p:clrMapOvr>
+</p:notes>
+</file>
+
+<file path=ppt/notesSlides/notesSlide11.xml><?xml version="1.0" encoding="utf-8"?>
+<p:notes xmlns:p="http://schemas.openxmlformats.org/presentationml/2006/main">
+  <p:cSld>
+    <p:spTree>
+      <p:nvGrpSpPr>
+        <p:cNvPr id="1" name=""/>
+        <p:cNvGrpSpPr/>
+        <p:nvPr/>
+      </p:nvGrpSpPr>
+      <p:grpSpPr>
+        <a:xfrm xmlns:a="http://schemas.openxmlformats.org/drawingml/2006/main"/>
+      </p:grpSpPr>
+      <p:sp>
+        <p:nvSpPr>
+          <p:cNvPr id="2" name="Slide Image Placeholder 1"/>
+          <p:cNvSpPr>
+            <a:spLocks xmlns:a="http://schemas.openxmlformats.org/drawingml/2006/main" noGrp="1"/>
+          </p:cNvSpPr>
+          <p:nvPr>
+            <p:ph type="sldImg" idx="0"/>
+          </p:nvPr>
+        </p:nvSpPr>
+        <p:spPr/>
+      </p:sp>
+      <p:sp>
+        <p:nvSpPr>
+          <p:cNvPr id="3" name="Notes Placeholder 2"/>
+          <p:cNvSpPr>
+            <a:spLocks xmlns:a="http://schemas.openxmlformats.org/drawingml/2006/main" noGrp="1"/>
+          </p:cNvSpPr>
+          <p:nvPr>
+            <p:ph type="body" idx="1"/>
+          </p:nvPr>
+        </p:nvSpPr>
+        <p:spPr/>
+        <p:txBody>
+          <a:bodyPr xmlns:a="http://schemas.openxmlformats.org/drawingml/2006/main"/>
+          <a:lstStyle xmlns:a="http://schemas.openxmlformats.org/drawingml/2006/main"/>
+          <a:p xmlns:a="http://schemas.openxmlformats.org/drawingml/2006/main">
+            <a:r>
+              <a:t>請每人從資料中選一個下一堂真正會用的問題。</a:t>
+            </a:r>
+          </a:p>
+          <a:p xmlns:a="http://schemas.openxmlformats.org/drawingml/2006/main">
+            <a:r>
+              <a:t/>
+            </a:r>
+          </a:p>
+          <a:p xmlns:a="http://schemas.openxmlformats.org/drawingml/2006/main">
+            <a:r>
+              <a:t>[Sources]</a:t>
+            </a:r>
+          </a:p>
+          <a:p xmlns:a="http://schemas.openxmlformats.org/drawingml/2006/main">
+            <a:r>
+              <a:t>- https://developers.google.com/apps-script/guides/web</a:t>
+            </a:r>
+          </a:p>
+          <a:p xmlns:a="http://schemas.openxmlformats.org/drawingml/2006/main">
+            <a:r>
+              <a:t>- https://developers.google.com/apps-script/guides/html/communication</a:t>
+            </a:r>
+          </a:p>
+          <a:p xmlns:a="http://schemas.openxmlformats.org/drawingml/2006/main">
+            <a:r>
+              <a:t>- https://developers.google.com/apps-script/reference/spreadsheet/sheet</a:t>
+            </a:r>
+          </a:p>
+        </p:txBody>
+      </p:sp>
+      <p:sp>
+        <p:nvSpPr>
+          <p:cNvPr id="4" name="Slide Number Placeholder 3"/>
+          <p:cNvSpPr>
+            <a:spLocks xmlns:a="http://schemas.openxmlformats.org/drawingml/2006/main" noGrp="1"/>
+          </p:cNvSpPr>
+          <p:nvPr>
+            <p:ph type="sldNum" idx="5"/>
+          </p:nvPr>
+        </p:nvSpPr>
+        <p:spPr/>
+        <p:txBody>
+          <a:bodyPr xmlns:a="http://schemas.openxmlformats.org/drawingml/2006/main"/>
+          <a:lstStyle xmlns:a="http://schemas.openxmlformats.org/drawingml/2006/main"/>
+          <a:p xmlns:a="http://schemas.openxmlformats.org/drawingml/2006/main"/>
+        </p:txBody>
+      </p:sp>
+    </p:spTree>
+  </p:cSld>
+  <p:clrMapOvr>
+    <a:masterClrMapping xmlns:a="http://schemas.openxmlformats.org/drawingml/2006/main"/>
+  </p:clrMapOvr>
+</p:notes>
+</file>
+
+<file path=ppt/notesSlides/notesSlide12.xml><?xml version="1.0" encoding="utf-8"?>
+<p:notes xmlns:p="http://schemas.openxmlformats.org/presentationml/2006/main">
+  <p:cSld>
+    <p:spTree>
+      <p:nvGrpSpPr>
+        <p:cNvPr id="1" name=""/>
+        <p:cNvGrpSpPr/>
+        <p:nvPr/>
+      </p:nvGrpSpPr>
+      <p:grpSpPr>
+        <a:xfrm xmlns:a="http://schemas.openxmlformats.org/drawingml/2006/main"/>
+      </p:grpSpPr>
+      <p:sp>
+        <p:nvSpPr>
+          <p:cNvPr id="2" name="Slide Image Placeholder 1"/>
+          <p:cNvSpPr>
+            <a:spLocks xmlns:a="http://schemas.openxmlformats.org/drawingml/2006/main" noGrp="1"/>
+          </p:cNvSpPr>
+          <p:nvPr>
+            <p:ph type="sldImg" idx="0"/>
+          </p:nvPr>
+        </p:nvSpPr>
+        <p:spPr/>
+      </p:sp>
+      <p:sp>
+        <p:nvSpPr>
+          <p:cNvPr id="3" name="Notes Placeholder 2"/>
+          <p:cNvSpPr>
+            <a:spLocks xmlns:a="http://schemas.openxmlformats.org/drawingml/2006/main" noGrp="1"/>
+          </p:cNvSpPr>
+          <p:nvPr>
+            <p:ph type="body" idx="1"/>
+          </p:nvPr>
+        </p:nvSpPr>
+        <p:spPr/>
+        <p:txBody>
+          <a:bodyPr xmlns:a="http://schemas.openxmlformats.org/drawingml/2006/main"/>
+          <a:lstStyle xmlns:a="http://schemas.openxmlformats.org/drawingml/2006/main"/>
+          <a:p xmlns:a="http://schemas.openxmlformats.org/drawingml/2006/main">
+            <a:r>
+              <a:t>收尾：真正成果是一條可搬到問卷、回饋與闖關的資料路線。</a:t>
+            </a:r>
+          </a:p>
+          <a:p xmlns:a="http://schemas.openxmlformats.org/drawingml/2006/main">
+            <a:r>
+              <a:t/>
+            </a:r>
+          </a:p>
+          <a:p xmlns:a="http://schemas.openxmlformats.org/drawingml/2006/main">
+            <a:r>
+              <a:t>[Sources]</a:t>
+            </a:r>
+          </a:p>
+          <a:p xmlns:a="http://schemas.openxmlformats.org/drawingml/2006/main">
+            <a:r>
+              <a:t>- https://developers.google.com/apps-script/guides/web</a:t>
+            </a:r>
+          </a:p>
+          <a:p xmlns:a="http://schemas.openxmlformats.org/drawingml/2006/main">
+            <a:r>
+              <a:t>- https://developers.google.com/apps-script/guides/html/communication</a:t>
+            </a:r>
+          </a:p>
+          <a:p xmlns:a="http://schemas.openxmlformats.org/drawingml/2006/main">
+            <a:r>
+              <a:t>- https://developers.google.com/apps-script/reference/spreadsheet/sheet</a:t>
             </a:r>
           </a:p>
         </p:txBody>
@@ -534,7 +833,7 @@
           <a:lstStyle xmlns:a="http://schemas.openxmlformats.org/drawingml/2006/main"/>
           <a:p xmlns:a="http://schemas.openxmlformats.org/drawingml/2006/main">
             <a:r>
-              <a:t>講師提示：goal；請以學員自己的真實題目示範，不用虛構成果。</a:t>
+              <a:t>提醒學員可以使用教師標準版，不必先修完上一堂。</a:t>
             </a:r>
           </a:p>
           <a:p xmlns:a="http://schemas.openxmlformats.org/drawingml/2006/main">
@@ -549,7 +848,17 @@
           </a:p>
           <a:p xmlns:a="http://schemas.openxmlformats.org/drawingml/2006/main">
             <a:r>
-              <a:t>- 本頁主要為課程設計與使用者指定內容，無外部非平凡主張。</a:t>
+              <a:t>- https://developers.google.com/apps-script/guides/web</a:t>
+            </a:r>
+          </a:p>
+          <a:p xmlns:a="http://schemas.openxmlformats.org/drawingml/2006/main">
+            <a:r>
+              <a:t>- https://developers.google.com/apps-script/guides/html/communication</a:t>
+            </a:r>
+          </a:p>
+          <a:p xmlns:a="http://schemas.openxmlformats.org/drawingml/2006/main">
+            <a:r>
+              <a:t>- https://developers.google.com/apps-script/reference/spreadsheet/sheet</a:t>
             </a:r>
           </a:p>
         </p:txBody>
@@ -619,7 +928,7 @@
           <a:lstStyle xmlns:a="http://schemas.openxmlformats.org/drawingml/2006/main"/>
           <a:p xmlns:a="http://schemas.openxmlformats.org/drawingml/2006/main">
             <a:r>
-              <a:t>講師提示：key；請以學員自己的真實題目示範，不用虛構成果。</a:t>
+              <a:t>提問：哪一段學生看得到？哪一段負責碰試算表？</a:t>
             </a:r>
           </a:p>
           <a:p xmlns:a="http://schemas.openxmlformats.org/drawingml/2006/main">
@@ -634,7 +943,17 @@
           </a:p>
           <a:p xmlns:a="http://schemas.openxmlformats.org/drawingml/2006/main">
             <a:r>
-              <a:t>- 本頁主要為課程設計與使用者指定內容，無外部非平凡主張。</a:t>
+              <a:t>- https://developers.google.com/apps-script/guides/web</a:t>
+            </a:r>
+          </a:p>
+          <a:p xmlns:a="http://schemas.openxmlformats.org/drawingml/2006/main">
+            <a:r>
+              <a:t>- https://developers.google.com/apps-script/guides/html/communication</a:t>
+            </a:r>
+          </a:p>
+          <a:p xmlns:a="http://schemas.openxmlformats.org/drawingml/2006/main">
+            <a:r>
+              <a:t>- https://developers.google.com/apps-script/reference/spreadsheet/sheet</a:t>
             </a:r>
           </a:p>
         </p:txBody>
@@ -704,7 +1023,7 @@
           <a:lstStyle xmlns:a="http://schemas.openxmlformats.org/drawingml/2006/main"/>
           <a:p xmlns:a="http://schemas.openxmlformats.org/drawingml/2006/main">
             <a:r>
-              <a:t>講師提示：flow；請以學員自己的真實題目示範，不用虛構成果。</a:t>
+              <a:t>若自用版串接持續卡住，立刻切回教師版完成共同路線。</a:t>
             </a:r>
           </a:p>
           <a:p xmlns:a="http://schemas.openxmlformats.org/drawingml/2006/main">
@@ -719,7 +1038,17 @@
           </a:p>
           <a:p xmlns:a="http://schemas.openxmlformats.org/drawingml/2006/main">
             <a:r>
-              <a:t>- 本頁主要為課程設計與使用者指定內容，無外部非平凡主張。</a:t>
+              <a:t>- https://developers.google.com/apps-script/guides/web</a:t>
+            </a:r>
+          </a:p>
+          <a:p xmlns:a="http://schemas.openxmlformats.org/drawingml/2006/main">
+            <a:r>
+              <a:t>- https://developers.google.com/apps-script/guides/html/communication</a:t>
+            </a:r>
+          </a:p>
+          <a:p xmlns:a="http://schemas.openxmlformats.org/drawingml/2006/main">
+            <a:r>
+              <a:t>- https://developers.google.com/apps-script/reference/spreadsheet/sheet</a:t>
             </a:r>
           </a:p>
         </p:txBody>
@@ -789,7 +1118,7 @@
           <a:lstStyle xmlns:a="http://schemas.openxmlformats.org/drawingml/2006/main"/>
           <a:p xmlns:a="http://schemas.openxmlformats.org/drawingml/2006/main">
             <a:r>
-              <a:t>講師提示：prompt；請以學員自己的真實題目示範，不用虛構成果。</a:t>
+              <a:t>先人工填一列，讓學員理解每列代表一次作答。</a:t>
             </a:r>
           </a:p>
           <a:p xmlns:a="http://schemas.openxmlformats.org/drawingml/2006/main">
@@ -804,7 +1133,17 @@
           </a:p>
           <a:p xmlns:a="http://schemas.openxmlformats.org/drawingml/2006/main">
             <a:r>
-              <a:t>- 本頁主要為課程設計與使用者指定內容，無外部非平凡主張。</a:t>
+              <a:t>- https://developers.google.com/apps-script/guides/web</a:t>
+            </a:r>
+          </a:p>
+          <a:p xmlns:a="http://schemas.openxmlformats.org/drawingml/2006/main">
+            <a:r>
+              <a:t>- https://developers.google.com/apps-script/guides/html/communication</a:t>
+            </a:r>
+          </a:p>
+          <a:p xmlns:a="http://schemas.openxmlformats.org/drawingml/2006/main">
+            <a:r>
+              <a:t>- https://developers.google.com/apps-script/reference/spreadsheet/sheet</a:t>
             </a:r>
           </a:p>
         </p:txBody>
@@ -874,7 +1213,7 @@
           <a:lstStyle xmlns:a="http://schemas.openxmlformats.org/drawingml/2006/main"/>
           <a:p xmlns:a="http://schemas.openxmlformats.org/drawingml/2006/main">
             <a:r>
-              <a:t>講師提示：practice；請以學員自己的真實題目示範，不用虛構成果。</a:t>
+              <a:t>指出 doGet、saveQuizResult 與 appendRow，不逐行講完整程式。</a:t>
             </a:r>
           </a:p>
           <a:p xmlns:a="http://schemas.openxmlformats.org/drawingml/2006/main">
@@ -889,7 +1228,17 @@
           </a:p>
           <a:p xmlns:a="http://schemas.openxmlformats.org/drawingml/2006/main">
             <a:r>
-              <a:t>- 本頁主要為課程設計與使用者指定內容，無外部非平凡主張。</a:t>
+              <a:t>- https://developers.google.com/apps-script/guides/web</a:t>
+            </a:r>
+          </a:p>
+          <a:p xmlns:a="http://schemas.openxmlformats.org/drawingml/2006/main">
+            <a:r>
+              <a:t>- https://developers.google.com/apps-script/guides/html/communication</a:t>
+            </a:r>
+          </a:p>
+          <a:p xmlns:a="http://schemas.openxmlformats.org/drawingml/2006/main">
+            <a:r>
+              <a:t>- https://developers.google.com/apps-script/reference/spreadsheet/sheet</a:t>
             </a:r>
           </a:p>
         </p:txBody>
@@ -959,7 +1308,7 @@
           <a:lstStyle xmlns:a="http://schemas.openxmlformats.org/drawingml/2006/main"/>
           <a:p xmlns:a="http://schemas.openxmlformats.org/drawingml/2006/main">
             <a:r>
-              <a:t>講師提示：deliver；請以學員自己的真實題目示範，不用虛構成果。</a:t>
+              <a:t>強調非同步：傳送中、成功、失敗都需要回饋。</a:t>
             </a:r>
           </a:p>
           <a:p xmlns:a="http://schemas.openxmlformats.org/drawingml/2006/main">
@@ -974,7 +1323,17 @@
           </a:p>
           <a:p xmlns:a="http://schemas.openxmlformats.org/drawingml/2006/main">
             <a:r>
-              <a:t>- 本頁主要為課程設計與使用者指定內容，無外部非平凡主張。</a:t>
+              <a:t>- https://developers.google.com/apps-script/guides/web</a:t>
+            </a:r>
+          </a:p>
+          <a:p xmlns:a="http://schemas.openxmlformats.org/drawingml/2006/main">
+            <a:r>
+              <a:t>- https://developers.google.com/apps-script/guides/html/communication</a:t>
+            </a:r>
+          </a:p>
+          <a:p xmlns:a="http://schemas.openxmlformats.org/drawingml/2006/main">
+            <a:r>
+              <a:t>- https://developers.google.com/apps-script/reference/spreadsheet/sheet</a:t>
             </a:r>
           </a:p>
         </p:txBody>
@@ -1044,7 +1403,7 @@
           <a:lstStyle xmlns:a="http://schemas.openxmlformats.org/drawingml/2006/main"/>
           <a:p xmlns:a="http://schemas.openxmlformats.org/drawingml/2006/main">
             <a:r>
-              <a:t>講師提示：close；請以學員自己的真實題目示範，不用虛構成果。</a:t>
+              <a:t>正式網址一定要由另一個帳號或裝置測試。</a:t>
             </a:r>
           </a:p>
           <a:p xmlns:a="http://schemas.openxmlformats.org/drawingml/2006/main">
@@ -1059,7 +1418,112 @@
           </a:p>
           <a:p xmlns:a="http://schemas.openxmlformats.org/drawingml/2006/main">
             <a:r>
-              <a:t>- 本頁主要為課程設計與使用者指定內容，無外部非平凡主張。</a:t>
+              <a:t>- https://developers.google.com/apps-script/guides/web</a:t>
+            </a:r>
+          </a:p>
+          <a:p xmlns:a="http://schemas.openxmlformats.org/drawingml/2006/main">
+            <a:r>
+              <a:t>- https://developers.google.com/apps-script/guides/html/communication</a:t>
+            </a:r>
+          </a:p>
+          <a:p xmlns:a="http://schemas.openxmlformats.org/drawingml/2006/main">
+            <a:r>
+              <a:t>- https://developers.google.com/apps-script/reference/spreadsheet/sheet</a:t>
+            </a:r>
+          </a:p>
+        </p:txBody>
+      </p:sp>
+      <p:sp>
+        <p:nvSpPr>
+          <p:cNvPr id="4" name="Slide Number Placeholder 3"/>
+          <p:cNvSpPr>
+            <a:spLocks xmlns:a="http://schemas.openxmlformats.org/drawingml/2006/main" noGrp="1"/>
+          </p:cNvSpPr>
+          <p:nvPr>
+            <p:ph type="sldNum" idx="5"/>
+          </p:nvPr>
+        </p:nvSpPr>
+        <p:spPr/>
+        <p:txBody>
+          <a:bodyPr xmlns:a="http://schemas.openxmlformats.org/drawingml/2006/main"/>
+          <a:lstStyle xmlns:a="http://schemas.openxmlformats.org/drawingml/2006/main"/>
+          <a:p xmlns:a="http://schemas.openxmlformats.org/drawingml/2006/main"/>
+        </p:txBody>
+      </p:sp>
+    </p:spTree>
+  </p:cSld>
+  <p:clrMapOvr>
+    <a:masterClrMapping xmlns:a="http://schemas.openxmlformats.org/drawingml/2006/main"/>
+  </p:clrMapOvr>
+</p:notes>
+</file>
+
+<file path=ppt/notesSlides/notesSlide9.xml><?xml version="1.0" encoding="utf-8"?>
+<p:notes xmlns:p="http://schemas.openxmlformats.org/presentationml/2006/main">
+  <p:cSld>
+    <p:spTree>
+      <p:nvGrpSpPr>
+        <p:cNvPr id="1" name=""/>
+        <p:cNvGrpSpPr/>
+        <p:nvPr/>
+      </p:nvGrpSpPr>
+      <p:grpSpPr>
+        <a:xfrm xmlns:a="http://schemas.openxmlformats.org/drawingml/2006/main"/>
+      </p:grpSpPr>
+      <p:sp>
+        <p:nvSpPr>
+          <p:cNvPr id="2" name="Slide Image Placeholder 1"/>
+          <p:cNvSpPr>
+            <a:spLocks xmlns:a="http://schemas.openxmlformats.org/drawingml/2006/main" noGrp="1"/>
+          </p:cNvSpPr>
+          <p:nvPr>
+            <p:ph type="sldImg" idx="0"/>
+          </p:nvPr>
+        </p:nvSpPr>
+        <p:spPr/>
+      </p:sp>
+      <p:sp>
+        <p:nvSpPr>
+          <p:cNvPr id="3" name="Notes Placeholder 2"/>
+          <p:cNvSpPr>
+            <a:spLocks xmlns:a="http://schemas.openxmlformats.org/drawingml/2006/main" noGrp="1"/>
+          </p:cNvSpPr>
+          <p:nvPr>
+            <p:ph type="body" idx="1"/>
+          </p:nvPr>
+        </p:nvSpPr>
+        <p:spPr/>
+        <p:txBody>
+          <a:bodyPr xmlns:a="http://schemas.openxmlformats.org/drawingml/2006/main"/>
+          <a:lstStyle xmlns:a="http://schemas.openxmlformats.org/drawingml/2006/main"/>
+          <a:p xmlns:a="http://schemas.openxmlformats.org/drawingml/2006/main">
+            <a:r>
+              <a:t>救援卡以收到一列為通關；完成者再做資料支線。</a:t>
+            </a:r>
+          </a:p>
+          <a:p xmlns:a="http://schemas.openxmlformats.org/drawingml/2006/main">
+            <a:r>
+              <a:t/>
+            </a:r>
+          </a:p>
+          <a:p xmlns:a="http://schemas.openxmlformats.org/drawingml/2006/main">
+            <a:r>
+              <a:t>[Sources]</a:t>
+            </a:r>
+          </a:p>
+          <a:p xmlns:a="http://schemas.openxmlformats.org/drawingml/2006/main">
+            <a:r>
+              <a:t>- https://developers.google.com/apps-script/guides/web</a:t>
+            </a:r>
+          </a:p>
+          <a:p xmlns:a="http://schemas.openxmlformats.org/drawingml/2006/main">
+            <a:r>
+              <a:t>- https://developers.google.com/apps-script/guides/html/communication</a:t>
+            </a:r>
+          </a:p>
+          <a:p xmlns:a="http://schemas.openxmlformats.org/drawingml/2006/main">
+            <a:r>
+              <a:t>- https://developers.google.com/apps-script/reference/spreadsheet/sheet</a:t>
             </a:r>
           </a:p>
         </p:txBody>
@@ -1127,7 +1591,7 @@
   </p:cSld>
   <p:clrMap bg1="lt1" tx1="dk1" bg2="lt2" tx2="dk2" accent1="accent1" accent2="accent2" accent3="accent3" accent4="accent4" accent5="accent5" accent6="accent6" hlink="hlink" folHlink="folHlink"/>
   <p:sldLayoutIdLst>
-    <p:sldLayoutId xmlns:r="http://schemas.openxmlformats.org/officeDocument/2006/relationships" id="2147483649" r:id="R68217fe57c934f94"/>
+    <p:sldLayoutId xmlns:r="http://schemas.openxmlformats.org/officeDocument/2006/relationships" id="2147483649" r:id="Rce39056ac2b943d5"/>
   </p:sldLayoutIdLst>
   <p:txStyles>
     <p:titleStyle>
@@ -1739,6 +2203,7 @@
           <a:lstStyle xmlns:a="http://schemas.openxmlformats.org/drawingml/2006/main"/>
           <a:p xmlns:a="http://schemas.openxmlformats.org/drawingml/2006/main">
             <a:pPr>
+              <a:buNone/>
               <a:defRPr sz="1200" b="1">
                 <a:solidFill>
                   <a:srgbClr val="3D8DFF"/>
@@ -1789,6 +2254,7 @@
           <a:lstStyle xmlns:a="http://schemas.openxmlformats.org/drawingml/2006/main"/>
           <a:p xmlns:a="http://schemas.openxmlformats.org/drawingml/2006/main">
             <a:pPr>
+              <a:buNone/>
               <a:defRPr sz="3750" b="1">
                 <a:solidFill>
                   <a:srgbClr val="111827"/>
@@ -1801,7 +2267,7 @@
                   <a:srgbClr val="111827"/>
                 </a:solidFill>
               </a:rPr>
-              <a:t>Vibe 你的題庫：題庫產品設計</a:t>
+              <a:t>Gemini＋GAS 測驗成績系統</a:t>
             </a:r>
           </a:p>
         </p:txBody>
@@ -1839,6 +2305,7 @@
           <a:lstStyle xmlns:a="http://schemas.openxmlformats.org/drawingml/2006/main"/>
           <a:p xmlns:a="http://schemas.openxmlformats.org/drawingml/2006/main">
             <a:pPr>
+              <a:buNone/>
               <a:defRPr sz="1800">
                 <a:solidFill>
                   <a:srgbClr val="536273"/>
@@ -1851,7 +2318,7 @@
                   <a:srgbClr val="536273"/>
                 </a:solidFill>
               </a:rPr>
-              <a:t>用自然語言把一個想法變成可開發的題庫產品</a:t>
+              <a:t>再讓測驗「會收」：從作答結果到 Google 試算表</a:t>
             </a:r>
           </a:p>
         </p:txBody>
@@ -1924,6 +2391,7 @@
           <a:lstStyle xmlns:a="http://schemas.openxmlformats.org/drawingml/2006/main"/>
           <a:p xmlns:a="http://schemas.openxmlformats.org/drawingml/2006/main">
             <a:pPr algn="ctr">
+              <a:buNone/>
               <a:defRPr sz="4800" b="1">
                 <a:solidFill>
                   <a:srgbClr val="FFFFFF"/>
@@ -1974,6 +2442,7 @@
           <a:lstStyle xmlns:a="http://schemas.openxmlformats.org/drawingml/2006/main"/>
           <a:p xmlns:a="http://schemas.openxmlformats.org/drawingml/2006/main">
             <a:pPr algn="ctr">
+              <a:buNone/>
               <a:defRPr sz="1500" b="1">
                 <a:solidFill>
                   <a:srgbClr val="111827"/>
@@ -1991,6 +2460,7 @@
           </a:p>
           <a:p xmlns:a="http://schemas.openxmlformats.org/drawingml/2006/main">
             <a:pPr algn="ctr">
+              <a:buNone/>
               <a:defRPr sz="1500" b="1">
                 <a:solidFill>
                   <a:srgbClr val="111827"/>
@@ -2003,7 +2473,7 @@
                   <a:srgbClr val="111827"/>
                 </a:solidFill>
               </a:rPr>
-              <a:t>題庫需求 brief、資料欄位表、畫面草圖</a:t>
+              <a:t>Web App 網址、測驗紀錄、真人測試</a:t>
             </a:r>
           </a:p>
         </p:txBody>
@@ -2012,6 +2482,2040 @@
     <p:extLst>
       <p:ext uri="{BB962C8B-B14F-4D97-AF65-F5344CB8AC3E}">
         <p14:creationId xmlns:p14="http://schemas.microsoft.com/office/powerpoint/2010/main" val="1657483469"/>
+      </p:ext>
+    </p:extLst>
+  </p:cSld>
+</p:sld>
+</file>
+
+<file path=ppt/slides/slide10.xml><?xml version="1.0" encoding="utf-8"?>
+<p:sld xmlns:p="http://schemas.openxmlformats.org/presentationml/2006/main">
+  <p:cSld>
+    <p:bg>
+      <p:bgPr>
+        <a:solidFill xmlns:a="http://schemas.openxmlformats.org/drawingml/2006/main">
+          <a:srgbClr val="FFFFFF"/>
+        </a:solidFill>
+      </p:bgPr>
+    </p:bg>
+    <p:spTree>
+      <p:nvGrpSpPr>
+        <p:cNvPr id="1" name=""/>
+        <p:cNvGrpSpPr/>
+        <p:nvPr/>
+      </p:nvGrpSpPr>
+      <p:grpSpPr>
+        <a:xfrm xmlns:a="http://schemas.openxmlformats.org/drawingml/2006/main"/>
+      </p:grpSpPr>
+      <p:sp>
+        <p:nvSpPr>
+          <p:cNvPr id="21" name="">
+            <a:extLst xmlns:a="http://schemas.openxmlformats.org/drawingml/2006/main">
+              <a:ext uri="{FF2B5EF4-FFF2-40B4-BE49-F238E27FC236}">
+                <a16:creationId xmlns:a16="http://schemas.microsoft.com/office/drawing/2014/main" id="{63A3043E-B6F6-4CC2-8048-9193993539BD}"/>
+              </a:ext>
+            </a:extLst>
+          </p:cNvPr>
+          <p:cNvSpPr>
+            <a:spLocks xmlns:a="http://schemas.openxmlformats.org/drawingml/2006/main" noGrp="1"/>
+          </p:cNvSpPr>
+          <p:nvPr/>
+        </p:nvSpPr>
+        <p:spPr>
+          <a:xfrm xmlns:a="http://schemas.openxmlformats.org/drawingml/2006/main">
+            <a:off x="609600" y="323850"/>
+            <a:ext cx="5715000" cy="228600"/>
+          </a:xfrm>
+          <a:prstGeom xmlns:a="http://schemas.openxmlformats.org/drawingml/2006/main" prst="rect">
+            <a:avLst/>
+          </a:prstGeom>
+          <a:noFill xmlns:a="http://schemas.openxmlformats.org/drawingml/2006/main"/>
+          <a:ln xmlns:a="http://schemas.openxmlformats.org/drawingml/2006/main" w="0">
+            <a:noFill/>
+            <a:prstDash val="solid"/>
+          </a:ln>
+        </p:spPr>
+        <p:txBody>
+          <a:bodyPr xmlns:a="http://schemas.openxmlformats.org/drawingml/2006/main"/>
+          <a:lstStyle xmlns:a="http://schemas.openxmlformats.org/drawingml/2006/main"/>
+          <a:p xmlns:a="http://schemas.openxmlformats.org/drawingml/2006/main">
+            <a:pPr>
+              <a:buNone/>
+              <a:defRPr sz="975" b="1">
+                <a:solidFill>
+                  <a:srgbClr val="3D8DFF"/>
+                </a:solidFill>
+              </a:defRPr>
+            </a:pPr>
+            <a:r>
+              <a:rPr sz="975" b="1">
+                <a:solidFill>
+                  <a:srgbClr val="3D8DFF"/>
+                </a:solidFill>
+              </a:rPr>
+              <a:t>AI 工具實戰進階班 / 第 03 堂</a:t>
+            </a:r>
+          </a:p>
+        </p:txBody>
+      </p:sp>
+      <p:sp>
+        <p:nvSpPr>
+          <p:cNvPr id="2" name="">
+            <a:extLst xmlns:a="http://schemas.openxmlformats.org/drawingml/2006/main">
+              <a:ext uri="{FF2B5EF4-FFF2-40B4-BE49-F238E27FC236}">
+                <a16:creationId xmlns:a16="http://schemas.microsoft.com/office/drawing/2014/main" id="{77FA6CF0-F610-45B8-A116-FDFF50873F46}"/>
+              </a:ext>
+            </a:extLst>
+          </p:cNvPr>
+          <p:cNvSpPr>
+            <a:spLocks xmlns:a="http://schemas.openxmlformats.org/drawingml/2006/main" noGrp="1"/>
+          </p:cNvSpPr>
+          <p:nvPr/>
+        </p:nvSpPr>
+        <p:spPr>
+          <a:xfrm xmlns:a="http://schemas.openxmlformats.org/drawingml/2006/main">
+            <a:off x="609600" y="647700"/>
+            <a:ext cx="10668000" cy="533400"/>
+          </a:xfrm>
+          <a:prstGeom xmlns:a="http://schemas.openxmlformats.org/drawingml/2006/main" prst="rect">
+            <a:avLst/>
+          </a:prstGeom>
+          <a:noFill xmlns:a="http://schemas.openxmlformats.org/drawingml/2006/main"/>
+          <a:ln xmlns:a="http://schemas.openxmlformats.org/drawingml/2006/main" w="0">
+            <a:noFill/>
+            <a:prstDash val="solid"/>
+          </a:ln>
+        </p:spPr>
+        <p:txBody>
+          <a:bodyPr xmlns:a="http://schemas.openxmlformats.org/drawingml/2006/main"/>
+          <a:lstStyle xmlns:a="http://schemas.openxmlformats.org/drawingml/2006/main"/>
+          <a:p xmlns:a="http://schemas.openxmlformats.org/drawingml/2006/main">
+            <a:pPr>
+              <a:buNone/>
+              <a:defRPr sz="2700" b="1">
+                <a:solidFill>
+                  <a:srgbClr val="111827"/>
+                </a:solidFill>
+              </a:defRPr>
+            </a:pPr>
+            <a:r>
+              <a:rPr sz="2700" b="1">
+                <a:solidFill>
+                  <a:srgbClr val="111827"/>
+                </a:solidFill>
+              </a:rPr>
+              <a:t>GAS 急診室</a:t>
+            </a:r>
+          </a:p>
+        </p:txBody>
+      </p:sp>
+      <p:sp>
+        <p:nvSpPr>
+          <p:cNvPr id="3" name="">
+            <a:extLst xmlns:a="http://schemas.openxmlformats.org/drawingml/2006/main">
+              <a:ext uri="{FF2B5EF4-FFF2-40B4-BE49-F238E27FC236}">
+                <a16:creationId xmlns:a16="http://schemas.microsoft.com/office/drawing/2014/main" id="{F947B0AD-2D0C-4104-B074-72386EB77BF4}"/>
+              </a:ext>
+            </a:extLst>
+          </p:cNvPr>
+          <p:cNvSpPr>
+            <a:spLocks xmlns:a="http://schemas.openxmlformats.org/drawingml/2006/main" noGrp="1"/>
+          </p:cNvSpPr>
+          <p:nvPr/>
+        </p:nvSpPr>
+        <p:spPr>
+          <a:xfrm xmlns:a="http://schemas.openxmlformats.org/drawingml/2006/main">
+            <a:off x="11049000" y="342900"/>
+            <a:ext cx="533400" cy="228600"/>
+          </a:xfrm>
+          <a:prstGeom xmlns:a="http://schemas.openxmlformats.org/drawingml/2006/main" prst="rect">
+            <a:avLst/>
+          </a:prstGeom>
+          <a:noFill xmlns:a="http://schemas.openxmlformats.org/drawingml/2006/main"/>
+          <a:ln xmlns:a="http://schemas.openxmlformats.org/drawingml/2006/main" w="0">
+            <a:noFill/>
+            <a:prstDash val="solid"/>
+          </a:ln>
+        </p:spPr>
+        <p:txBody>
+          <a:bodyPr xmlns:a="http://schemas.openxmlformats.org/drawingml/2006/main"/>
+          <a:lstStyle xmlns:a="http://schemas.openxmlformats.org/drawingml/2006/main"/>
+          <a:p xmlns:a="http://schemas.openxmlformats.org/drawingml/2006/main">
+            <a:pPr algn="r">
+              <a:buNone/>
+              <a:defRPr sz="1050" b="1">
+                <a:solidFill>
+                  <a:srgbClr val="536273"/>
+                </a:solidFill>
+              </a:defRPr>
+            </a:pPr>
+            <a:r>
+              <a:rPr sz="1050" b="1">
+                <a:solidFill>
+                  <a:srgbClr val="536273"/>
+                </a:solidFill>
+              </a:rPr>
+              <a:t>10</a:t>
+            </a:r>
+          </a:p>
+        </p:txBody>
+      </p:sp>
+      <p:sp>
+        <p:nvSpPr>
+          <p:cNvPr id="4" name="">
+            <a:extLst xmlns:a="http://schemas.openxmlformats.org/drawingml/2006/main">
+              <a:ext uri="{FF2B5EF4-FFF2-40B4-BE49-F238E27FC236}">
+                <a16:creationId xmlns:a16="http://schemas.microsoft.com/office/drawing/2014/main" id="{CE65D2F4-9A9B-47C6-8CB0-5494698365F9}"/>
+              </a:ext>
+            </a:extLst>
+          </p:cNvPr>
+          <p:cNvSpPr>
+            <a:spLocks xmlns:a="http://schemas.openxmlformats.org/drawingml/2006/main" noGrp="1"/>
+          </p:cNvSpPr>
+          <p:nvPr/>
+        </p:nvSpPr>
+        <p:spPr>
+          <a:xfrm xmlns:a="http://schemas.openxmlformats.org/drawingml/2006/main">
+            <a:off x="609600" y="1314450"/>
+            <a:ext cx="10972800" cy="0"/>
+          </a:xfrm>
+          <a:prstGeom xmlns:a="http://schemas.openxmlformats.org/drawingml/2006/main" prst="line">
+            <a:avLst/>
+          </a:prstGeom>
+          <a:noFill xmlns:a="http://schemas.openxmlformats.org/drawingml/2006/main"/>
+          <a:ln xmlns:a="http://schemas.openxmlformats.org/drawingml/2006/main" w="9525">
+            <a:solidFill>
+              <a:srgbClr val="D7DEE7"/>
+            </a:solidFill>
+            <a:prstDash val="solid"/>
+          </a:ln>
+        </p:spPr>
+      </p:sp>
+      <p:sp>
+        <p:nvSpPr>
+          <p:cNvPr id="5" name="">
+            <a:extLst xmlns:a="http://schemas.openxmlformats.org/drawingml/2006/main">
+              <a:ext uri="{FF2B5EF4-FFF2-40B4-BE49-F238E27FC236}">
+                <a16:creationId xmlns:a16="http://schemas.microsoft.com/office/drawing/2014/main" id="{38259E0F-6369-4B66-8B23-76C9EB6C8909}"/>
+              </a:ext>
+            </a:extLst>
+          </p:cNvPr>
+          <p:cNvSpPr>
+            <a:spLocks xmlns:a="http://schemas.openxmlformats.org/drawingml/2006/main" noGrp="1"/>
+          </p:cNvSpPr>
+          <p:nvPr/>
+        </p:nvSpPr>
+        <p:spPr>
+          <a:xfrm xmlns:a="http://schemas.openxmlformats.org/drawingml/2006/main">
+            <a:off x="609600" y="1695450"/>
+            <a:ext cx="8572500" cy="361950"/>
+          </a:xfrm>
+          <a:prstGeom xmlns:a="http://schemas.openxmlformats.org/drawingml/2006/main" prst="rect">
+            <a:avLst/>
+          </a:prstGeom>
+          <a:noFill xmlns:a="http://schemas.openxmlformats.org/drawingml/2006/main"/>
+          <a:ln xmlns:a="http://schemas.openxmlformats.org/drawingml/2006/main" w="0">
+            <a:noFill/>
+            <a:prstDash val="solid"/>
+          </a:ln>
+        </p:spPr>
+        <p:txBody>
+          <a:bodyPr xmlns:a="http://schemas.openxmlformats.org/drawingml/2006/main"/>
+          <a:lstStyle xmlns:a="http://schemas.openxmlformats.org/drawingml/2006/main"/>
+          <a:p xmlns:a="http://schemas.openxmlformats.org/drawingml/2006/main">
+            <a:pPr>
+              <a:buNone/>
+              <a:defRPr sz="2025" b="1">
+                <a:solidFill>
+                  <a:srgbClr val="111827"/>
+                </a:solidFill>
+              </a:defRPr>
+            </a:pPr>
+            <a:r>
+              <a:rPr sz="2025" b="1">
+                <a:solidFill>
+                  <a:srgbClr val="111827"/>
+                </a:solidFill>
+              </a:rPr>
+              <a:t>先依症狀檢查，不要立刻重寫整個專案：</a:t>
+            </a:r>
+          </a:p>
+        </p:txBody>
+      </p:sp>
+      <p:sp>
+        <p:nvSpPr>
+          <p:cNvPr id="6" name="">
+            <a:extLst xmlns:a="http://schemas.openxmlformats.org/drawingml/2006/main">
+              <a:ext uri="{FF2B5EF4-FFF2-40B4-BE49-F238E27FC236}">
+                <a16:creationId xmlns:a16="http://schemas.microsoft.com/office/drawing/2014/main" id="{B7780C3C-5636-4699-8EDA-E1876269132D}"/>
+              </a:ext>
+            </a:extLst>
+          </p:cNvPr>
+          <p:cNvSpPr>
+            <a:spLocks xmlns:a="http://schemas.openxmlformats.org/drawingml/2006/main" noGrp="1"/>
+          </p:cNvSpPr>
+          <p:nvPr/>
+        </p:nvSpPr>
+        <p:spPr>
+          <a:xfrm xmlns:a="http://schemas.openxmlformats.org/drawingml/2006/main">
+            <a:off x="609600" y="2381250"/>
+            <a:ext cx="3048000" cy="857250"/>
+          </a:xfrm>
+          <a:prstGeom xmlns:a="http://schemas.openxmlformats.org/drawingml/2006/main" prst="roundRect">
+            <a:avLst>
+              <a:gd name="adj" fmla="val 8889"/>
+            </a:avLst>
+          </a:prstGeom>
+          <a:solidFill xmlns:a="http://schemas.openxmlformats.org/drawingml/2006/main">
+            <a:srgbClr val="3D8DFF">
+              <a:alpha val="13333"/>
+            </a:srgbClr>
+          </a:solidFill>
+          <a:ln xmlns:a="http://schemas.openxmlformats.org/drawingml/2006/main" w="9525">
+            <a:solidFill>
+              <a:srgbClr val="3D8DFF"/>
+            </a:solidFill>
+            <a:prstDash val="solid"/>
+          </a:ln>
+        </p:spPr>
+      </p:sp>
+      <p:sp>
+        <p:nvSpPr>
+          <p:cNvPr id="7" name="">
+            <a:extLst xmlns:a="http://schemas.openxmlformats.org/drawingml/2006/main">
+              <a:ext uri="{FF2B5EF4-FFF2-40B4-BE49-F238E27FC236}">
+                <a16:creationId xmlns:a16="http://schemas.microsoft.com/office/drawing/2014/main" id="{3422DD70-C0F4-4EAD-8E0E-B6ED220FE711}"/>
+              </a:ext>
+            </a:extLst>
+          </p:cNvPr>
+          <p:cNvSpPr>
+            <a:spLocks xmlns:a="http://schemas.openxmlformats.org/drawingml/2006/main" noGrp="1"/>
+          </p:cNvSpPr>
+          <p:nvPr/>
+        </p:nvSpPr>
+        <p:spPr>
+          <a:xfrm xmlns:a="http://schemas.openxmlformats.org/drawingml/2006/main">
+            <a:off x="800100" y="2533650"/>
+            <a:ext cx="952500" cy="209550"/>
+          </a:xfrm>
+          <a:prstGeom xmlns:a="http://schemas.openxmlformats.org/drawingml/2006/main" prst="rect">
+            <a:avLst/>
+          </a:prstGeom>
+          <a:noFill xmlns:a="http://schemas.openxmlformats.org/drawingml/2006/main"/>
+          <a:ln xmlns:a="http://schemas.openxmlformats.org/drawingml/2006/main" w="0">
+            <a:noFill/>
+            <a:prstDash val="solid"/>
+          </a:ln>
+        </p:spPr>
+        <p:txBody>
+          <a:bodyPr xmlns:a="http://schemas.openxmlformats.org/drawingml/2006/main"/>
+          <a:lstStyle xmlns:a="http://schemas.openxmlformats.org/drawingml/2006/main"/>
+          <a:p xmlns:a="http://schemas.openxmlformats.org/drawingml/2006/main">
+            <a:pPr>
+              <a:buNone/>
+              <a:defRPr sz="1050" b="1">
+                <a:solidFill>
+                  <a:srgbClr val="3D8DFF"/>
+                </a:solidFill>
+              </a:defRPr>
+            </a:pPr>
+            <a:r>
+              <a:rPr sz="1050" b="1">
+                <a:solidFill>
+                  <a:srgbClr val="3D8DFF"/>
+                </a:solidFill>
+              </a:rPr>
+              <a:t>症狀 1</a:t>
+            </a:r>
+          </a:p>
+        </p:txBody>
+      </p:sp>
+      <p:sp>
+        <p:nvSpPr>
+          <p:cNvPr id="8" name="">
+            <a:extLst xmlns:a="http://schemas.openxmlformats.org/drawingml/2006/main">
+              <a:ext uri="{FF2B5EF4-FFF2-40B4-BE49-F238E27FC236}">
+                <a16:creationId xmlns:a16="http://schemas.microsoft.com/office/drawing/2014/main" id="{6349732E-F895-4D7E-B7A8-EB40B70F88B8}"/>
+              </a:ext>
+            </a:extLst>
+          </p:cNvPr>
+          <p:cNvSpPr>
+            <a:spLocks xmlns:a="http://schemas.openxmlformats.org/drawingml/2006/main" noGrp="1"/>
+          </p:cNvSpPr>
+          <p:nvPr/>
+        </p:nvSpPr>
+        <p:spPr>
+          <a:xfrm xmlns:a="http://schemas.openxmlformats.org/drawingml/2006/main">
+            <a:off x="800100" y="2819400"/>
+            <a:ext cx="2667000" cy="285750"/>
+          </a:xfrm>
+          <a:prstGeom xmlns:a="http://schemas.openxmlformats.org/drawingml/2006/main" prst="rect">
+            <a:avLst/>
+          </a:prstGeom>
+          <a:noFill xmlns:a="http://schemas.openxmlformats.org/drawingml/2006/main"/>
+          <a:ln xmlns:a="http://schemas.openxmlformats.org/drawingml/2006/main" w="0">
+            <a:noFill/>
+            <a:prstDash val="solid"/>
+          </a:ln>
+        </p:spPr>
+        <p:txBody>
+          <a:bodyPr xmlns:a="http://schemas.openxmlformats.org/drawingml/2006/main"/>
+          <a:lstStyle xmlns:a="http://schemas.openxmlformats.org/drawingml/2006/main"/>
+          <a:p xmlns:a="http://schemas.openxmlformats.org/drawingml/2006/main">
+            <a:pPr>
+              <a:buNone/>
+              <a:defRPr sz="1575" b="1">
+                <a:solidFill>
+                  <a:srgbClr val="111827"/>
+                </a:solidFill>
+              </a:defRPr>
+            </a:pPr>
+            <a:r>
+              <a:rPr sz="1575" b="1">
+                <a:solidFill>
+                  <a:srgbClr val="111827"/>
+                </a:solidFill>
+              </a:rPr>
+              <a:t>開啟空白</a:t>
+            </a:r>
+          </a:p>
+        </p:txBody>
+      </p:sp>
+      <p:sp>
+        <p:nvSpPr>
+          <p:cNvPr id="9" name="">
+            <a:extLst xmlns:a="http://schemas.openxmlformats.org/drawingml/2006/main">
+              <a:ext uri="{FF2B5EF4-FFF2-40B4-BE49-F238E27FC236}">
+                <a16:creationId xmlns:a16="http://schemas.microsoft.com/office/drawing/2014/main" id="{F7C7DB6D-BCBF-45F6-AFB6-B0D24125C5CF}"/>
+              </a:ext>
+            </a:extLst>
+          </p:cNvPr>
+          <p:cNvSpPr>
+            <a:spLocks xmlns:a="http://schemas.openxmlformats.org/drawingml/2006/main" noGrp="1"/>
+          </p:cNvSpPr>
+          <p:nvPr/>
+        </p:nvSpPr>
+        <p:spPr>
+          <a:xfrm xmlns:a="http://schemas.openxmlformats.org/drawingml/2006/main">
+            <a:off x="4229100" y="2381250"/>
+            <a:ext cx="3048000" cy="857250"/>
+          </a:xfrm>
+          <a:prstGeom xmlns:a="http://schemas.openxmlformats.org/drawingml/2006/main" prst="roundRect">
+            <a:avLst>
+              <a:gd name="adj" fmla="val 8889"/>
+            </a:avLst>
+          </a:prstGeom>
+          <a:solidFill xmlns:a="http://schemas.openxmlformats.org/drawingml/2006/main">
+            <a:srgbClr val="E3A62F">
+              <a:alpha val="20000"/>
+            </a:srgbClr>
+          </a:solidFill>
+          <a:ln xmlns:a="http://schemas.openxmlformats.org/drawingml/2006/main" w="9525">
+            <a:solidFill>
+              <a:srgbClr val="E3A62F"/>
+            </a:solidFill>
+            <a:prstDash val="solid"/>
+          </a:ln>
+        </p:spPr>
+      </p:sp>
+      <p:sp>
+        <p:nvSpPr>
+          <p:cNvPr id="10" name="">
+            <a:extLst xmlns:a="http://schemas.openxmlformats.org/drawingml/2006/main">
+              <a:ext uri="{FF2B5EF4-FFF2-40B4-BE49-F238E27FC236}">
+                <a16:creationId xmlns:a16="http://schemas.microsoft.com/office/drawing/2014/main" id="{859EF4A8-2025-4451-847D-D93D6D909468}"/>
+              </a:ext>
+            </a:extLst>
+          </p:cNvPr>
+          <p:cNvSpPr>
+            <a:spLocks xmlns:a="http://schemas.openxmlformats.org/drawingml/2006/main" noGrp="1"/>
+          </p:cNvSpPr>
+          <p:nvPr/>
+        </p:nvSpPr>
+        <p:spPr>
+          <a:xfrm xmlns:a="http://schemas.openxmlformats.org/drawingml/2006/main">
+            <a:off x="4419600" y="2533650"/>
+            <a:ext cx="952500" cy="209550"/>
+          </a:xfrm>
+          <a:prstGeom xmlns:a="http://schemas.openxmlformats.org/drawingml/2006/main" prst="rect">
+            <a:avLst/>
+          </a:prstGeom>
+          <a:noFill xmlns:a="http://schemas.openxmlformats.org/drawingml/2006/main"/>
+          <a:ln xmlns:a="http://schemas.openxmlformats.org/drawingml/2006/main" w="0">
+            <a:noFill/>
+            <a:prstDash val="solid"/>
+          </a:ln>
+        </p:spPr>
+        <p:txBody>
+          <a:bodyPr xmlns:a="http://schemas.openxmlformats.org/drawingml/2006/main"/>
+          <a:lstStyle xmlns:a="http://schemas.openxmlformats.org/drawingml/2006/main"/>
+          <a:p xmlns:a="http://schemas.openxmlformats.org/drawingml/2006/main">
+            <a:pPr>
+              <a:buNone/>
+              <a:defRPr sz="1050" b="1">
+                <a:solidFill>
+                  <a:srgbClr val="E3A62F"/>
+                </a:solidFill>
+              </a:defRPr>
+            </a:pPr>
+            <a:r>
+              <a:rPr sz="1050" b="1">
+                <a:solidFill>
+                  <a:srgbClr val="E3A62F"/>
+                </a:solidFill>
+              </a:rPr>
+              <a:t>症狀 2</a:t>
+            </a:r>
+          </a:p>
+        </p:txBody>
+      </p:sp>
+      <p:sp>
+        <p:nvSpPr>
+          <p:cNvPr id="11" name="">
+            <a:extLst xmlns:a="http://schemas.openxmlformats.org/drawingml/2006/main">
+              <a:ext uri="{FF2B5EF4-FFF2-40B4-BE49-F238E27FC236}">
+                <a16:creationId xmlns:a16="http://schemas.microsoft.com/office/drawing/2014/main" id="{A648CC2A-E84D-4A27-83BC-8A4FBD25FD70}"/>
+              </a:ext>
+            </a:extLst>
+          </p:cNvPr>
+          <p:cNvSpPr>
+            <a:spLocks xmlns:a="http://schemas.openxmlformats.org/drawingml/2006/main" noGrp="1"/>
+          </p:cNvSpPr>
+          <p:nvPr/>
+        </p:nvSpPr>
+        <p:spPr>
+          <a:xfrm xmlns:a="http://schemas.openxmlformats.org/drawingml/2006/main">
+            <a:off x="4419600" y="2819400"/>
+            <a:ext cx="2667000" cy="285750"/>
+          </a:xfrm>
+          <a:prstGeom xmlns:a="http://schemas.openxmlformats.org/drawingml/2006/main" prst="rect">
+            <a:avLst/>
+          </a:prstGeom>
+          <a:noFill xmlns:a="http://schemas.openxmlformats.org/drawingml/2006/main"/>
+          <a:ln xmlns:a="http://schemas.openxmlformats.org/drawingml/2006/main" w="0">
+            <a:noFill/>
+            <a:prstDash val="solid"/>
+          </a:ln>
+        </p:spPr>
+        <p:txBody>
+          <a:bodyPr xmlns:a="http://schemas.openxmlformats.org/drawingml/2006/main"/>
+          <a:lstStyle xmlns:a="http://schemas.openxmlformats.org/drawingml/2006/main"/>
+          <a:p xmlns:a="http://schemas.openxmlformats.org/drawingml/2006/main">
+            <a:pPr>
+              <a:buNone/>
+              <a:defRPr sz="1575" b="1">
+                <a:solidFill>
+                  <a:srgbClr val="111827"/>
+                </a:solidFill>
+              </a:defRPr>
+            </a:pPr>
+            <a:r>
+              <a:rPr sz="1575" b="1">
+                <a:solidFill>
+                  <a:srgbClr val="111827"/>
+                </a:solidFill>
+              </a:rPr>
+              <a:t>送出沒資料</a:t>
+            </a:r>
+          </a:p>
+        </p:txBody>
+      </p:sp>
+      <p:sp>
+        <p:nvSpPr>
+          <p:cNvPr id="12" name="">
+            <a:extLst xmlns:a="http://schemas.openxmlformats.org/drawingml/2006/main">
+              <a:ext uri="{FF2B5EF4-FFF2-40B4-BE49-F238E27FC236}">
+                <a16:creationId xmlns:a16="http://schemas.microsoft.com/office/drawing/2014/main" id="{7B8F03FE-B619-4924-8763-C9419F3D7F88}"/>
+              </a:ext>
+            </a:extLst>
+          </p:cNvPr>
+          <p:cNvSpPr>
+            <a:spLocks xmlns:a="http://schemas.openxmlformats.org/drawingml/2006/main" noGrp="1"/>
+          </p:cNvSpPr>
+          <p:nvPr/>
+        </p:nvSpPr>
+        <p:spPr>
+          <a:xfrm xmlns:a="http://schemas.openxmlformats.org/drawingml/2006/main">
+            <a:off x="7848600" y="2381250"/>
+            <a:ext cx="3048000" cy="857250"/>
+          </a:xfrm>
+          <a:prstGeom xmlns:a="http://schemas.openxmlformats.org/drawingml/2006/main" prst="roundRect">
+            <a:avLst>
+              <a:gd name="adj" fmla="val 8889"/>
+            </a:avLst>
+          </a:prstGeom>
+          <a:solidFill xmlns:a="http://schemas.openxmlformats.org/drawingml/2006/main">
+            <a:srgbClr val="3D8DFF">
+              <a:alpha val="13333"/>
+            </a:srgbClr>
+          </a:solidFill>
+          <a:ln xmlns:a="http://schemas.openxmlformats.org/drawingml/2006/main" w="9525">
+            <a:solidFill>
+              <a:srgbClr val="3D8DFF"/>
+            </a:solidFill>
+            <a:prstDash val="solid"/>
+          </a:ln>
+        </p:spPr>
+      </p:sp>
+      <p:sp>
+        <p:nvSpPr>
+          <p:cNvPr id="13" name="">
+            <a:extLst xmlns:a="http://schemas.openxmlformats.org/drawingml/2006/main">
+              <a:ext uri="{FF2B5EF4-FFF2-40B4-BE49-F238E27FC236}">
+                <a16:creationId xmlns:a16="http://schemas.microsoft.com/office/drawing/2014/main" id="{E6E5B351-67E9-46E6-9021-B9833086FC49}"/>
+              </a:ext>
+            </a:extLst>
+          </p:cNvPr>
+          <p:cNvSpPr>
+            <a:spLocks xmlns:a="http://schemas.openxmlformats.org/drawingml/2006/main" noGrp="1"/>
+          </p:cNvSpPr>
+          <p:nvPr/>
+        </p:nvSpPr>
+        <p:spPr>
+          <a:xfrm xmlns:a="http://schemas.openxmlformats.org/drawingml/2006/main">
+            <a:off x="8039100" y="2533650"/>
+            <a:ext cx="952500" cy="209550"/>
+          </a:xfrm>
+          <a:prstGeom xmlns:a="http://schemas.openxmlformats.org/drawingml/2006/main" prst="rect">
+            <a:avLst/>
+          </a:prstGeom>
+          <a:noFill xmlns:a="http://schemas.openxmlformats.org/drawingml/2006/main"/>
+          <a:ln xmlns:a="http://schemas.openxmlformats.org/drawingml/2006/main" w="0">
+            <a:noFill/>
+            <a:prstDash val="solid"/>
+          </a:ln>
+        </p:spPr>
+        <p:txBody>
+          <a:bodyPr xmlns:a="http://schemas.openxmlformats.org/drawingml/2006/main"/>
+          <a:lstStyle xmlns:a="http://schemas.openxmlformats.org/drawingml/2006/main"/>
+          <a:p xmlns:a="http://schemas.openxmlformats.org/drawingml/2006/main">
+            <a:pPr>
+              <a:buNone/>
+              <a:defRPr sz="1050" b="1">
+                <a:solidFill>
+                  <a:srgbClr val="3D8DFF"/>
+                </a:solidFill>
+              </a:defRPr>
+            </a:pPr>
+            <a:r>
+              <a:rPr sz="1050" b="1">
+                <a:solidFill>
+                  <a:srgbClr val="3D8DFF"/>
+                </a:solidFill>
+              </a:rPr>
+              <a:t>症狀 3</a:t>
+            </a:r>
+          </a:p>
+        </p:txBody>
+      </p:sp>
+      <p:sp>
+        <p:nvSpPr>
+          <p:cNvPr id="14" name="">
+            <a:extLst xmlns:a="http://schemas.openxmlformats.org/drawingml/2006/main">
+              <a:ext uri="{FF2B5EF4-FFF2-40B4-BE49-F238E27FC236}">
+                <a16:creationId xmlns:a16="http://schemas.microsoft.com/office/drawing/2014/main" id="{83AD6C09-746E-44C2-83AC-24E2A8BF86F8}"/>
+              </a:ext>
+            </a:extLst>
+          </p:cNvPr>
+          <p:cNvSpPr>
+            <a:spLocks xmlns:a="http://schemas.openxmlformats.org/drawingml/2006/main" noGrp="1"/>
+          </p:cNvSpPr>
+          <p:nvPr/>
+        </p:nvSpPr>
+        <p:spPr>
+          <a:xfrm xmlns:a="http://schemas.openxmlformats.org/drawingml/2006/main">
+            <a:off x="8039100" y="2819400"/>
+            <a:ext cx="2667000" cy="285750"/>
+          </a:xfrm>
+          <a:prstGeom xmlns:a="http://schemas.openxmlformats.org/drawingml/2006/main" prst="rect">
+            <a:avLst/>
+          </a:prstGeom>
+          <a:noFill xmlns:a="http://schemas.openxmlformats.org/drawingml/2006/main"/>
+          <a:ln xmlns:a="http://schemas.openxmlformats.org/drawingml/2006/main" w="0">
+            <a:noFill/>
+            <a:prstDash val="solid"/>
+          </a:ln>
+        </p:spPr>
+        <p:txBody>
+          <a:bodyPr xmlns:a="http://schemas.openxmlformats.org/drawingml/2006/main"/>
+          <a:lstStyle xmlns:a="http://schemas.openxmlformats.org/drawingml/2006/main"/>
+          <a:p xmlns:a="http://schemas.openxmlformats.org/drawingml/2006/main">
+            <a:pPr>
+              <a:buNone/>
+              <a:defRPr sz="1575" b="1">
+                <a:solidFill>
+                  <a:srgbClr val="111827"/>
+                </a:solidFill>
+              </a:defRPr>
+            </a:pPr>
+            <a:r>
+              <a:rPr sz="1575" b="1">
+                <a:solidFill>
+                  <a:srgbClr val="111827"/>
+                </a:solidFill>
+              </a:rPr>
+              <a:t>學生不能開</a:t>
+            </a:r>
+          </a:p>
+        </p:txBody>
+      </p:sp>
+      <p:sp>
+        <p:nvSpPr>
+          <p:cNvPr id="15" name="">
+            <a:extLst xmlns:a="http://schemas.openxmlformats.org/drawingml/2006/main">
+              <a:ext uri="{FF2B5EF4-FFF2-40B4-BE49-F238E27FC236}">
+                <a16:creationId xmlns:a16="http://schemas.microsoft.com/office/drawing/2014/main" id="{A17DD600-65A5-4EFF-8F0F-88E44D37F287}"/>
+              </a:ext>
+            </a:extLst>
+          </p:cNvPr>
+          <p:cNvSpPr>
+            <a:spLocks xmlns:a="http://schemas.openxmlformats.org/drawingml/2006/main" noGrp="1"/>
+          </p:cNvSpPr>
+          <p:nvPr/>
+        </p:nvSpPr>
+        <p:spPr>
+          <a:xfrm xmlns:a="http://schemas.openxmlformats.org/drawingml/2006/main">
+            <a:off x="609600" y="3762375"/>
+            <a:ext cx="3048000" cy="857250"/>
+          </a:xfrm>
+          <a:prstGeom xmlns:a="http://schemas.openxmlformats.org/drawingml/2006/main" prst="roundRect">
+            <a:avLst>
+              <a:gd name="adj" fmla="val 8889"/>
+            </a:avLst>
+          </a:prstGeom>
+          <a:solidFill xmlns:a="http://schemas.openxmlformats.org/drawingml/2006/main">
+            <a:srgbClr val="E3A62F">
+              <a:alpha val="20000"/>
+            </a:srgbClr>
+          </a:solidFill>
+          <a:ln xmlns:a="http://schemas.openxmlformats.org/drawingml/2006/main" w="9525">
+            <a:solidFill>
+              <a:srgbClr val="E3A62F"/>
+            </a:solidFill>
+            <a:prstDash val="solid"/>
+          </a:ln>
+        </p:spPr>
+      </p:sp>
+      <p:sp>
+        <p:nvSpPr>
+          <p:cNvPr id="16" name="">
+            <a:extLst xmlns:a="http://schemas.openxmlformats.org/drawingml/2006/main">
+              <a:ext uri="{FF2B5EF4-FFF2-40B4-BE49-F238E27FC236}">
+                <a16:creationId xmlns:a16="http://schemas.microsoft.com/office/drawing/2014/main" id="{70340056-1E76-4DB6-8860-AE2572F69973}"/>
+              </a:ext>
+            </a:extLst>
+          </p:cNvPr>
+          <p:cNvSpPr>
+            <a:spLocks xmlns:a="http://schemas.openxmlformats.org/drawingml/2006/main" noGrp="1"/>
+          </p:cNvSpPr>
+          <p:nvPr/>
+        </p:nvSpPr>
+        <p:spPr>
+          <a:xfrm xmlns:a="http://schemas.openxmlformats.org/drawingml/2006/main">
+            <a:off x="800100" y="3914775"/>
+            <a:ext cx="952500" cy="209550"/>
+          </a:xfrm>
+          <a:prstGeom xmlns:a="http://schemas.openxmlformats.org/drawingml/2006/main" prst="rect">
+            <a:avLst/>
+          </a:prstGeom>
+          <a:noFill xmlns:a="http://schemas.openxmlformats.org/drawingml/2006/main"/>
+          <a:ln xmlns:a="http://schemas.openxmlformats.org/drawingml/2006/main" w="0">
+            <a:noFill/>
+            <a:prstDash val="solid"/>
+          </a:ln>
+        </p:spPr>
+        <p:txBody>
+          <a:bodyPr xmlns:a="http://schemas.openxmlformats.org/drawingml/2006/main"/>
+          <a:lstStyle xmlns:a="http://schemas.openxmlformats.org/drawingml/2006/main"/>
+          <a:p xmlns:a="http://schemas.openxmlformats.org/drawingml/2006/main">
+            <a:pPr>
+              <a:buNone/>
+              <a:defRPr sz="1050" b="1">
+                <a:solidFill>
+                  <a:srgbClr val="E3A62F"/>
+                </a:solidFill>
+              </a:defRPr>
+            </a:pPr>
+            <a:r>
+              <a:rPr sz="1050" b="1">
+                <a:solidFill>
+                  <a:srgbClr val="E3A62F"/>
+                </a:solidFill>
+              </a:rPr>
+              <a:t>症狀 4</a:t>
+            </a:r>
+          </a:p>
+        </p:txBody>
+      </p:sp>
+      <p:sp>
+        <p:nvSpPr>
+          <p:cNvPr id="17" name="">
+            <a:extLst xmlns:a="http://schemas.openxmlformats.org/drawingml/2006/main">
+              <a:ext uri="{FF2B5EF4-FFF2-40B4-BE49-F238E27FC236}">
+                <a16:creationId xmlns:a16="http://schemas.microsoft.com/office/drawing/2014/main" id="{67F49854-3052-4925-838E-7860A09C64CC}"/>
+              </a:ext>
+            </a:extLst>
+          </p:cNvPr>
+          <p:cNvSpPr>
+            <a:spLocks xmlns:a="http://schemas.openxmlformats.org/drawingml/2006/main" noGrp="1"/>
+          </p:cNvSpPr>
+          <p:nvPr/>
+        </p:nvSpPr>
+        <p:spPr>
+          <a:xfrm xmlns:a="http://schemas.openxmlformats.org/drawingml/2006/main">
+            <a:off x="800100" y="4200525"/>
+            <a:ext cx="2667000" cy="285750"/>
+          </a:xfrm>
+          <a:prstGeom xmlns:a="http://schemas.openxmlformats.org/drawingml/2006/main" prst="rect">
+            <a:avLst/>
+          </a:prstGeom>
+          <a:noFill xmlns:a="http://schemas.openxmlformats.org/drawingml/2006/main"/>
+          <a:ln xmlns:a="http://schemas.openxmlformats.org/drawingml/2006/main" w="0">
+            <a:noFill/>
+            <a:prstDash val="solid"/>
+          </a:ln>
+        </p:spPr>
+        <p:txBody>
+          <a:bodyPr xmlns:a="http://schemas.openxmlformats.org/drawingml/2006/main"/>
+          <a:lstStyle xmlns:a="http://schemas.openxmlformats.org/drawingml/2006/main"/>
+          <a:p xmlns:a="http://schemas.openxmlformats.org/drawingml/2006/main">
+            <a:pPr>
+              <a:buNone/>
+              <a:defRPr sz="1575" b="1">
+                <a:solidFill>
+                  <a:srgbClr val="111827"/>
+                </a:solidFill>
+              </a:defRPr>
+            </a:pPr>
+            <a:r>
+              <a:rPr sz="1575" b="1">
+                <a:solidFill>
+                  <a:srgbClr val="111827"/>
+                </a:solidFill>
+              </a:rPr>
+              <a:t>仍是舊版本</a:t>
+            </a:r>
+          </a:p>
+        </p:txBody>
+      </p:sp>
+      <p:sp>
+        <p:nvSpPr>
+          <p:cNvPr id="18" name="">
+            <a:extLst xmlns:a="http://schemas.openxmlformats.org/drawingml/2006/main">
+              <a:ext uri="{FF2B5EF4-FFF2-40B4-BE49-F238E27FC236}">
+                <a16:creationId xmlns:a16="http://schemas.microsoft.com/office/drawing/2014/main" id="{2E639B1A-D079-4CD4-B0DD-060015F88D50}"/>
+              </a:ext>
+            </a:extLst>
+          </p:cNvPr>
+          <p:cNvSpPr>
+            <a:spLocks xmlns:a="http://schemas.openxmlformats.org/drawingml/2006/main" noGrp="1"/>
+          </p:cNvSpPr>
+          <p:nvPr/>
+        </p:nvSpPr>
+        <p:spPr>
+          <a:xfrm xmlns:a="http://schemas.openxmlformats.org/drawingml/2006/main">
+            <a:off x="4229100" y="3762375"/>
+            <a:ext cx="3048000" cy="857250"/>
+          </a:xfrm>
+          <a:prstGeom xmlns:a="http://schemas.openxmlformats.org/drawingml/2006/main" prst="roundRect">
+            <a:avLst>
+              <a:gd name="adj" fmla="val 8889"/>
+            </a:avLst>
+          </a:prstGeom>
+          <a:solidFill xmlns:a="http://schemas.openxmlformats.org/drawingml/2006/main">
+            <a:srgbClr val="3D8DFF">
+              <a:alpha val="13333"/>
+            </a:srgbClr>
+          </a:solidFill>
+          <a:ln xmlns:a="http://schemas.openxmlformats.org/drawingml/2006/main" w="9525">
+            <a:solidFill>
+              <a:srgbClr val="3D8DFF"/>
+            </a:solidFill>
+            <a:prstDash val="solid"/>
+          </a:ln>
+        </p:spPr>
+      </p:sp>
+      <p:sp>
+        <p:nvSpPr>
+          <p:cNvPr id="19" name="">
+            <a:extLst xmlns:a="http://schemas.openxmlformats.org/drawingml/2006/main">
+              <a:ext uri="{FF2B5EF4-FFF2-40B4-BE49-F238E27FC236}">
+                <a16:creationId xmlns:a16="http://schemas.microsoft.com/office/drawing/2014/main" id="{BFCB4A6A-B003-4CE1-BC8F-B953C79BF08F}"/>
+              </a:ext>
+            </a:extLst>
+          </p:cNvPr>
+          <p:cNvSpPr>
+            <a:spLocks xmlns:a="http://schemas.openxmlformats.org/drawingml/2006/main" noGrp="1"/>
+          </p:cNvSpPr>
+          <p:nvPr/>
+        </p:nvSpPr>
+        <p:spPr>
+          <a:xfrm xmlns:a="http://schemas.openxmlformats.org/drawingml/2006/main">
+            <a:off x="4419600" y="3914775"/>
+            <a:ext cx="952500" cy="209550"/>
+          </a:xfrm>
+          <a:prstGeom xmlns:a="http://schemas.openxmlformats.org/drawingml/2006/main" prst="rect">
+            <a:avLst/>
+          </a:prstGeom>
+          <a:noFill xmlns:a="http://schemas.openxmlformats.org/drawingml/2006/main"/>
+          <a:ln xmlns:a="http://schemas.openxmlformats.org/drawingml/2006/main" w="0">
+            <a:noFill/>
+            <a:prstDash val="solid"/>
+          </a:ln>
+        </p:spPr>
+        <p:txBody>
+          <a:bodyPr xmlns:a="http://schemas.openxmlformats.org/drawingml/2006/main"/>
+          <a:lstStyle xmlns:a="http://schemas.openxmlformats.org/drawingml/2006/main"/>
+          <a:p xmlns:a="http://schemas.openxmlformats.org/drawingml/2006/main">
+            <a:pPr>
+              <a:buNone/>
+              <a:defRPr sz="1050" b="1">
+                <a:solidFill>
+                  <a:srgbClr val="3D8DFF"/>
+                </a:solidFill>
+              </a:defRPr>
+            </a:pPr>
+            <a:r>
+              <a:rPr sz="1050" b="1">
+                <a:solidFill>
+                  <a:srgbClr val="3D8DFF"/>
+                </a:solidFill>
+              </a:rPr>
+              <a:t>症狀 5</a:t>
+            </a:r>
+          </a:p>
+        </p:txBody>
+      </p:sp>
+      <p:sp>
+        <p:nvSpPr>
+          <p:cNvPr id="20" name="">
+            <a:extLst xmlns:a="http://schemas.openxmlformats.org/drawingml/2006/main">
+              <a:ext uri="{FF2B5EF4-FFF2-40B4-BE49-F238E27FC236}">
+                <a16:creationId xmlns:a16="http://schemas.microsoft.com/office/drawing/2014/main" id="{04FFBD56-DCB1-4F51-B06D-D4D25E9DD7ED}"/>
+              </a:ext>
+            </a:extLst>
+          </p:cNvPr>
+          <p:cNvSpPr>
+            <a:spLocks xmlns:a="http://schemas.openxmlformats.org/drawingml/2006/main" noGrp="1"/>
+          </p:cNvSpPr>
+          <p:nvPr/>
+        </p:nvSpPr>
+        <p:spPr>
+          <a:xfrm xmlns:a="http://schemas.openxmlformats.org/drawingml/2006/main">
+            <a:off x="4419600" y="4200525"/>
+            <a:ext cx="2667000" cy="285750"/>
+          </a:xfrm>
+          <a:prstGeom xmlns:a="http://schemas.openxmlformats.org/drawingml/2006/main" prst="rect">
+            <a:avLst/>
+          </a:prstGeom>
+          <a:noFill xmlns:a="http://schemas.openxmlformats.org/drawingml/2006/main"/>
+          <a:ln xmlns:a="http://schemas.openxmlformats.org/drawingml/2006/main" w="0">
+            <a:noFill/>
+            <a:prstDash val="solid"/>
+          </a:ln>
+        </p:spPr>
+        <p:txBody>
+          <a:bodyPr xmlns:a="http://schemas.openxmlformats.org/drawingml/2006/main"/>
+          <a:lstStyle xmlns:a="http://schemas.openxmlformats.org/drawingml/2006/main"/>
+          <a:p xmlns:a="http://schemas.openxmlformats.org/drawingml/2006/main">
+            <a:pPr>
+              <a:buNone/>
+              <a:defRPr sz="1575" b="1">
+                <a:solidFill>
+                  <a:srgbClr val="111827"/>
+                </a:solidFill>
+              </a:defRPr>
+            </a:pPr>
+            <a:r>
+              <a:rPr sz="1575" b="1">
+                <a:solidFill>
+                  <a:srgbClr val="111827"/>
+                </a:solidFill>
+              </a:rPr>
+              <a:t>重複兩筆</a:t>
+            </a:r>
+          </a:p>
+        </p:txBody>
+      </p:sp>
+    </p:spTree>
+    <p:extLst>
+      <p:ext uri="{BB962C8B-B14F-4D97-AF65-F5344CB8AC3E}">
+        <p14:creationId xmlns:p14="http://schemas.microsoft.com/office/powerpoint/2010/main" val="1363997945"/>
+      </p:ext>
+    </p:extLst>
+  </p:cSld>
+</p:sld>
+</file>
+
+<file path=ppt/slides/slide11.xml><?xml version="1.0" encoding="utf-8"?>
+<p:sld xmlns:p="http://schemas.openxmlformats.org/presentationml/2006/main">
+  <p:cSld>
+    <p:bg>
+      <p:bgPr>
+        <a:solidFill xmlns:a="http://schemas.openxmlformats.org/drawingml/2006/main">
+          <a:srgbClr val="FFFFFF"/>
+        </a:solidFill>
+      </p:bgPr>
+    </p:bg>
+    <p:spTree>
+      <p:nvGrpSpPr>
+        <p:cNvPr id="1" name=""/>
+        <p:cNvGrpSpPr/>
+        <p:nvPr/>
+      </p:nvGrpSpPr>
+      <p:grpSpPr>
+        <a:xfrm xmlns:a="http://schemas.openxmlformats.org/drawingml/2006/main"/>
+      </p:grpSpPr>
+      <p:sp>
+        <p:nvSpPr>
+          <p:cNvPr id="16" name="">
+            <a:extLst xmlns:a="http://schemas.openxmlformats.org/drawingml/2006/main">
+              <a:ext uri="{FF2B5EF4-FFF2-40B4-BE49-F238E27FC236}">
+                <a16:creationId xmlns:a16="http://schemas.microsoft.com/office/drawing/2014/main" id="{51A75BCC-D9DB-4A76-BD41-A2C7D11898CE}"/>
+              </a:ext>
+            </a:extLst>
+          </p:cNvPr>
+          <p:cNvSpPr>
+            <a:spLocks xmlns:a="http://schemas.openxmlformats.org/drawingml/2006/main" noGrp="1"/>
+          </p:cNvSpPr>
+          <p:nvPr/>
+        </p:nvSpPr>
+        <p:spPr>
+          <a:xfrm xmlns:a="http://schemas.openxmlformats.org/drawingml/2006/main">
+            <a:off x="609600" y="323850"/>
+            <a:ext cx="5715000" cy="228600"/>
+          </a:xfrm>
+          <a:prstGeom xmlns:a="http://schemas.openxmlformats.org/drawingml/2006/main" prst="rect">
+            <a:avLst/>
+          </a:prstGeom>
+          <a:noFill xmlns:a="http://schemas.openxmlformats.org/drawingml/2006/main"/>
+          <a:ln xmlns:a="http://schemas.openxmlformats.org/drawingml/2006/main" w="0">
+            <a:noFill/>
+            <a:prstDash val="solid"/>
+          </a:ln>
+        </p:spPr>
+        <p:txBody>
+          <a:bodyPr xmlns:a="http://schemas.openxmlformats.org/drawingml/2006/main"/>
+          <a:lstStyle xmlns:a="http://schemas.openxmlformats.org/drawingml/2006/main"/>
+          <a:p xmlns:a="http://schemas.openxmlformats.org/drawingml/2006/main">
+            <a:pPr>
+              <a:buNone/>
+              <a:defRPr sz="975" b="1">
+                <a:solidFill>
+                  <a:srgbClr val="3D8DFF"/>
+                </a:solidFill>
+              </a:defRPr>
+            </a:pPr>
+            <a:r>
+              <a:rPr sz="975" b="1">
+                <a:solidFill>
+                  <a:srgbClr val="3D8DFF"/>
+                </a:solidFill>
+              </a:rPr>
+              <a:t>AI 工具實戰進階班 / 第 03 堂</a:t>
+            </a:r>
+          </a:p>
+        </p:txBody>
+      </p:sp>
+      <p:sp>
+        <p:nvSpPr>
+          <p:cNvPr id="2" name="">
+            <a:extLst xmlns:a="http://schemas.openxmlformats.org/drawingml/2006/main">
+              <a:ext uri="{FF2B5EF4-FFF2-40B4-BE49-F238E27FC236}">
+                <a16:creationId xmlns:a16="http://schemas.microsoft.com/office/drawing/2014/main" id="{7ED9904D-9D07-4847-A411-DD5A8FA60B9A}"/>
+              </a:ext>
+            </a:extLst>
+          </p:cNvPr>
+          <p:cNvSpPr>
+            <a:spLocks xmlns:a="http://schemas.openxmlformats.org/drawingml/2006/main" noGrp="1"/>
+          </p:cNvSpPr>
+          <p:nvPr/>
+        </p:nvSpPr>
+        <p:spPr>
+          <a:xfrm xmlns:a="http://schemas.openxmlformats.org/drawingml/2006/main">
+            <a:off x="609600" y="647700"/>
+            <a:ext cx="10668000" cy="533400"/>
+          </a:xfrm>
+          <a:prstGeom xmlns:a="http://schemas.openxmlformats.org/drawingml/2006/main" prst="rect">
+            <a:avLst/>
+          </a:prstGeom>
+          <a:noFill xmlns:a="http://schemas.openxmlformats.org/drawingml/2006/main"/>
+          <a:ln xmlns:a="http://schemas.openxmlformats.org/drawingml/2006/main" w="0">
+            <a:noFill/>
+            <a:prstDash val="solid"/>
+          </a:ln>
+        </p:spPr>
+        <p:txBody>
+          <a:bodyPr xmlns:a="http://schemas.openxmlformats.org/drawingml/2006/main"/>
+          <a:lstStyle xmlns:a="http://schemas.openxmlformats.org/drawingml/2006/main"/>
+          <a:p xmlns:a="http://schemas.openxmlformats.org/drawingml/2006/main">
+            <a:pPr>
+              <a:buNone/>
+              <a:defRPr sz="2700" b="1">
+                <a:solidFill>
+                  <a:srgbClr val="111827"/>
+                </a:solidFill>
+              </a:defRPr>
+            </a:pPr>
+            <a:r>
+              <a:rPr sz="2700" b="1">
+                <a:solidFill>
+                  <a:srgbClr val="111827"/>
+                </a:solidFill>
+              </a:rPr>
+              <a:t>資料要回答教學問題</a:t>
+            </a:r>
+          </a:p>
+        </p:txBody>
+      </p:sp>
+      <p:sp>
+        <p:nvSpPr>
+          <p:cNvPr id="3" name="">
+            <a:extLst xmlns:a="http://schemas.openxmlformats.org/drawingml/2006/main">
+              <a:ext uri="{FF2B5EF4-FFF2-40B4-BE49-F238E27FC236}">
+                <a16:creationId xmlns:a16="http://schemas.microsoft.com/office/drawing/2014/main" id="{DFC9F866-9731-4DAA-9BE4-1FDD1BF60E96}"/>
+              </a:ext>
+            </a:extLst>
+          </p:cNvPr>
+          <p:cNvSpPr>
+            <a:spLocks xmlns:a="http://schemas.openxmlformats.org/drawingml/2006/main" noGrp="1"/>
+          </p:cNvSpPr>
+          <p:nvPr/>
+        </p:nvSpPr>
+        <p:spPr>
+          <a:xfrm xmlns:a="http://schemas.openxmlformats.org/drawingml/2006/main">
+            <a:off x="11049000" y="342900"/>
+            <a:ext cx="533400" cy="228600"/>
+          </a:xfrm>
+          <a:prstGeom xmlns:a="http://schemas.openxmlformats.org/drawingml/2006/main" prst="rect">
+            <a:avLst/>
+          </a:prstGeom>
+          <a:noFill xmlns:a="http://schemas.openxmlformats.org/drawingml/2006/main"/>
+          <a:ln xmlns:a="http://schemas.openxmlformats.org/drawingml/2006/main" w="0">
+            <a:noFill/>
+            <a:prstDash val="solid"/>
+          </a:ln>
+        </p:spPr>
+        <p:txBody>
+          <a:bodyPr xmlns:a="http://schemas.openxmlformats.org/drawingml/2006/main"/>
+          <a:lstStyle xmlns:a="http://schemas.openxmlformats.org/drawingml/2006/main"/>
+          <a:p xmlns:a="http://schemas.openxmlformats.org/drawingml/2006/main">
+            <a:pPr algn="r">
+              <a:buNone/>
+              <a:defRPr sz="1050" b="1">
+                <a:solidFill>
+                  <a:srgbClr val="536273"/>
+                </a:solidFill>
+              </a:defRPr>
+            </a:pPr>
+            <a:r>
+              <a:rPr sz="1050" b="1">
+                <a:solidFill>
+                  <a:srgbClr val="536273"/>
+                </a:solidFill>
+              </a:rPr>
+              <a:t>11</a:t>
+            </a:r>
+          </a:p>
+        </p:txBody>
+      </p:sp>
+      <p:sp>
+        <p:nvSpPr>
+          <p:cNvPr id="4" name="">
+            <a:extLst xmlns:a="http://schemas.openxmlformats.org/drawingml/2006/main">
+              <a:ext uri="{FF2B5EF4-FFF2-40B4-BE49-F238E27FC236}">
+                <a16:creationId xmlns:a16="http://schemas.microsoft.com/office/drawing/2014/main" id="{333F7C5E-66B0-4331-ADAE-051F02740D94}"/>
+              </a:ext>
+            </a:extLst>
+          </p:cNvPr>
+          <p:cNvSpPr>
+            <a:spLocks xmlns:a="http://schemas.openxmlformats.org/drawingml/2006/main" noGrp="1"/>
+          </p:cNvSpPr>
+          <p:nvPr/>
+        </p:nvSpPr>
+        <p:spPr>
+          <a:xfrm xmlns:a="http://schemas.openxmlformats.org/drawingml/2006/main">
+            <a:off x="609600" y="1314450"/>
+            <a:ext cx="10972800" cy="0"/>
+          </a:xfrm>
+          <a:prstGeom xmlns:a="http://schemas.openxmlformats.org/drawingml/2006/main" prst="line">
+            <a:avLst/>
+          </a:prstGeom>
+          <a:noFill xmlns:a="http://schemas.openxmlformats.org/drawingml/2006/main"/>
+          <a:ln xmlns:a="http://schemas.openxmlformats.org/drawingml/2006/main" w="9525">
+            <a:solidFill>
+              <a:srgbClr val="D7DEE7"/>
+            </a:solidFill>
+            <a:prstDash val="solid"/>
+          </a:ln>
+        </p:spPr>
+      </p:sp>
+      <p:sp>
+        <p:nvSpPr>
+          <p:cNvPr id="5" name="">
+            <a:extLst xmlns:a="http://schemas.openxmlformats.org/drawingml/2006/main">
+              <a:ext uri="{FF2B5EF4-FFF2-40B4-BE49-F238E27FC236}">
+                <a16:creationId xmlns:a16="http://schemas.microsoft.com/office/drawing/2014/main" id="{818C6E11-C70A-4740-AF84-14CF77A6A359}"/>
+              </a:ext>
+            </a:extLst>
+          </p:cNvPr>
+          <p:cNvSpPr>
+            <a:spLocks xmlns:a="http://schemas.openxmlformats.org/drawingml/2006/main" noGrp="1"/>
+          </p:cNvSpPr>
+          <p:nvPr/>
+        </p:nvSpPr>
+        <p:spPr>
+          <a:xfrm xmlns:a="http://schemas.openxmlformats.org/drawingml/2006/main">
+            <a:off x="609600" y="1695450"/>
+            <a:ext cx="10477500" cy="381000"/>
+          </a:xfrm>
+          <a:prstGeom xmlns:a="http://schemas.openxmlformats.org/drawingml/2006/main" prst="rect">
+            <a:avLst/>
+          </a:prstGeom>
+          <a:noFill xmlns:a="http://schemas.openxmlformats.org/drawingml/2006/main"/>
+          <a:ln xmlns:a="http://schemas.openxmlformats.org/drawingml/2006/main" w="0">
+            <a:noFill/>
+            <a:prstDash val="solid"/>
+          </a:ln>
+        </p:spPr>
+        <p:txBody>
+          <a:bodyPr xmlns:a="http://schemas.openxmlformats.org/drawingml/2006/main"/>
+          <a:lstStyle xmlns:a="http://schemas.openxmlformats.org/drawingml/2006/main"/>
+          <a:p xmlns:a="http://schemas.openxmlformats.org/drawingml/2006/main">
+            <a:pPr>
+              <a:buNone/>
+              <a:defRPr sz="2025" b="1">
+                <a:solidFill>
+                  <a:srgbClr val="111827"/>
+                </a:solidFill>
+              </a:defRPr>
+            </a:pPr>
+            <a:r>
+              <a:rPr sz="2025" b="1">
+                <a:solidFill>
+                  <a:srgbClr val="111827"/>
+                </a:solidFill>
+              </a:rPr>
+              <a:t>不要只收分數；先讓資料幫你決定下一堂課。</a:t>
+            </a:r>
+          </a:p>
+        </p:txBody>
+      </p:sp>
+      <p:sp>
+        <p:nvSpPr>
+          <p:cNvPr id="6" name="">
+            <a:extLst xmlns:a="http://schemas.openxmlformats.org/drawingml/2006/main">
+              <a:ext uri="{FF2B5EF4-FFF2-40B4-BE49-F238E27FC236}">
+                <a16:creationId xmlns:a16="http://schemas.microsoft.com/office/drawing/2014/main" id="{7A3606CF-B0FD-45FB-BDAA-B52F7954D546}"/>
+              </a:ext>
+            </a:extLst>
+          </p:cNvPr>
+          <p:cNvSpPr>
+            <a:spLocks xmlns:a="http://schemas.openxmlformats.org/drawingml/2006/main" noGrp="1"/>
+          </p:cNvSpPr>
+          <p:nvPr/>
+        </p:nvSpPr>
+        <p:spPr>
+          <a:xfrm xmlns:a="http://schemas.openxmlformats.org/drawingml/2006/main">
+            <a:off x="1047750" y="2381250"/>
+            <a:ext cx="4953000" cy="285750"/>
+          </a:xfrm>
+          <a:prstGeom xmlns:a="http://schemas.openxmlformats.org/drawingml/2006/main" prst="rect">
+            <a:avLst/>
+          </a:prstGeom>
+          <a:noFill xmlns:a="http://schemas.openxmlformats.org/drawingml/2006/main"/>
+          <a:ln xmlns:a="http://schemas.openxmlformats.org/drawingml/2006/main" w="0">
+            <a:noFill/>
+            <a:prstDash val="solid"/>
+          </a:ln>
+        </p:spPr>
+        <p:txBody>
+          <a:bodyPr xmlns:a="http://schemas.openxmlformats.org/drawingml/2006/main"/>
+          <a:lstStyle xmlns:a="http://schemas.openxmlformats.org/drawingml/2006/main"/>
+          <a:p xmlns:a="http://schemas.openxmlformats.org/drawingml/2006/main">
+            <a:pPr>
+              <a:buNone/>
+              <a:defRPr sz="1650" b="1">
+                <a:solidFill>
+                  <a:srgbClr val="3D8DFF"/>
+                </a:solidFill>
+              </a:defRPr>
+            </a:pPr>
+            <a:r>
+              <a:rPr sz="1650" b="1">
+                <a:solidFill>
+                  <a:srgbClr val="3D8DFF"/>
+                </a:solidFill>
+              </a:rPr>
+              <a:t>01｜哪些學生還沒完成？</a:t>
+            </a:r>
+          </a:p>
+        </p:txBody>
+      </p:sp>
+      <p:sp>
+        <p:nvSpPr>
+          <p:cNvPr id="7" name="">
+            <a:extLst xmlns:a="http://schemas.openxmlformats.org/drawingml/2006/main">
+              <a:ext uri="{FF2B5EF4-FFF2-40B4-BE49-F238E27FC236}">
+                <a16:creationId xmlns:a16="http://schemas.microsoft.com/office/drawing/2014/main" id="{2DEBE5A3-D71A-4E5D-A5BC-4F41A774B4B0}"/>
+              </a:ext>
+            </a:extLst>
+          </p:cNvPr>
+          <p:cNvSpPr>
+            <a:spLocks xmlns:a="http://schemas.openxmlformats.org/drawingml/2006/main" noGrp="1"/>
+          </p:cNvSpPr>
+          <p:nvPr/>
+        </p:nvSpPr>
+        <p:spPr>
+          <a:xfrm xmlns:a="http://schemas.openxmlformats.org/drawingml/2006/main">
+            <a:off x="1047750" y="2762250"/>
+            <a:ext cx="9620250" cy="0"/>
+          </a:xfrm>
+          <a:prstGeom xmlns:a="http://schemas.openxmlformats.org/drawingml/2006/main" prst="line">
+            <a:avLst/>
+          </a:prstGeom>
+          <a:noFill xmlns:a="http://schemas.openxmlformats.org/drawingml/2006/main"/>
+          <a:ln xmlns:a="http://schemas.openxmlformats.org/drawingml/2006/main" w="9525">
+            <a:solidFill>
+              <a:srgbClr val="D7DEE7"/>
+            </a:solidFill>
+            <a:prstDash val="solid"/>
+          </a:ln>
+        </p:spPr>
+      </p:sp>
+      <p:sp>
+        <p:nvSpPr>
+          <p:cNvPr id="8" name="">
+            <a:extLst xmlns:a="http://schemas.openxmlformats.org/drawingml/2006/main">
+              <a:ext uri="{FF2B5EF4-FFF2-40B4-BE49-F238E27FC236}">
+                <a16:creationId xmlns:a16="http://schemas.microsoft.com/office/drawing/2014/main" id="{F86F96B7-07EA-44D4-8B11-F5E47248C842}"/>
+              </a:ext>
+            </a:extLst>
+          </p:cNvPr>
+          <p:cNvSpPr>
+            <a:spLocks xmlns:a="http://schemas.openxmlformats.org/drawingml/2006/main" noGrp="1"/>
+          </p:cNvSpPr>
+          <p:nvPr/>
+        </p:nvSpPr>
+        <p:spPr>
+          <a:xfrm xmlns:a="http://schemas.openxmlformats.org/drawingml/2006/main">
+            <a:off x="1047750" y="2981325"/>
+            <a:ext cx="4953000" cy="285750"/>
+          </a:xfrm>
+          <a:prstGeom xmlns:a="http://schemas.openxmlformats.org/drawingml/2006/main" prst="rect">
+            <a:avLst/>
+          </a:prstGeom>
+          <a:noFill xmlns:a="http://schemas.openxmlformats.org/drawingml/2006/main"/>
+          <a:ln xmlns:a="http://schemas.openxmlformats.org/drawingml/2006/main" w="0">
+            <a:noFill/>
+            <a:prstDash val="solid"/>
+          </a:ln>
+        </p:spPr>
+        <p:txBody>
+          <a:bodyPr xmlns:a="http://schemas.openxmlformats.org/drawingml/2006/main"/>
+          <a:lstStyle xmlns:a="http://schemas.openxmlformats.org/drawingml/2006/main"/>
+          <a:p xmlns:a="http://schemas.openxmlformats.org/drawingml/2006/main">
+            <a:pPr>
+              <a:buNone/>
+              <a:defRPr sz="1650" b="1">
+                <a:solidFill>
+                  <a:srgbClr val="111827"/>
+                </a:solidFill>
+              </a:defRPr>
+            </a:pPr>
+            <a:r>
+              <a:rPr sz="1650" b="1">
+                <a:solidFill>
+                  <a:srgbClr val="111827"/>
+                </a:solidFill>
+              </a:rPr>
+              <a:t>02｜平均與完成率是多少？</a:t>
+            </a:r>
+          </a:p>
+        </p:txBody>
+      </p:sp>
+      <p:sp>
+        <p:nvSpPr>
+          <p:cNvPr id="9" name="">
+            <a:extLst xmlns:a="http://schemas.openxmlformats.org/drawingml/2006/main">
+              <a:ext uri="{FF2B5EF4-FFF2-40B4-BE49-F238E27FC236}">
+                <a16:creationId xmlns:a16="http://schemas.microsoft.com/office/drawing/2014/main" id="{34C565E7-8ADA-4909-9414-A632A5A27A55}"/>
+              </a:ext>
+            </a:extLst>
+          </p:cNvPr>
+          <p:cNvSpPr>
+            <a:spLocks xmlns:a="http://schemas.openxmlformats.org/drawingml/2006/main" noGrp="1"/>
+          </p:cNvSpPr>
+          <p:nvPr/>
+        </p:nvSpPr>
+        <p:spPr>
+          <a:xfrm xmlns:a="http://schemas.openxmlformats.org/drawingml/2006/main">
+            <a:off x="1047750" y="3362325"/>
+            <a:ext cx="9620250" cy="0"/>
+          </a:xfrm>
+          <a:prstGeom xmlns:a="http://schemas.openxmlformats.org/drawingml/2006/main" prst="line">
+            <a:avLst/>
+          </a:prstGeom>
+          <a:noFill xmlns:a="http://schemas.openxmlformats.org/drawingml/2006/main"/>
+          <a:ln xmlns:a="http://schemas.openxmlformats.org/drawingml/2006/main" w="9525">
+            <a:solidFill>
+              <a:srgbClr val="D7DEE7"/>
+            </a:solidFill>
+            <a:prstDash val="solid"/>
+          </a:ln>
+        </p:spPr>
+      </p:sp>
+      <p:sp>
+        <p:nvSpPr>
+          <p:cNvPr id="10" name="">
+            <a:extLst xmlns:a="http://schemas.openxmlformats.org/drawingml/2006/main">
+              <a:ext uri="{FF2B5EF4-FFF2-40B4-BE49-F238E27FC236}">
+                <a16:creationId xmlns:a16="http://schemas.microsoft.com/office/drawing/2014/main" id="{A573E64D-A0CC-4028-B46B-342914A99FB0}"/>
+              </a:ext>
+            </a:extLst>
+          </p:cNvPr>
+          <p:cNvSpPr>
+            <a:spLocks xmlns:a="http://schemas.openxmlformats.org/drawingml/2006/main" noGrp="1"/>
+          </p:cNvSpPr>
+          <p:nvPr/>
+        </p:nvSpPr>
+        <p:spPr>
+          <a:xfrm xmlns:a="http://schemas.openxmlformats.org/drawingml/2006/main">
+            <a:off x="1047750" y="3581400"/>
+            <a:ext cx="4953000" cy="285750"/>
+          </a:xfrm>
+          <a:prstGeom xmlns:a="http://schemas.openxmlformats.org/drawingml/2006/main" prst="rect">
+            <a:avLst/>
+          </a:prstGeom>
+          <a:noFill xmlns:a="http://schemas.openxmlformats.org/drawingml/2006/main"/>
+          <a:ln xmlns:a="http://schemas.openxmlformats.org/drawingml/2006/main" w="0">
+            <a:noFill/>
+            <a:prstDash val="solid"/>
+          </a:ln>
+        </p:spPr>
+        <p:txBody>
+          <a:bodyPr xmlns:a="http://schemas.openxmlformats.org/drawingml/2006/main"/>
+          <a:lstStyle xmlns:a="http://schemas.openxmlformats.org/drawingml/2006/main"/>
+          <a:p xmlns:a="http://schemas.openxmlformats.org/drawingml/2006/main">
+            <a:pPr>
+              <a:buNone/>
+              <a:defRPr sz="1650" b="1">
+                <a:solidFill>
+                  <a:srgbClr val="111827"/>
+                </a:solidFill>
+              </a:defRPr>
+            </a:pPr>
+            <a:r>
+              <a:rPr sz="1650" b="1">
+                <a:solidFill>
+                  <a:srgbClr val="111827"/>
+                </a:solidFill>
+              </a:rPr>
+              <a:t>03｜哪幾題最多人答錯？</a:t>
+            </a:r>
+          </a:p>
+        </p:txBody>
+      </p:sp>
+      <p:sp>
+        <p:nvSpPr>
+          <p:cNvPr id="11" name="">
+            <a:extLst xmlns:a="http://schemas.openxmlformats.org/drawingml/2006/main">
+              <a:ext uri="{FF2B5EF4-FFF2-40B4-BE49-F238E27FC236}">
+                <a16:creationId xmlns:a16="http://schemas.microsoft.com/office/drawing/2014/main" id="{0761394B-CD73-4D80-AC2E-47E960065902}"/>
+              </a:ext>
+            </a:extLst>
+          </p:cNvPr>
+          <p:cNvSpPr>
+            <a:spLocks xmlns:a="http://schemas.openxmlformats.org/drawingml/2006/main" noGrp="1"/>
+          </p:cNvSpPr>
+          <p:nvPr/>
+        </p:nvSpPr>
+        <p:spPr>
+          <a:xfrm xmlns:a="http://schemas.openxmlformats.org/drawingml/2006/main">
+            <a:off x="1047750" y="3962400"/>
+            <a:ext cx="9620250" cy="0"/>
+          </a:xfrm>
+          <a:prstGeom xmlns:a="http://schemas.openxmlformats.org/drawingml/2006/main" prst="line">
+            <a:avLst/>
+          </a:prstGeom>
+          <a:noFill xmlns:a="http://schemas.openxmlformats.org/drawingml/2006/main"/>
+          <a:ln xmlns:a="http://schemas.openxmlformats.org/drawingml/2006/main" w="9525">
+            <a:solidFill>
+              <a:srgbClr val="D7DEE7"/>
+            </a:solidFill>
+            <a:prstDash val="solid"/>
+          </a:ln>
+        </p:spPr>
+      </p:sp>
+      <p:sp>
+        <p:nvSpPr>
+          <p:cNvPr id="12" name="">
+            <a:extLst xmlns:a="http://schemas.openxmlformats.org/drawingml/2006/main">
+              <a:ext uri="{FF2B5EF4-FFF2-40B4-BE49-F238E27FC236}">
+                <a16:creationId xmlns:a16="http://schemas.microsoft.com/office/drawing/2014/main" id="{FFA45E53-63B4-4936-B753-769F932DB564}"/>
+              </a:ext>
+            </a:extLst>
+          </p:cNvPr>
+          <p:cNvSpPr>
+            <a:spLocks xmlns:a="http://schemas.openxmlformats.org/drawingml/2006/main" noGrp="1"/>
+          </p:cNvSpPr>
+          <p:nvPr/>
+        </p:nvSpPr>
+        <p:spPr>
+          <a:xfrm xmlns:a="http://schemas.openxmlformats.org/drawingml/2006/main">
+            <a:off x="1047750" y="4181475"/>
+            <a:ext cx="4953000" cy="285750"/>
+          </a:xfrm>
+          <a:prstGeom xmlns:a="http://schemas.openxmlformats.org/drawingml/2006/main" prst="rect">
+            <a:avLst/>
+          </a:prstGeom>
+          <a:noFill xmlns:a="http://schemas.openxmlformats.org/drawingml/2006/main"/>
+          <a:ln xmlns:a="http://schemas.openxmlformats.org/drawingml/2006/main" w="0">
+            <a:noFill/>
+            <a:prstDash val="solid"/>
+          </a:ln>
+        </p:spPr>
+        <p:txBody>
+          <a:bodyPr xmlns:a="http://schemas.openxmlformats.org/drawingml/2006/main"/>
+          <a:lstStyle xmlns:a="http://schemas.openxmlformats.org/drawingml/2006/main"/>
+          <a:p xmlns:a="http://schemas.openxmlformats.org/drawingml/2006/main">
+            <a:pPr>
+              <a:buNone/>
+              <a:defRPr sz="1650" b="1">
+                <a:solidFill>
+                  <a:srgbClr val="111827"/>
+                </a:solidFill>
+              </a:defRPr>
+            </a:pPr>
+            <a:r>
+              <a:rPr sz="1650" b="1">
+                <a:solidFill>
+                  <a:srgbClr val="111827"/>
+                </a:solidFill>
+              </a:rPr>
+              <a:t>04｜下一堂要重教什麼？</a:t>
+            </a:r>
+          </a:p>
+        </p:txBody>
+      </p:sp>
+      <p:sp>
+        <p:nvSpPr>
+          <p:cNvPr id="13" name="">
+            <a:extLst xmlns:a="http://schemas.openxmlformats.org/drawingml/2006/main">
+              <a:ext uri="{FF2B5EF4-FFF2-40B4-BE49-F238E27FC236}">
+                <a16:creationId xmlns:a16="http://schemas.microsoft.com/office/drawing/2014/main" id="{C1514B29-B272-4C29-A8B8-565FE392C9B6}"/>
+              </a:ext>
+            </a:extLst>
+          </p:cNvPr>
+          <p:cNvSpPr>
+            <a:spLocks xmlns:a="http://schemas.openxmlformats.org/drawingml/2006/main" noGrp="1"/>
+          </p:cNvSpPr>
+          <p:nvPr/>
+        </p:nvSpPr>
+        <p:spPr>
+          <a:xfrm xmlns:a="http://schemas.openxmlformats.org/drawingml/2006/main">
+            <a:off x="1047750" y="4562475"/>
+            <a:ext cx="9620250" cy="0"/>
+          </a:xfrm>
+          <a:prstGeom xmlns:a="http://schemas.openxmlformats.org/drawingml/2006/main" prst="line">
+            <a:avLst/>
+          </a:prstGeom>
+          <a:noFill xmlns:a="http://schemas.openxmlformats.org/drawingml/2006/main"/>
+          <a:ln xmlns:a="http://schemas.openxmlformats.org/drawingml/2006/main" w="9525">
+            <a:solidFill>
+              <a:srgbClr val="D7DEE7"/>
+            </a:solidFill>
+            <a:prstDash val="solid"/>
+          </a:ln>
+        </p:spPr>
+      </p:sp>
+      <p:sp>
+        <p:nvSpPr>
+          <p:cNvPr id="14" name="">
+            <a:extLst xmlns:a="http://schemas.openxmlformats.org/drawingml/2006/main">
+              <a:ext uri="{FF2B5EF4-FFF2-40B4-BE49-F238E27FC236}">
+                <a16:creationId xmlns:a16="http://schemas.microsoft.com/office/drawing/2014/main" id="{33BD78E3-4B7B-4CAD-B90A-ACAE0627FEB1}"/>
+              </a:ext>
+            </a:extLst>
+          </p:cNvPr>
+          <p:cNvSpPr>
+            <a:spLocks xmlns:a="http://schemas.openxmlformats.org/drawingml/2006/main" noGrp="1"/>
+          </p:cNvSpPr>
+          <p:nvPr/>
+        </p:nvSpPr>
+        <p:spPr>
+          <a:xfrm xmlns:a="http://schemas.openxmlformats.org/drawingml/2006/main">
+            <a:off x="1047750" y="4781550"/>
+            <a:ext cx="4953000" cy="285750"/>
+          </a:xfrm>
+          <a:prstGeom xmlns:a="http://schemas.openxmlformats.org/drawingml/2006/main" prst="rect">
+            <a:avLst/>
+          </a:prstGeom>
+          <a:noFill xmlns:a="http://schemas.openxmlformats.org/drawingml/2006/main"/>
+          <a:ln xmlns:a="http://schemas.openxmlformats.org/drawingml/2006/main" w="0">
+            <a:noFill/>
+            <a:prstDash val="solid"/>
+          </a:ln>
+        </p:spPr>
+        <p:txBody>
+          <a:bodyPr xmlns:a="http://schemas.openxmlformats.org/drawingml/2006/main"/>
+          <a:lstStyle xmlns:a="http://schemas.openxmlformats.org/drawingml/2006/main"/>
+          <a:p xmlns:a="http://schemas.openxmlformats.org/drawingml/2006/main">
+            <a:pPr>
+              <a:buNone/>
+              <a:defRPr sz="1650" b="1">
+                <a:solidFill>
+                  <a:srgbClr val="111827"/>
+                </a:solidFill>
+              </a:defRPr>
+            </a:pPr>
+            <a:r>
+              <a:rPr sz="1650" b="1">
+                <a:solidFill>
+                  <a:srgbClr val="111827"/>
+                </a:solidFill>
+              </a:rPr>
+              <a:t>05｜哪些資料不該收集？</a:t>
+            </a:r>
+          </a:p>
+        </p:txBody>
+      </p:sp>
+      <p:sp>
+        <p:nvSpPr>
+          <p:cNvPr id="15" name="">
+            <a:extLst xmlns:a="http://schemas.openxmlformats.org/drawingml/2006/main">
+              <a:ext uri="{FF2B5EF4-FFF2-40B4-BE49-F238E27FC236}">
+                <a16:creationId xmlns:a16="http://schemas.microsoft.com/office/drawing/2014/main" id="{DF124CDB-33F2-4867-A8DB-811DAE2E229B}"/>
+              </a:ext>
+            </a:extLst>
+          </p:cNvPr>
+          <p:cNvSpPr>
+            <a:spLocks xmlns:a="http://schemas.openxmlformats.org/drawingml/2006/main" noGrp="1"/>
+          </p:cNvSpPr>
+          <p:nvPr/>
+        </p:nvSpPr>
+        <p:spPr>
+          <a:xfrm xmlns:a="http://schemas.openxmlformats.org/drawingml/2006/main">
+            <a:off x="1047750" y="5162550"/>
+            <a:ext cx="9620250" cy="0"/>
+          </a:xfrm>
+          <a:prstGeom xmlns:a="http://schemas.openxmlformats.org/drawingml/2006/main" prst="line">
+            <a:avLst/>
+          </a:prstGeom>
+          <a:noFill xmlns:a="http://schemas.openxmlformats.org/drawingml/2006/main"/>
+          <a:ln xmlns:a="http://schemas.openxmlformats.org/drawingml/2006/main" w="9525">
+            <a:solidFill>
+              <a:srgbClr val="D7DEE7"/>
+            </a:solidFill>
+            <a:prstDash val="solid"/>
+          </a:ln>
+        </p:spPr>
+      </p:sp>
+    </p:spTree>
+    <p:extLst>
+      <p:ext uri="{BB962C8B-B14F-4D97-AF65-F5344CB8AC3E}">
+        <p14:creationId xmlns:p14="http://schemas.microsoft.com/office/powerpoint/2010/main" val="2076906398"/>
+      </p:ext>
+    </p:extLst>
+  </p:cSld>
+</p:sld>
+</file>
+
+<file path=ppt/slides/slide12.xml><?xml version="1.0" encoding="utf-8"?>
+<p:sld xmlns:p="http://schemas.openxmlformats.org/presentationml/2006/main">
+  <p:cSld>
+    <p:bg>
+      <p:bgPr>
+        <a:solidFill xmlns:a="http://schemas.openxmlformats.org/drawingml/2006/main">
+          <a:srgbClr val="FFFFFF"/>
+        </a:solidFill>
+      </p:bgPr>
+    </p:bg>
+    <p:spTree>
+      <p:nvGrpSpPr>
+        <p:cNvPr id="1" name=""/>
+        <p:cNvGrpSpPr/>
+        <p:nvPr/>
+      </p:nvGrpSpPr>
+      <p:grpSpPr>
+        <a:xfrm xmlns:a="http://schemas.openxmlformats.org/drawingml/2006/main"/>
+      </p:grpSpPr>
+      <p:sp>
+        <p:nvSpPr>
+          <p:cNvPr id="9" name="">
+            <a:extLst xmlns:a="http://schemas.openxmlformats.org/drawingml/2006/main">
+              <a:ext uri="{FF2B5EF4-FFF2-40B4-BE49-F238E27FC236}">
+                <a16:creationId xmlns:a16="http://schemas.microsoft.com/office/drawing/2014/main" id="{B6AF8305-7D56-4132-AE9A-2A128AF101C5}"/>
+              </a:ext>
+            </a:extLst>
+          </p:cNvPr>
+          <p:cNvSpPr>
+            <a:spLocks xmlns:a="http://schemas.openxmlformats.org/drawingml/2006/main" noGrp="1"/>
+          </p:cNvSpPr>
+          <p:nvPr/>
+        </p:nvSpPr>
+        <p:spPr>
+          <a:xfrm xmlns:a="http://schemas.openxmlformats.org/drawingml/2006/main">
+            <a:off x="609600" y="323850"/>
+            <a:ext cx="5715000" cy="228600"/>
+          </a:xfrm>
+          <a:prstGeom xmlns:a="http://schemas.openxmlformats.org/drawingml/2006/main" prst="rect">
+            <a:avLst/>
+          </a:prstGeom>
+          <a:noFill xmlns:a="http://schemas.openxmlformats.org/drawingml/2006/main"/>
+          <a:ln xmlns:a="http://schemas.openxmlformats.org/drawingml/2006/main" w="0">
+            <a:noFill/>
+            <a:prstDash val="solid"/>
+          </a:ln>
+        </p:spPr>
+        <p:txBody>
+          <a:bodyPr xmlns:a="http://schemas.openxmlformats.org/drawingml/2006/main"/>
+          <a:lstStyle xmlns:a="http://schemas.openxmlformats.org/drawingml/2006/main"/>
+          <a:p xmlns:a="http://schemas.openxmlformats.org/drawingml/2006/main">
+            <a:pPr>
+              <a:buNone/>
+              <a:defRPr sz="975" b="1">
+                <a:solidFill>
+                  <a:srgbClr val="3D8DFF"/>
+                </a:solidFill>
+              </a:defRPr>
+            </a:pPr>
+            <a:r>
+              <a:rPr sz="975" b="1">
+                <a:solidFill>
+                  <a:srgbClr val="3D8DFF"/>
+                </a:solidFill>
+              </a:rPr>
+              <a:t>AI 工具實戰進階班 / 第 03 堂</a:t>
+            </a:r>
+          </a:p>
+        </p:txBody>
+      </p:sp>
+      <p:sp>
+        <p:nvSpPr>
+          <p:cNvPr id="2" name="">
+            <a:extLst xmlns:a="http://schemas.openxmlformats.org/drawingml/2006/main">
+              <a:ext uri="{FF2B5EF4-FFF2-40B4-BE49-F238E27FC236}">
+                <a16:creationId xmlns:a16="http://schemas.microsoft.com/office/drawing/2014/main" id="{E4CEAB51-E956-4FA5-8326-E1A935BEA73A}"/>
+              </a:ext>
+            </a:extLst>
+          </p:cNvPr>
+          <p:cNvSpPr>
+            <a:spLocks xmlns:a="http://schemas.openxmlformats.org/drawingml/2006/main" noGrp="1"/>
+          </p:cNvSpPr>
+          <p:nvPr/>
+        </p:nvSpPr>
+        <p:spPr>
+          <a:xfrm xmlns:a="http://schemas.openxmlformats.org/drawingml/2006/main">
+            <a:off x="609600" y="647700"/>
+            <a:ext cx="10668000" cy="533400"/>
+          </a:xfrm>
+          <a:prstGeom xmlns:a="http://schemas.openxmlformats.org/drawingml/2006/main" prst="rect">
+            <a:avLst/>
+          </a:prstGeom>
+          <a:noFill xmlns:a="http://schemas.openxmlformats.org/drawingml/2006/main"/>
+          <a:ln xmlns:a="http://schemas.openxmlformats.org/drawingml/2006/main" w="0">
+            <a:noFill/>
+            <a:prstDash val="solid"/>
+          </a:ln>
+        </p:spPr>
+        <p:txBody>
+          <a:bodyPr xmlns:a="http://schemas.openxmlformats.org/drawingml/2006/main"/>
+          <a:lstStyle xmlns:a="http://schemas.openxmlformats.org/drawingml/2006/main"/>
+          <a:p xmlns:a="http://schemas.openxmlformats.org/drawingml/2006/main">
+            <a:pPr>
+              <a:buNone/>
+              <a:defRPr sz="2700" b="1">
+                <a:solidFill>
+                  <a:srgbClr val="111827"/>
+                </a:solidFill>
+              </a:defRPr>
+            </a:pPr>
+            <a:r>
+              <a:rPr sz="2700" b="1">
+                <a:solidFill>
+                  <a:srgbClr val="111827"/>
+                </a:solidFill>
+              </a:rPr>
+              <a:t>課程總結</a:t>
+            </a:r>
+          </a:p>
+        </p:txBody>
+      </p:sp>
+      <p:sp>
+        <p:nvSpPr>
+          <p:cNvPr id="3" name="">
+            <a:extLst xmlns:a="http://schemas.openxmlformats.org/drawingml/2006/main">
+              <a:ext uri="{FF2B5EF4-FFF2-40B4-BE49-F238E27FC236}">
+                <a16:creationId xmlns:a16="http://schemas.microsoft.com/office/drawing/2014/main" id="{05928997-BC42-4D45-B6E2-2DA94FDDEAE4}"/>
+              </a:ext>
+            </a:extLst>
+          </p:cNvPr>
+          <p:cNvSpPr>
+            <a:spLocks xmlns:a="http://schemas.openxmlformats.org/drawingml/2006/main" noGrp="1"/>
+          </p:cNvSpPr>
+          <p:nvPr/>
+        </p:nvSpPr>
+        <p:spPr>
+          <a:xfrm xmlns:a="http://schemas.openxmlformats.org/drawingml/2006/main">
+            <a:off x="11049000" y="342900"/>
+            <a:ext cx="533400" cy="228600"/>
+          </a:xfrm>
+          <a:prstGeom xmlns:a="http://schemas.openxmlformats.org/drawingml/2006/main" prst="rect">
+            <a:avLst/>
+          </a:prstGeom>
+          <a:noFill xmlns:a="http://schemas.openxmlformats.org/drawingml/2006/main"/>
+          <a:ln xmlns:a="http://schemas.openxmlformats.org/drawingml/2006/main" w="0">
+            <a:noFill/>
+            <a:prstDash val="solid"/>
+          </a:ln>
+        </p:spPr>
+        <p:txBody>
+          <a:bodyPr xmlns:a="http://schemas.openxmlformats.org/drawingml/2006/main"/>
+          <a:lstStyle xmlns:a="http://schemas.openxmlformats.org/drawingml/2006/main"/>
+          <a:p xmlns:a="http://schemas.openxmlformats.org/drawingml/2006/main">
+            <a:pPr algn="r">
+              <a:buNone/>
+              <a:defRPr sz="1050" b="1">
+                <a:solidFill>
+                  <a:srgbClr val="536273"/>
+                </a:solidFill>
+              </a:defRPr>
+            </a:pPr>
+            <a:r>
+              <a:rPr sz="1050" b="1">
+                <a:solidFill>
+                  <a:srgbClr val="536273"/>
+                </a:solidFill>
+              </a:rPr>
+              <a:t>12</a:t>
+            </a:r>
+          </a:p>
+        </p:txBody>
+      </p:sp>
+      <p:sp>
+        <p:nvSpPr>
+          <p:cNvPr id="4" name="">
+            <a:extLst xmlns:a="http://schemas.openxmlformats.org/drawingml/2006/main">
+              <a:ext uri="{FF2B5EF4-FFF2-40B4-BE49-F238E27FC236}">
+                <a16:creationId xmlns:a16="http://schemas.microsoft.com/office/drawing/2014/main" id="{E80A4A7F-D531-43BB-8D5E-1D5C1CAFA94B}"/>
+              </a:ext>
+            </a:extLst>
+          </p:cNvPr>
+          <p:cNvSpPr>
+            <a:spLocks xmlns:a="http://schemas.openxmlformats.org/drawingml/2006/main" noGrp="1"/>
+          </p:cNvSpPr>
+          <p:nvPr/>
+        </p:nvSpPr>
+        <p:spPr>
+          <a:xfrm xmlns:a="http://schemas.openxmlformats.org/drawingml/2006/main">
+            <a:off x="609600" y="1314450"/>
+            <a:ext cx="10972800" cy="0"/>
+          </a:xfrm>
+          <a:prstGeom xmlns:a="http://schemas.openxmlformats.org/drawingml/2006/main" prst="line">
+            <a:avLst/>
+          </a:prstGeom>
+          <a:noFill xmlns:a="http://schemas.openxmlformats.org/drawingml/2006/main"/>
+          <a:ln xmlns:a="http://schemas.openxmlformats.org/drawingml/2006/main" w="9525">
+            <a:solidFill>
+              <a:srgbClr val="D7DEE7"/>
+            </a:solidFill>
+            <a:prstDash val="solid"/>
+          </a:ln>
+        </p:spPr>
+      </p:sp>
+      <p:sp>
+        <p:nvSpPr>
+          <p:cNvPr id="5" name="">
+            <a:extLst xmlns:a="http://schemas.openxmlformats.org/drawingml/2006/main">
+              <a:ext uri="{FF2B5EF4-FFF2-40B4-BE49-F238E27FC236}">
+                <a16:creationId xmlns:a16="http://schemas.microsoft.com/office/drawing/2014/main" id="{0BFEB924-E108-43F6-8915-DF780A623D28}"/>
+              </a:ext>
+            </a:extLst>
+          </p:cNvPr>
+          <p:cNvSpPr>
+            <a:spLocks xmlns:a="http://schemas.openxmlformats.org/drawingml/2006/main" noGrp="1"/>
+          </p:cNvSpPr>
+          <p:nvPr/>
+        </p:nvSpPr>
+        <p:spPr>
+          <a:xfrm xmlns:a="http://schemas.openxmlformats.org/drawingml/2006/main">
+            <a:off x="609600" y="1809750"/>
+            <a:ext cx="9525000" cy="762000"/>
+          </a:xfrm>
+          <a:prstGeom xmlns:a="http://schemas.openxmlformats.org/drawingml/2006/main" prst="rect">
+            <a:avLst/>
+          </a:prstGeom>
+          <a:noFill xmlns:a="http://schemas.openxmlformats.org/drawingml/2006/main"/>
+          <a:ln xmlns:a="http://schemas.openxmlformats.org/drawingml/2006/main" w="0">
+            <a:noFill/>
+            <a:prstDash val="solid"/>
+          </a:ln>
+        </p:spPr>
+        <p:txBody>
+          <a:bodyPr xmlns:a="http://schemas.openxmlformats.org/drawingml/2006/main"/>
+          <a:lstStyle xmlns:a="http://schemas.openxmlformats.org/drawingml/2006/main"/>
+          <a:p xmlns:a="http://schemas.openxmlformats.org/drawingml/2006/main">
+            <a:pPr>
+              <a:buNone/>
+              <a:defRPr sz="2400" b="1">
+                <a:solidFill>
+                  <a:srgbClr val="111827"/>
+                </a:solidFill>
+              </a:defRPr>
+            </a:pPr>
+            <a:r>
+              <a:rPr sz="2400" b="1">
+                <a:solidFill>
+                  <a:srgbClr val="111827"/>
+                </a:solidFill>
+              </a:rPr>
+              <a:t>測驗真正有用，不是收很多分數，而是知道下一堂要教什麼。</a:t>
+            </a:r>
+          </a:p>
+        </p:txBody>
+      </p:sp>
+      <p:sp>
+        <p:nvSpPr>
+          <p:cNvPr id="6" name="">
+            <a:extLst xmlns:a="http://schemas.openxmlformats.org/drawingml/2006/main">
+              <a:ext uri="{FF2B5EF4-FFF2-40B4-BE49-F238E27FC236}">
+                <a16:creationId xmlns:a16="http://schemas.microsoft.com/office/drawing/2014/main" id="{39768116-9286-4FFB-8A54-A456797C2797}"/>
+              </a:ext>
+            </a:extLst>
+          </p:cNvPr>
+          <p:cNvSpPr>
+            <a:spLocks xmlns:a="http://schemas.openxmlformats.org/drawingml/2006/main" noGrp="1"/>
+          </p:cNvSpPr>
+          <p:nvPr/>
+        </p:nvSpPr>
+        <p:spPr>
+          <a:xfrm xmlns:a="http://schemas.openxmlformats.org/drawingml/2006/main">
+            <a:off x="647700" y="3429000"/>
+            <a:ext cx="8572500" cy="476250"/>
+          </a:xfrm>
+          <a:prstGeom xmlns:a="http://schemas.openxmlformats.org/drawingml/2006/main" prst="rect">
+            <a:avLst/>
+          </a:prstGeom>
+          <a:noFill xmlns:a="http://schemas.openxmlformats.org/drawingml/2006/main"/>
+          <a:ln xmlns:a="http://schemas.openxmlformats.org/drawingml/2006/main" w="0">
+            <a:noFill/>
+            <a:prstDash val="solid"/>
+          </a:ln>
+        </p:spPr>
+        <p:txBody>
+          <a:bodyPr xmlns:a="http://schemas.openxmlformats.org/drawingml/2006/main"/>
+          <a:lstStyle xmlns:a="http://schemas.openxmlformats.org/drawingml/2006/main"/>
+          <a:p xmlns:a="http://schemas.openxmlformats.org/drawingml/2006/main">
+            <a:pPr>
+              <a:buNone/>
+              <a:defRPr sz="1950" b="1">
+                <a:solidFill>
+                  <a:srgbClr val="3D8DFF"/>
+                </a:solidFill>
+              </a:defRPr>
+            </a:pPr>
+            <a:r>
+              <a:rPr sz="1950" b="1">
+                <a:solidFill>
+                  <a:srgbClr val="3D8DFF"/>
+                </a:solidFill>
+              </a:rPr>
+              <a:t>下一步：把資料分析、題庫生成與自動化接上第 4 堂。</a:t>
+            </a:r>
+          </a:p>
+        </p:txBody>
+      </p:sp>
+      <p:sp>
+        <p:nvSpPr>
+          <p:cNvPr id="7" name="">
+            <a:extLst xmlns:a="http://schemas.openxmlformats.org/drawingml/2006/main">
+              <a:ext uri="{FF2B5EF4-FFF2-40B4-BE49-F238E27FC236}">
+                <a16:creationId xmlns:a16="http://schemas.microsoft.com/office/drawing/2014/main" id="{6B9237D0-3757-469C-B343-975461C6ACF2}"/>
+              </a:ext>
+            </a:extLst>
+          </p:cNvPr>
+          <p:cNvSpPr>
+            <a:spLocks xmlns:a="http://schemas.openxmlformats.org/drawingml/2006/main" noGrp="1"/>
+          </p:cNvSpPr>
+          <p:nvPr/>
+        </p:nvSpPr>
+        <p:spPr>
+          <a:xfrm xmlns:a="http://schemas.openxmlformats.org/drawingml/2006/main">
+            <a:off x="8763000" y="1905000"/>
+            <a:ext cx="2095500" cy="2095500"/>
+          </a:xfrm>
+          <a:prstGeom xmlns:a="http://schemas.openxmlformats.org/drawingml/2006/main" prst="roundRect">
+            <a:avLst>
+              <a:gd name="adj" fmla="val 3636"/>
+            </a:avLst>
+          </a:prstGeom>
+          <a:solidFill xmlns:a="http://schemas.openxmlformats.org/drawingml/2006/main">
+            <a:srgbClr val="3D8DFF"/>
+          </a:solidFill>
+          <a:ln xmlns:a="http://schemas.openxmlformats.org/drawingml/2006/main" w="9525">
+            <a:solidFill>
+              <a:srgbClr val="3D8DFF"/>
+            </a:solidFill>
+            <a:prstDash val="solid"/>
+          </a:ln>
+        </p:spPr>
+      </p:sp>
+      <p:sp>
+        <p:nvSpPr>
+          <p:cNvPr id="8" name="">
+            <a:extLst xmlns:a="http://schemas.openxmlformats.org/drawingml/2006/main">
+              <a:ext uri="{FF2B5EF4-FFF2-40B4-BE49-F238E27FC236}">
+                <a16:creationId xmlns:a16="http://schemas.microsoft.com/office/drawing/2014/main" id="{E76A03A2-72FB-43AB-840C-BA0002ED0FEB}"/>
+              </a:ext>
+            </a:extLst>
+          </p:cNvPr>
+          <p:cNvSpPr>
+            <a:spLocks xmlns:a="http://schemas.openxmlformats.org/drawingml/2006/main" noGrp="1"/>
+          </p:cNvSpPr>
+          <p:nvPr/>
+        </p:nvSpPr>
+        <p:spPr>
+          <a:xfrm xmlns:a="http://schemas.openxmlformats.org/drawingml/2006/main">
+            <a:off x="9048750" y="2619375"/>
+            <a:ext cx="1524000" cy="523875"/>
+          </a:xfrm>
+          <a:prstGeom xmlns:a="http://schemas.openxmlformats.org/drawingml/2006/main" prst="rect">
+            <a:avLst/>
+          </a:prstGeom>
+          <a:noFill xmlns:a="http://schemas.openxmlformats.org/drawingml/2006/main"/>
+          <a:ln xmlns:a="http://schemas.openxmlformats.org/drawingml/2006/main" w="0">
+            <a:noFill/>
+            <a:prstDash val="solid"/>
+          </a:ln>
+        </p:spPr>
+        <p:txBody>
+          <a:bodyPr xmlns:a="http://schemas.openxmlformats.org/drawingml/2006/main"/>
+          <a:lstStyle xmlns:a="http://schemas.openxmlformats.org/drawingml/2006/main"/>
+          <a:p xmlns:a="http://schemas.openxmlformats.org/drawingml/2006/main">
+            <a:pPr algn="ctr">
+              <a:buNone/>
+              <a:defRPr sz="3300" b="1">
+                <a:solidFill>
+                  <a:srgbClr val="FFFFFF"/>
+                </a:solidFill>
+              </a:defRPr>
+            </a:pPr>
+            <a:r>
+              <a:rPr sz="3300" b="1">
+                <a:solidFill>
+                  <a:srgbClr val="FFFFFF"/>
+                </a:solidFill>
+              </a:rPr>
+              <a:t>NEXT</a:t>
+            </a:r>
+          </a:p>
+        </p:txBody>
+      </p:sp>
+    </p:spTree>
+    <p:extLst>
+      <p:ext uri="{BB962C8B-B14F-4D97-AF65-F5344CB8AC3E}">
+        <p14:creationId xmlns:p14="http://schemas.microsoft.com/office/powerpoint/2010/main" val="630496395"/>
       </p:ext>
     </p:extLst>
   </p:cSld>
@@ -2070,6 +4574,7 @@
           <a:lstStyle xmlns:a="http://schemas.openxmlformats.org/drawingml/2006/main"/>
           <a:p xmlns:a="http://schemas.openxmlformats.org/drawingml/2006/main">
             <a:pPr>
+              <a:buNone/>
               <a:defRPr sz="975" b="1">
                 <a:solidFill>
                   <a:srgbClr val="3D8DFF"/>
@@ -2120,6 +4625,7 @@
           <a:lstStyle xmlns:a="http://schemas.openxmlformats.org/drawingml/2006/main"/>
           <a:p xmlns:a="http://schemas.openxmlformats.org/drawingml/2006/main">
             <a:pPr>
+              <a:buNone/>
               <a:defRPr sz="2700" b="1">
                 <a:solidFill>
                   <a:srgbClr val="111827"/>
@@ -2170,6 +4676,7 @@
           <a:lstStyle xmlns:a="http://schemas.openxmlformats.org/drawingml/2006/main"/>
           <a:p xmlns:a="http://schemas.openxmlformats.org/drawingml/2006/main">
             <a:pPr algn="r">
+              <a:buNone/>
               <a:defRPr sz="1050" b="1">
                 <a:solidFill>
                   <a:srgbClr val="536273"/>
@@ -2251,6 +4758,7 @@
           <a:lstStyle xmlns:a="http://schemas.openxmlformats.org/drawingml/2006/main"/>
           <a:p xmlns:a="http://schemas.openxmlformats.org/drawingml/2006/main">
             <a:pPr>
+              <a:buNone/>
               <a:defRPr sz="2025" b="1">
                 <a:solidFill>
                   <a:srgbClr val="111827"/>
@@ -2301,6 +4809,7 @@
           <a:lstStyle xmlns:a="http://schemas.openxmlformats.org/drawingml/2006/main"/>
           <a:p xmlns:a="http://schemas.openxmlformats.org/drawingml/2006/main">
             <a:pPr>
+              <a:buNone/>
               <a:defRPr sz="1500">
                 <a:solidFill>
                   <a:srgbClr val="111827"/>
@@ -2313,7 +4822,7 @@
                   <a:srgbClr val="111827"/>
                 </a:solidFill>
               </a:rPr>
-              <a:t>• 拆解題庫使用情境</a:t>
+              <a:t>• 從教師版或自己的測驗重新起跑</a:t>
             </a:r>
           </a:p>
         </p:txBody>
@@ -2351,6 +4860,7 @@
           <a:lstStyle xmlns:a="http://schemas.openxmlformats.org/drawingml/2006/main"/>
           <a:p xmlns:a="http://schemas.openxmlformats.org/drawingml/2006/main">
             <a:pPr>
+              <a:buNone/>
               <a:defRPr sz="1500">
                 <a:solidFill>
                   <a:srgbClr val="111827"/>
@@ -2363,7 +4873,7 @@
                   <a:srgbClr val="111827"/>
                 </a:solidFill>
               </a:rPr>
-              <a:t>• 規劃題目與答案資料結構</a:t>
+              <a:t>• 用 google.script.run 傳送一筆成績</a:t>
             </a:r>
           </a:p>
         </p:txBody>
@@ -2401,6 +4911,7 @@
           <a:lstStyle xmlns:a="http://schemas.openxmlformats.org/drawingml/2006/main"/>
           <a:p xmlns:a="http://schemas.openxmlformats.org/drawingml/2006/main">
             <a:pPr>
+              <a:buNone/>
               <a:defRPr sz="1500">
                 <a:solidFill>
                   <a:srgbClr val="111827"/>
@@ -2413,7 +4924,7 @@
                   <a:srgbClr val="111827"/>
                 </a:solidFill>
               </a:rPr>
-              <a:t>• 用 Gemini 產出需求 brief</a:t>
+              <a:t>• 部署正式網址並完成跨裝置測試</a:t>
             </a:r>
           </a:p>
         </p:txBody>
@@ -2488,6 +4999,7 @@
           <a:lstStyle xmlns:a="http://schemas.openxmlformats.org/drawingml/2006/main"/>
           <a:p xmlns:a="http://schemas.openxmlformats.org/drawingml/2006/main">
             <a:pPr>
+              <a:buNone/>
               <a:defRPr sz="1800" b="1">
                 <a:solidFill>
                   <a:srgbClr val="3D8DFF"/>
@@ -2538,6 +5050,7 @@
           <a:lstStyle xmlns:a="http://schemas.openxmlformats.org/drawingml/2006/main"/>
           <a:p xmlns:a="http://schemas.openxmlformats.org/drawingml/2006/main">
             <a:pPr algn="ctr">
+              <a:buNone/>
               <a:defRPr sz="1875" b="1">
                 <a:solidFill>
                   <a:srgbClr val="111827"/>
@@ -2550,7 +5063,9 @@
                   <a:srgbClr val="111827"/>
                 </a:solidFill>
               </a:rPr>
-              <a:t>題庫需求 brief、資料欄位表、畫面草圖</a:t>
+              <a:t>Web App 網址
+兩筆測試資料
+權限說明</a:t>
             </a:r>
           </a:p>
         </p:txBody>
@@ -2617,6 +5132,7 @@
           <a:lstStyle xmlns:a="http://schemas.openxmlformats.org/drawingml/2006/main"/>
           <a:p xmlns:a="http://schemas.openxmlformats.org/drawingml/2006/main">
             <a:pPr>
+              <a:buNone/>
               <a:defRPr sz="975" b="1">
                 <a:solidFill>
                   <a:srgbClr val="3D8DFF"/>
@@ -2667,6 +5183,7 @@
           <a:lstStyle xmlns:a="http://schemas.openxmlformats.org/drawingml/2006/main"/>
           <a:p xmlns:a="http://schemas.openxmlformats.org/drawingml/2006/main">
             <a:pPr>
+              <a:buNone/>
               <a:defRPr sz="2700" b="1">
                 <a:solidFill>
                   <a:srgbClr val="111827"/>
@@ -2679,7 +5196,7 @@
                   <a:srgbClr val="111827"/>
                 </a:solidFill>
               </a:rPr>
-              <a:t>核心觀念</a:t>
+              <a:t>資料怎麼走？</a:t>
             </a:r>
           </a:p>
         </p:txBody>
@@ -2717,6 +5234,7 @@
           <a:lstStyle xmlns:a="http://schemas.openxmlformats.org/drawingml/2006/main"/>
           <a:p xmlns:a="http://schemas.openxmlformats.org/drawingml/2006/main">
             <a:pPr algn="r">
+              <a:buNone/>
               <a:defRPr sz="1050" b="1">
                 <a:solidFill>
                   <a:srgbClr val="536273"/>
@@ -2798,6 +5316,7 @@
           <a:lstStyle xmlns:a="http://schemas.openxmlformats.org/drawingml/2006/main"/>
           <a:p xmlns:a="http://schemas.openxmlformats.org/drawingml/2006/main">
             <a:pPr>
+              <a:buNone/>
               <a:defRPr sz="2025" b="1">
                 <a:solidFill>
                   <a:srgbClr val="111827"/>
@@ -2810,7 +5329,7 @@
                   <a:srgbClr val="111827"/>
                 </a:solidFill>
               </a:rPr>
-              <a:t>把這堂課記成三個關鍵決定：</a:t>
+              <a:t>學生按下送出後，資料依序經過：</a:t>
             </a:r>
           </a:p>
         </p:txBody>
@@ -2885,6 +5404,7 @@
           <a:lstStyle xmlns:a="http://schemas.openxmlformats.org/drawingml/2006/main"/>
           <a:p xmlns:a="http://schemas.openxmlformats.org/drawingml/2006/main">
             <a:pPr>
+              <a:buNone/>
               <a:defRPr sz="1575" b="1">
                 <a:solidFill>
                   <a:srgbClr val="3D8DFF"/>
@@ -2935,6 +5455,7 @@
           <a:lstStyle xmlns:a="http://schemas.openxmlformats.org/drawingml/2006/main"/>
           <a:p xmlns:a="http://schemas.openxmlformats.org/drawingml/2006/main">
             <a:pPr>
+              <a:buNone/>
               <a:defRPr sz="1725" b="1">
                 <a:solidFill>
                   <a:srgbClr val="111827"/>
@@ -2947,7 +5468,7 @@
                   <a:srgbClr val="111827"/>
                 </a:solidFill>
               </a:rPr>
-              <a:t>誰要使用</a:t>
+              <a:t>Index.html｜整理姓名、分數與答案</a:t>
             </a:r>
           </a:p>
         </p:txBody>
@@ -3020,6 +5541,7 @@
           <a:lstStyle xmlns:a="http://schemas.openxmlformats.org/drawingml/2006/main"/>
           <a:p xmlns:a="http://schemas.openxmlformats.org/drawingml/2006/main">
             <a:pPr>
+              <a:buNone/>
               <a:defRPr sz="1575" b="1">
                 <a:solidFill>
                   <a:srgbClr val="3D8DFF"/>
@@ -3070,6 +5592,7 @@
           <a:lstStyle xmlns:a="http://schemas.openxmlformats.org/drawingml/2006/main"/>
           <a:p xmlns:a="http://schemas.openxmlformats.org/drawingml/2006/main">
             <a:pPr>
+              <a:buNone/>
               <a:defRPr sz="1725" b="1">
                 <a:solidFill>
                   <a:srgbClr val="111827"/>
@@ -3082,7 +5605,7 @@
                   <a:srgbClr val="111827"/>
                 </a:solidFill>
               </a:rPr>
-              <a:t>要解決什麼問題</a:t>
+              <a:t>google.script.run｜傳送並等待回應</a:t>
             </a:r>
           </a:p>
         </p:txBody>
@@ -3157,6 +5680,7 @@
           <a:lstStyle xmlns:a="http://schemas.openxmlformats.org/drawingml/2006/main"/>
           <a:p xmlns:a="http://schemas.openxmlformats.org/drawingml/2006/main">
             <a:pPr>
+              <a:buNone/>
               <a:defRPr sz="1575" b="1">
                 <a:solidFill>
                   <a:srgbClr val="3D8DFF"/>
@@ -3207,6 +5731,7 @@
           <a:lstStyle xmlns:a="http://schemas.openxmlformats.org/drawingml/2006/main"/>
           <a:p xmlns:a="http://schemas.openxmlformats.org/drawingml/2006/main">
             <a:pPr>
+              <a:buNone/>
               <a:defRPr sz="1725" b="1">
                 <a:solidFill>
                   <a:srgbClr val="111827"/>
@@ -3219,7 +5744,7 @@
                   <a:srgbClr val="111827"/>
                 </a:solidFill>
               </a:rPr>
-              <a:t>完成後如何判斷有效</a:t>
+              <a:t>Code.gs｜驗證後 appendRow 到 Sheets</a:t>
             </a:r>
           </a:p>
         </p:txBody>
@@ -3286,6 +5811,7 @@
           <a:lstStyle xmlns:a="http://schemas.openxmlformats.org/drawingml/2006/main"/>
           <a:p xmlns:a="http://schemas.openxmlformats.org/drawingml/2006/main">
             <a:pPr>
+              <a:buNone/>
               <a:defRPr sz="975" b="1">
                 <a:solidFill>
                   <a:srgbClr val="3D8DFF"/>
@@ -3336,6 +5862,7 @@
           <a:lstStyle xmlns:a="http://schemas.openxmlformats.org/drawingml/2006/main"/>
           <a:p xmlns:a="http://schemas.openxmlformats.org/drawingml/2006/main">
             <a:pPr>
+              <a:buNone/>
               <a:defRPr sz="2700" b="1">
                 <a:solidFill>
                   <a:srgbClr val="111827"/>
@@ -3348,7 +5875,7 @@
                   <a:srgbClr val="111827"/>
                 </a:solidFill>
               </a:rPr>
-              <a:t>操作流程</a:t>
+              <a:t>全班重新起跑</a:t>
             </a:r>
           </a:p>
         </p:txBody>
@@ -3386,6 +5913,7 @@
           <a:lstStyle xmlns:a="http://schemas.openxmlformats.org/drawingml/2006/main"/>
           <a:p xmlns:a="http://schemas.openxmlformats.org/drawingml/2006/main">
             <a:pPr algn="r">
+              <a:buNone/>
               <a:defRPr sz="1050" b="1">
                 <a:solidFill>
                   <a:srgbClr val="536273"/>
@@ -3467,6 +5995,7 @@
           <a:lstStyle xmlns:a="http://schemas.openxmlformats.org/drawingml/2006/main"/>
           <a:p xmlns:a="http://schemas.openxmlformats.org/drawingml/2006/main">
             <a:pPr>
+              <a:buNone/>
               <a:defRPr sz="2025" b="1">
                 <a:solidFill>
                   <a:srgbClr val="111827"/>
@@ -3479,7 +6008,7 @@
                   <a:srgbClr val="111827"/>
                 </a:solidFill>
               </a:rPr>
-              <a:t>用這條流程，把想法做成可驗收成果：</a:t>
+              <a:t>上一堂做到哪裡都沒關係，今天共用一條資料路線：</a:t>
             </a:r>
           </a:p>
         </p:txBody>
@@ -3554,6 +6083,7 @@
           <a:lstStyle xmlns:a="http://schemas.openxmlformats.org/drawingml/2006/main"/>
           <a:p xmlns:a="http://schemas.openxmlformats.org/drawingml/2006/main">
             <a:pPr>
+              <a:buNone/>
               <a:defRPr sz="1050" b="1">
                 <a:solidFill>
                   <a:srgbClr val="3D8DFF"/>
@@ -3604,6 +6134,7 @@
           <a:lstStyle xmlns:a="http://schemas.openxmlformats.org/drawingml/2006/main"/>
           <a:p xmlns:a="http://schemas.openxmlformats.org/drawingml/2006/main">
             <a:pPr>
+              <a:buNone/>
               <a:defRPr sz="1575" b="1">
                 <a:solidFill>
                   <a:srgbClr val="111827"/>
@@ -3616,7 +6147,7 @@
                   <a:srgbClr val="111827"/>
                 </a:solidFill>
               </a:rPr>
-              <a:t>描述使用情境</a:t>
+              <a:t>選教師版／自用版</a:t>
             </a:r>
           </a:p>
         </p:txBody>
@@ -3691,6 +6222,7 @@
           <a:lstStyle xmlns:a="http://schemas.openxmlformats.org/drawingml/2006/main"/>
           <a:p xmlns:a="http://schemas.openxmlformats.org/drawingml/2006/main">
             <a:pPr>
+              <a:buNone/>
               <a:defRPr sz="1050" b="1">
                 <a:solidFill>
                   <a:srgbClr val="E3A62F"/>
@@ -3741,6 +6273,7 @@
           <a:lstStyle xmlns:a="http://schemas.openxmlformats.org/drawingml/2006/main"/>
           <a:p xmlns:a="http://schemas.openxmlformats.org/drawingml/2006/main">
             <a:pPr>
+              <a:buNone/>
               <a:defRPr sz="1575" b="1">
                 <a:solidFill>
                   <a:srgbClr val="111827"/>
@@ -3753,7 +6286,7 @@
                   <a:srgbClr val="111827"/>
                 </a:solidFill>
               </a:rPr>
-              <a:t>定義題型與欄位</a:t>
+              <a:t>建立測驗紀錄表</a:t>
             </a:r>
           </a:p>
         </p:txBody>
@@ -3828,6 +6361,7 @@
           <a:lstStyle xmlns:a="http://schemas.openxmlformats.org/drawingml/2006/main"/>
           <a:p xmlns:a="http://schemas.openxmlformats.org/drawingml/2006/main">
             <a:pPr>
+              <a:buNone/>
               <a:defRPr sz="1050" b="1">
                 <a:solidFill>
                   <a:srgbClr val="3D8DFF"/>
@@ -3878,6 +6412,7 @@
           <a:lstStyle xmlns:a="http://schemas.openxmlformats.org/drawingml/2006/main"/>
           <a:p xmlns:a="http://schemas.openxmlformats.org/drawingml/2006/main">
             <a:pPr>
+              <a:buNone/>
               <a:defRPr sz="1575" b="1">
                 <a:solidFill>
                   <a:srgbClr val="111827"/>
@@ -3890,7 +6425,7 @@
                   <a:srgbClr val="111827"/>
                 </a:solidFill>
               </a:rPr>
-              <a:t>規劃畫面流程</a:t>
+              <a:t>貼 Code.gs／Index</a:t>
             </a:r>
           </a:p>
         </p:txBody>
@@ -3965,6 +6500,7 @@
           <a:lstStyle xmlns:a="http://schemas.openxmlformats.org/drawingml/2006/main"/>
           <a:p xmlns:a="http://schemas.openxmlformats.org/drawingml/2006/main">
             <a:pPr>
+              <a:buNone/>
               <a:defRPr sz="1050" b="1">
                 <a:solidFill>
                   <a:srgbClr val="E3A62F"/>
@@ -4015,6 +6551,7 @@
           <a:lstStyle xmlns:a="http://schemas.openxmlformats.org/drawingml/2006/main"/>
           <a:p xmlns:a="http://schemas.openxmlformats.org/drawingml/2006/main">
             <a:pPr>
+              <a:buNone/>
               <a:defRPr sz="1575" b="1">
                 <a:solidFill>
                   <a:srgbClr val="111827"/>
@@ -4027,7 +6564,7 @@
                   <a:srgbClr val="111827"/>
                 </a:solidFill>
               </a:rPr>
-              <a:t>請 Gemini 寫需求 brief</a:t>
+              <a:t>授權與部署</a:t>
             </a:r>
           </a:p>
         </p:txBody>
@@ -4102,6 +6639,7 @@
           <a:lstStyle xmlns:a="http://schemas.openxmlformats.org/drawingml/2006/main"/>
           <a:p xmlns:a="http://schemas.openxmlformats.org/drawingml/2006/main">
             <a:pPr>
+              <a:buNone/>
               <a:defRPr sz="1050" b="1">
                 <a:solidFill>
                   <a:srgbClr val="3D8DFF"/>
@@ -4152,6 +6690,7 @@
           <a:lstStyle xmlns:a="http://schemas.openxmlformats.org/drawingml/2006/main"/>
           <a:p xmlns:a="http://schemas.openxmlformats.org/drawingml/2006/main">
             <a:pPr>
+              <a:buNone/>
               <a:defRPr sz="1575" b="1">
                 <a:solidFill>
                   <a:srgbClr val="111827"/>
@@ -4164,7 +6703,7 @@
                   <a:srgbClr val="111827"/>
                 </a:solidFill>
               </a:rPr>
-              <a:t>產生 MVP 任務清單</a:t>
+              <a:t>同學跨裝置測試</a:t>
             </a:r>
           </a:p>
         </p:txBody>
@@ -4200,10 +6739,10 @@
       </p:grpSpPr>
       <p:sp>
         <p:nvSpPr>
-          <p:cNvPr id="8" name="">
-            <a:extLst xmlns:a="http://schemas.openxmlformats.org/drawingml/2006/main">
-              <a:ext uri="{FF2B5EF4-FFF2-40B4-BE49-F238E27FC236}">
-                <a16:creationId xmlns:a16="http://schemas.microsoft.com/office/drawing/2014/main" id="{0DC663EB-506A-4D2D-8E61-276E72B646C3}"/>
+          <p:cNvPr id="15" name="">
+            <a:extLst xmlns:a="http://schemas.openxmlformats.org/drawingml/2006/main">
+              <a:ext uri="{FF2B5EF4-FFF2-40B4-BE49-F238E27FC236}">
+                <a16:creationId xmlns:a16="http://schemas.microsoft.com/office/drawing/2014/main" id="{A4C043E3-EE81-4951-83C6-0827CDA54736}"/>
               </a:ext>
             </a:extLst>
           </p:cNvPr>
@@ -4231,6 +6770,7 @@
           <a:lstStyle xmlns:a="http://schemas.openxmlformats.org/drawingml/2006/main"/>
           <a:p xmlns:a="http://schemas.openxmlformats.org/drawingml/2006/main">
             <a:pPr>
+              <a:buNone/>
               <a:defRPr sz="975" b="1">
                 <a:solidFill>
                   <a:srgbClr val="3D8DFF"/>
@@ -4253,7 +6793,7 @@
           <p:cNvPr id="2" name="">
             <a:extLst xmlns:a="http://schemas.openxmlformats.org/drawingml/2006/main">
               <a:ext uri="{FF2B5EF4-FFF2-40B4-BE49-F238E27FC236}">
-                <a16:creationId xmlns:a16="http://schemas.microsoft.com/office/drawing/2014/main" id="{DAF6CD03-4ED0-4523-B5F6-9DCFE4C4E061}"/>
+                <a16:creationId xmlns:a16="http://schemas.microsoft.com/office/drawing/2014/main" id="{69C577AA-EE54-4BD5-A0E7-C7464CDA9866}"/>
               </a:ext>
             </a:extLst>
           </p:cNvPr>
@@ -4281,6 +6821,7 @@
           <a:lstStyle xmlns:a="http://schemas.openxmlformats.org/drawingml/2006/main"/>
           <a:p xmlns:a="http://schemas.openxmlformats.org/drawingml/2006/main">
             <a:pPr>
+              <a:buNone/>
               <a:defRPr sz="2700" b="1">
                 <a:solidFill>
                   <a:srgbClr val="111827"/>
@@ -4293,7 +6834,7 @@
                   <a:srgbClr val="111827"/>
                 </a:solidFill>
               </a:rPr>
-              <a:t>可直接使用的提示詞</a:t>
+              <a:t>試算表欄位</a:t>
             </a:r>
           </a:p>
         </p:txBody>
@@ -4303,7 +6844,7 @@
           <p:cNvPr id="3" name="">
             <a:extLst xmlns:a="http://schemas.openxmlformats.org/drawingml/2006/main">
               <a:ext uri="{FF2B5EF4-FFF2-40B4-BE49-F238E27FC236}">
-                <a16:creationId xmlns:a16="http://schemas.microsoft.com/office/drawing/2014/main" id="{54C7EC45-F803-405F-B350-5D2A9A49D15D}"/>
+                <a16:creationId xmlns:a16="http://schemas.microsoft.com/office/drawing/2014/main" id="{F7C9993B-634D-4EE4-B1A7-4ED3F1E82F2C}"/>
               </a:ext>
             </a:extLst>
           </p:cNvPr>
@@ -4331,6 +6872,7 @@
           <a:lstStyle xmlns:a="http://schemas.openxmlformats.org/drawingml/2006/main"/>
           <a:p xmlns:a="http://schemas.openxmlformats.org/drawingml/2006/main">
             <a:pPr algn="r">
+              <a:buNone/>
               <a:defRPr sz="1050" b="1">
                 <a:solidFill>
                   <a:srgbClr val="536273"/>
@@ -4353,7 +6895,7 @@
           <p:cNvPr id="4" name="">
             <a:extLst xmlns:a="http://schemas.openxmlformats.org/drawingml/2006/main">
               <a:ext uri="{FF2B5EF4-FFF2-40B4-BE49-F238E27FC236}">
-                <a16:creationId xmlns:a16="http://schemas.microsoft.com/office/drawing/2014/main" id="{B878B448-F85B-4F1D-BBCB-4EC51A232D15}"/>
+                <a16:creationId xmlns:a16="http://schemas.microsoft.com/office/drawing/2014/main" id="{E2E2E8A2-C306-498A-A7B8-B3AE8DB324F1}"/>
               </a:ext>
             </a:extLst>
           </p:cNvPr>
@@ -4384,31 +6926,84 @@
           <p:cNvPr id="5" name="">
             <a:extLst xmlns:a="http://schemas.openxmlformats.org/drawingml/2006/main">
               <a:ext uri="{FF2B5EF4-FFF2-40B4-BE49-F238E27FC236}">
-                <a16:creationId xmlns:a16="http://schemas.microsoft.com/office/drawing/2014/main" id="{260337B0-1A72-4EC0-A66F-AB033147A278}"/>
-              </a:ext>
-            </a:extLst>
-          </p:cNvPr>
-          <p:cNvSpPr>
-            <a:spLocks xmlns:a="http://schemas.openxmlformats.org/drawingml/2006/main" noGrp="1"/>
-          </p:cNvSpPr>
-          <p:nvPr/>
-        </p:nvSpPr>
-        <p:spPr>
-          <a:xfrm xmlns:a="http://schemas.openxmlformats.org/drawingml/2006/main">
-            <a:off x="609600" y="1733550"/>
-            <a:ext cx="10953750" cy="3333750"/>
+                <a16:creationId xmlns:a16="http://schemas.microsoft.com/office/drawing/2014/main" id="{28371DCF-ABB2-4F5D-9251-432FCEDE865E}"/>
+              </a:ext>
+            </a:extLst>
+          </p:cNvPr>
+          <p:cNvSpPr>
+            <a:spLocks xmlns:a="http://schemas.openxmlformats.org/drawingml/2006/main" noGrp="1"/>
+          </p:cNvSpPr>
+          <p:nvPr/>
+        </p:nvSpPr>
+        <p:spPr>
+          <a:xfrm xmlns:a="http://schemas.openxmlformats.org/drawingml/2006/main">
+            <a:off x="609600" y="1695450"/>
+            <a:ext cx="8572500" cy="361950"/>
+          </a:xfrm>
+          <a:prstGeom xmlns:a="http://schemas.openxmlformats.org/drawingml/2006/main" prst="rect">
+            <a:avLst/>
+          </a:prstGeom>
+          <a:noFill xmlns:a="http://schemas.openxmlformats.org/drawingml/2006/main"/>
+          <a:ln xmlns:a="http://schemas.openxmlformats.org/drawingml/2006/main" w="0">
+            <a:noFill/>
+            <a:prstDash val="solid"/>
+          </a:ln>
+        </p:spPr>
+        <p:txBody>
+          <a:bodyPr xmlns:a="http://schemas.openxmlformats.org/drawingml/2006/main"/>
+          <a:lstStyle xmlns:a="http://schemas.openxmlformats.org/drawingml/2006/main"/>
+          <a:p xmlns:a="http://schemas.openxmlformats.org/drawingml/2006/main">
+            <a:pPr>
+              <a:buNone/>
+              <a:defRPr sz="2025" b="1">
+                <a:solidFill>
+                  <a:srgbClr val="111827"/>
+                </a:solidFill>
+              </a:defRPr>
+            </a:pPr>
+            <a:r>
+              <a:rPr sz="2025" b="1">
+                <a:solidFill>
+                  <a:srgbClr val="111827"/>
+                </a:solidFill>
+              </a:rPr>
+              <a:t>一列代表一位學生的一次作答：</a:t>
+            </a:r>
+          </a:p>
+        </p:txBody>
+      </p:sp>
+      <p:sp>
+        <p:nvSpPr>
+          <p:cNvPr id="6" name="">
+            <a:extLst xmlns:a="http://schemas.openxmlformats.org/drawingml/2006/main">
+              <a:ext uri="{FF2B5EF4-FFF2-40B4-BE49-F238E27FC236}">
+                <a16:creationId xmlns:a16="http://schemas.microsoft.com/office/drawing/2014/main" id="{021C3157-DBD7-4940-B22D-AF88992DC3E8}"/>
+              </a:ext>
+            </a:extLst>
+          </p:cNvPr>
+          <p:cNvSpPr>
+            <a:spLocks xmlns:a="http://schemas.openxmlformats.org/drawingml/2006/main" noGrp="1"/>
+          </p:cNvSpPr>
+          <p:nvPr/>
+        </p:nvSpPr>
+        <p:spPr>
+          <a:xfrm xmlns:a="http://schemas.openxmlformats.org/drawingml/2006/main">
+            <a:off x="762000" y="2381250"/>
+            <a:ext cx="10287000" cy="666750"/>
           </a:xfrm>
           <a:prstGeom xmlns:a="http://schemas.openxmlformats.org/drawingml/2006/main" prst="roundRect">
             <a:avLst>
-              <a:gd name="adj" fmla="val 2286"/>
+              <a:gd name="adj" fmla="val 11429"/>
             </a:avLst>
           </a:prstGeom>
           <a:solidFill xmlns:a="http://schemas.openxmlformats.org/drawingml/2006/main">
-            <a:srgbClr val="101827"/>
+            <a:srgbClr val="3D8DFF">
+              <a:alpha val="9412"/>
+            </a:srgbClr>
           </a:solidFill>
           <a:ln xmlns:a="http://schemas.openxmlformats.org/drawingml/2006/main" w="9525">
             <a:solidFill>
-              <a:srgbClr val="101827"/>
+              <a:srgbClr val="3D8DFF"/>
             </a:solidFill>
             <a:prstDash val="solid"/>
           </a:ln>
@@ -4416,22 +7011,22 @@
       </p:sp>
       <p:sp>
         <p:nvSpPr>
-          <p:cNvPr id="6" name="">
-            <a:extLst xmlns:a="http://schemas.openxmlformats.org/drawingml/2006/main">
-              <a:ext uri="{FF2B5EF4-FFF2-40B4-BE49-F238E27FC236}">
-                <a16:creationId xmlns:a16="http://schemas.microsoft.com/office/drawing/2014/main" id="{2036E42B-7519-452E-B6B6-17A7E5088647}"/>
-              </a:ext>
-            </a:extLst>
-          </p:cNvPr>
-          <p:cNvSpPr>
-            <a:spLocks xmlns:a="http://schemas.openxmlformats.org/drawingml/2006/main" noGrp="1"/>
-          </p:cNvSpPr>
-          <p:nvPr/>
-        </p:nvSpPr>
-        <p:spPr>
-          <a:xfrm xmlns:a="http://schemas.openxmlformats.org/drawingml/2006/main">
-            <a:off x="914400" y="2095500"/>
-            <a:ext cx="10287000" cy="2476500"/>
+          <p:cNvPr id="7" name="">
+            <a:extLst xmlns:a="http://schemas.openxmlformats.org/drawingml/2006/main">
+              <a:ext uri="{FF2B5EF4-FFF2-40B4-BE49-F238E27FC236}">
+                <a16:creationId xmlns:a16="http://schemas.microsoft.com/office/drawing/2014/main" id="{33F702DD-D314-4283-A22A-76A99A5BA704}"/>
+              </a:ext>
+            </a:extLst>
+          </p:cNvPr>
+          <p:cNvSpPr>
+            <a:spLocks xmlns:a="http://schemas.openxmlformats.org/drawingml/2006/main" noGrp="1"/>
+          </p:cNvSpPr>
+          <p:nvPr/>
+        </p:nvSpPr>
+        <p:spPr>
+          <a:xfrm xmlns:a="http://schemas.openxmlformats.org/drawingml/2006/main">
+            <a:off x="1028700" y="2571750"/>
+            <a:ext cx="523875" cy="266700"/>
           </a:xfrm>
           <a:prstGeom xmlns:a="http://schemas.openxmlformats.org/drawingml/2006/main" prst="rect">
             <a:avLst/>
@@ -4447,41 +7042,42 @@
           <a:lstStyle xmlns:a="http://schemas.openxmlformats.org/drawingml/2006/main"/>
           <a:p xmlns:a="http://schemas.openxmlformats.org/drawingml/2006/main">
             <a:pPr>
-              <a:defRPr sz="1725">
-                <a:solidFill>
-                  <a:srgbClr val="FFFFFF"/>
-                </a:solidFill>
-              </a:defRPr>
-            </a:pPr>
-            <a:r>
-              <a:rPr sz="1725">
-                <a:solidFill>
-                  <a:srgbClr val="FFFFFF"/>
-                </a:solidFill>
-              </a:rPr>
-              <a:t>你是產品經理。請把我的題庫想法拆成使用者、核心問題、資料欄位、功能流程、畫面、驗收標準與第一版 MVP。遇到不確定的地方請列為待確認。</a:t>
-            </a:r>
-          </a:p>
-        </p:txBody>
-      </p:sp>
-      <p:sp>
-        <p:nvSpPr>
-          <p:cNvPr id="7" name="">
-            <a:extLst xmlns:a="http://schemas.openxmlformats.org/drawingml/2006/main">
-              <a:ext uri="{FF2B5EF4-FFF2-40B4-BE49-F238E27FC236}">
-                <a16:creationId xmlns:a16="http://schemas.microsoft.com/office/drawing/2014/main" id="{C4AC558C-86CF-4E2E-AC9F-D720612F3C0D}"/>
-              </a:ext>
-            </a:extLst>
-          </p:cNvPr>
-          <p:cNvSpPr>
-            <a:spLocks xmlns:a="http://schemas.openxmlformats.org/drawingml/2006/main" noGrp="1"/>
-          </p:cNvSpPr>
-          <p:nvPr/>
-        </p:nvSpPr>
-        <p:spPr>
-          <a:xfrm xmlns:a="http://schemas.openxmlformats.org/drawingml/2006/main">
-            <a:off x="609600" y="5619750"/>
-            <a:ext cx="10477500" cy="304800"/>
+              <a:buNone/>
+              <a:defRPr sz="1575" b="1">
+                <a:solidFill>
+                  <a:srgbClr val="3D8DFF"/>
+                </a:solidFill>
+              </a:defRPr>
+            </a:pPr>
+            <a:r>
+              <a:rPr sz="1575" b="1">
+                <a:solidFill>
+                  <a:srgbClr val="3D8DFF"/>
+                </a:solidFill>
+              </a:rPr>
+              <a:t>01</a:t>
+            </a:r>
+          </a:p>
+        </p:txBody>
+      </p:sp>
+      <p:sp>
+        <p:nvSpPr>
+          <p:cNvPr id="8" name="">
+            <a:extLst xmlns:a="http://schemas.openxmlformats.org/drawingml/2006/main">
+              <a:ext uri="{FF2B5EF4-FFF2-40B4-BE49-F238E27FC236}">
+                <a16:creationId xmlns:a16="http://schemas.microsoft.com/office/drawing/2014/main" id="{DA217730-4651-49C7-9226-1B43ECC357FE}"/>
+              </a:ext>
+            </a:extLst>
+          </p:cNvPr>
+          <p:cNvSpPr>
+            <a:spLocks xmlns:a="http://schemas.openxmlformats.org/drawingml/2006/main" noGrp="1"/>
+          </p:cNvSpPr>
+          <p:nvPr/>
+        </p:nvSpPr>
+        <p:spPr>
+          <a:xfrm xmlns:a="http://schemas.openxmlformats.org/drawingml/2006/main">
+            <a:off x="1809750" y="2552700"/>
+            <a:ext cx="8572500" cy="304800"/>
           </a:xfrm>
           <a:prstGeom xmlns:a="http://schemas.openxmlformats.org/drawingml/2006/main" prst="rect">
             <a:avLst/>
@@ -4497,19 +7093,296 @@
           <a:lstStyle xmlns:a="http://schemas.openxmlformats.org/drawingml/2006/main"/>
           <a:p xmlns:a="http://schemas.openxmlformats.org/drawingml/2006/main">
             <a:pPr>
-              <a:defRPr sz="1500" b="1">
+              <a:buNone/>
+              <a:defRPr sz="1725" b="1">
+                <a:solidFill>
+                  <a:srgbClr val="111827"/>
+                </a:solidFill>
+              </a:defRPr>
+            </a:pPr>
+            <a:r>
+              <a:rPr sz="1725" b="1">
+                <a:solidFill>
+                  <a:srgbClr val="111827"/>
+                </a:solidFill>
+              </a:rPr>
+              <a:t>身分｜姓名、班級、座號</a:t>
+            </a:r>
+          </a:p>
+        </p:txBody>
+      </p:sp>
+      <p:sp>
+        <p:nvSpPr>
+          <p:cNvPr id="9" name="">
+            <a:extLst xmlns:a="http://schemas.openxmlformats.org/drawingml/2006/main">
+              <a:ext uri="{FF2B5EF4-FFF2-40B4-BE49-F238E27FC236}">
+                <a16:creationId xmlns:a16="http://schemas.microsoft.com/office/drawing/2014/main" id="{B9ED5A78-F3E4-452B-B9B7-DBA523BFF102}"/>
+              </a:ext>
+            </a:extLst>
+          </p:cNvPr>
+          <p:cNvSpPr>
+            <a:spLocks xmlns:a="http://schemas.openxmlformats.org/drawingml/2006/main" noGrp="1"/>
+          </p:cNvSpPr>
+          <p:nvPr/>
+        </p:nvSpPr>
+        <p:spPr>
+          <a:xfrm xmlns:a="http://schemas.openxmlformats.org/drawingml/2006/main">
+            <a:off x="762000" y="3333750"/>
+            <a:ext cx="10287000" cy="666750"/>
+          </a:xfrm>
+          <a:prstGeom xmlns:a="http://schemas.openxmlformats.org/drawingml/2006/main" prst="roundRect">
+            <a:avLst>
+              <a:gd name="adj" fmla="val 11429"/>
+            </a:avLst>
+          </a:prstGeom>
+          <a:solidFill xmlns:a="http://schemas.openxmlformats.org/drawingml/2006/main">
+            <a:srgbClr val="F3F6F8"/>
+          </a:solidFill>
+          <a:ln xmlns:a="http://schemas.openxmlformats.org/drawingml/2006/main" w="9525">
+            <a:solidFill>
+              <a:srgbClr val="D7DEE7"/>
+            </a:solidFill>
+            <a:prstDash val="solid"/>
+          </a:ln>
+        </p:spPr>
+      </p:sp>
+      <p:sp>
+        <p:nvSpPr>
+          <p:cNvPr id="10" name="">
+            <a:extLst xmlns:a="http://schemas.openxmlformats.org/drawingml/2006/main">
+              <a:ext uri="{FF2B5EF4-FFF2-40B4-BE49-F238E27FC236}">
+                <a16:creationId xmlns:a16="http://schemas.microsoft.com/office/drawing/2014/main" id="{AF0ABDEA-CB29-4AD3-97FF-173789A913B7}"/>
+              </a:ext>
+            </a:extLst>
+          </p:cNvPr>
+          <p:cNvSpPr>
+            <a:spLocks xmlns:a="http://schemas.openxmlformats.org/drawingml/2006/main" noGrp="1"/>
+          </p:cNvSpPr>
+          <p:nvPr/>
+        </p:nvSpPr>
+        <p:spPr>
+          <a:xfrm xmlns:a="http://schemas.openxmlformats.org/drawingml/2006/main">
+            <a:off x="1028700" y="3524250"/>
+            <a:ext cx="523875" cy="266700"/>
+          </a:xfrm>
+          <a:prstGeom xmlns:a="http://schemas.openxmlformats.org/drawingml/2006/main" prst="rect">
+            <a:avLst/>
+          </a:prstGeom>
+          <a:noFill xmlns:a="http://schemas.openxmlformats.org/drawingml/2006/main"/>
+          <a:ln xmlns:a="http://schemas.openxmlformats.org/drawingml/2006/main" w="0">
+            <a:noFill/>
+            <a:prstDash val="solid"/>
+          </a:ln>
+        </p:spPr>
+        <p:txBody>
+          <a:bodyPr xmlns:a="http://schemas.openxmlformats.org/drawingml/2006/main"/>
+          <a:lstStyle xmlns:a="http://schemas.openxmlformats.org/drawingml/2006/main"/>
+          <a:p xmlns:a="http://schemas.openxmlformats.org/drawingml/2006/main">
+            <a:pPr>
+              <a:buNone/>
+              <a:defRPr sz="1575" b="1">
                 <a:solidFill>
                   <a:srgbClr val="3D8DFF"/>
                 </a:solidFill>
               </a:defRPr>
             </a:pPr>
             <a:r>
-              <a:rPr sz="1500" b="1">
+              <a:rPr sz="1575" b="1">
                 <a:solidFill>
                   <a:srgbClr val="3D8DFF"/>
                 </a:solidFill>
               </a:rPr>
-              <a:t>使用原則：先上傳／準備真實資料，再要求 AI 生成；產出後人工檢查。</a:t>
+              <a:t>02</a:t>
+            </a:r>
+          </a:p>
+        </p:txBody>
+      </p:sp>
+      <p:sp>
+        <p:nvSpPr>
+          <p:cNvPr id="11" name="">
+            <a:extLst xmlns:a="http://schemas.openxmlformats.org/drawingml/2006/main">
+              <a:ext uri="{FF2B5EF4-FFF2-40B4-BE49-F238E27FC236}">
+                <a16:creationId xmlns:a16="http://schemas.microsoft.com/office/drawing/2014/main" id="{7E86B52F-F70A-42EB-AFEF-CE15ECB65D0F}"/>
+              </a:ext>
+            </a:extLst>
+          </p:cNvPr>
+          <p:cNvSpPr>
+            <a:spLocks xmlns:a="http://schemas.openxmlformats.org/drawingml/2006/main" noGrp="1"/>
+          </p:cNvSpPr>
+          <p:nvPr/>
+        </p:nvSpPr>
+        <p:spPr>
+          <a:xfrm xmlns:a="http://schemas.openxmlformats.org/drawingml/2006/main">
+            <a:off x="1809750" y="3505200"/>
+            <a:ext cx="8572500" cy="304800"/>
+          </a:xfrm>
+          <a:prstGeom xmlns:a="http://schemas.openxmlformats.org/drawingml/2006/main" prst="rect">
+            <a:avLst/>
+          </a:prstGeom>
+          <a:noFill xmlns:a="http://schemas.openxmlformats.org/drawingml/2006/main"/>
+          <a:ln xmlns:a="http://schemas.openxmlformats.org/drawingml/2006/main" w="0">
+            <a:noFill/>
+            <a:prstDash val="solid"/>
+          </a:ln>
+        </p:spPr>
+        <p:txBody>
+          <a:bodyPr xmlns:a="http://schemas.openxmlformats.org/drawingml/2006/main"/>
+          <a:lstStyle xmlns:a="http://schemas.openxmlformats.org/drawingml/2006/main"/>
+          <a:p xmlns:a="http://schemas.openxmlformats.org/drawingml/2006/main">
+            <a:pPr>
+              <a:buNone/>
+              <a:defRPr sz="1725" b="1">
+                <a:solidFill>
+                  <a:srgbClr val="111827"/>
+                </a:solidFill>
+              </a:defRPr>
+            </a:pPr>
+            <a:r>
+              <a:rPr sz="1725" b="1">
+                <a:solidFill>
+                  <a:srgbClr val="111827"/>
+                </a:solidFill>
+              </a:rPr>
+              <a:t>成績｜測驗、答對、總題、百分比</a:t>
+            </a:r>
+          </a:p>
+        </p:txBody>
+      </p:sp>
+      <p:sp>
+        <p:nvSpPr>
+          <p:cNvPr id="12" name="">
+            <a:extLst xmlns:a="http://schemas.openxmlformats.org/drawingml/2006/main">
+              <a:ext uri="{FF2B5EF4-FFF2-40B4-BE49-F238E27FC236}">
+                <a16:creationId xmlns:a16="http://schemas.microsoft.com/office/drawing/2014/main" id="{9003B62E-20CA-4984-9118-ADE24A392304}"/>
+              </a:ext>
+            </a:extLst>
+          </p:cNvPr>
+          <p:cNvSpPr>
+            <a:spLocks xmlns:a="http://schemas.openxmlformats.org/drawingml/2006/main" noGrp="1"/>
+          </p:cNvSpPr>
+          <p:nvPr/>
+        </p:nvSpPr>
+        <p:spPr>
+          <a:xfrm xmlns:a="http://schemas.openxmlformats.org/drawingml/2006/main">
+            <a:off x="762000" y="4286250"/>
+            <a:ext cx="10287000" cy="666750"/>
+          </a:xfrm>
+          <a:prstGeom xmlns:a="http://schemas.openxmlformats.org/drawingml/2006/main" prst="roundRect">
+            <a:avLst>
+              <a:gd name="adj" fmla="val 11429"/>
+            </a:avLst>
+          </a:prstGeom>
+          <a:solidFill xmlns:a="http://schemas.openxmlformats.org/drawingml/2006/main">
+            <a:srgbClr val="3D8DFF">
+              <a:alpha val="9412"/>
+            </a:srgbClr>
+          </a:solidFill>
+          <a:ln xmlns:a="http://schemas.openxmlformats.org/drawingml/2006/main" w="9525">
+            <a:solidFill>
+              <a:srgbClr val="3D8DFF"/>
+            </a:solidFill>
+            <a:prstDash val="solid"/>
+          </a:ln>
+        </p:spPr>
+      </p:sp>
+      <p:sp>
+        <p:nvSpPr>
+          <p:cNvPr id="13" name="">
+            <a:extLst xmlns:a="http://schemas.openxmlformats.org/drawingml/2006/main">
+              <a:ext uri="{FF2B5EF4-FFF2-40B4-BE49-F238E27FC236}">
+                <a16:creationId xmlns:a16="http://schemas.microsoft.com/office/drawing/2014/main" id="{2E41C2BF-133B-4482-8022-09E15EB88622}"/>
+              </a:ext>
+            </a:extLst>
+          </p:cNvPr>
+          <p:cNvSpPr>
+            <a:spLocks xmlns:a="http://schemas.openxmlformats.org/drawingml/2006/main" noGrp="1"/>
+          </p:cNvSpPr>
+          <p:nvPr/>
+        </p:nvSpPr>
+        <p:spPr>
+          <a:xfrm xmlns:a="http://schemas.openxmlformats.org/drawingml/2006/main">
+            <a:off x="1028700" y="4476750"/>
+            <a:ext cx="523875" cy="266700"/>
+          </a:xfrm>
+          <a:prstGeom xmlns:a="http://schemas.openxmlformats.org/drawingml/2006/main" prst="rect">
+            <a:avLst/>
+          </a:prstGeom>
+          <a:noFill xmlns:a="http://schemas.openxmlformats.org/drawingml/2006/main"/>
+          <a:ln xmlns:a="http://schemas.openxmlformats.org/drawingml/2006/main" w="0">
+            <a:noFill/>
+            <a:prstDash val="solid"/>
+          </a:ln>
+        </p:spPr>
+        <p:txBody>
+          <a:bodyPr xmlns:a="http://schemas.openxmlformats.org/drawingml/2006/main"/>
+          <a:lstStyle xmlns:a="http://schemas.openxmlformats.org/drawingml/2006/main"/>
+          <a:p xmlns:a="http://schemas.openxmlformats.org/drawingml/2006/main">
+            <a:pPr>
+              <a:buNone/>
+              <a:defRPr sz="1575" b="1">
+                <a:solidFill>
+                  <a:srgbClr val="3D8DFF"/>
+                </a:solidFill>
+              </a:defRPr>
+            </a:pPr>
+            <a:r>
+              <a:rPr sz="1575" b="1">
+                <a:solidFill>
+                  <a:srgbClr val="3D8DFF"/>
+                </a:solidFill>
+              </a:rPr>
+              <a:t>03</a:t>
+            </a:r>
+          </a:p>
+        </p:txBody>
+      </p:sp>
+      <p:sp>
+        <p:nvSpPr>
+          <p:cNvPr id="14" name="">
+            <a:extLst xmlns:a="http://schemas.openxmlformats.org/drawingml/2006/main">
+              <a:ext uri="{FF2B5EF4-FFF2-40B4-BE49-F238E27FC236}">
+                <a16:creationId xmlns:a16="http://schemas.microsoft.com/office/drawing/2014/main" id="{688B69A2-D390-49CD-8C69-71022AD3BA12}"/>
+              </a:ext>
+            </a:extLst>
+          </p:cNvPr>
+          <p:cNvSpPr>
+            <a:spLocks xmlns:a="http://schemas.openxmlformats.org/drawingml/2006/main" noGrp="1"/>
+          </p:cNvSpPr>
+          <p:nvPr/>
+        </p:nvSpPr>
+        <p:spPr>
+          <a:xfrm xmlns:a="http://schemas.openxmlformats.org/drawingml/2006/main">
+            <a:off x="1809750" y="4457700"/>
+            <a:ext cx="8572500" cy="304800"/>
+          </a:xfrm>
+          <a:prstGeom xmlns:a="http://schemas.openxmlformats.org/drawingml/2006/main" prst="rect">
+            <a:avLst/>
+          </a:prstGeom>
+          <a:noFill xmlns:a="http://schemas.openxmlformats.org/drawingml/2006/main"/>
+          <a:ln xmlns:a="http://schemas.openxmlformats.org/drawingml/2006/main" w="0">
+            <a:noFill/>
+            <a:prstDash val="solid"/>
+          </a:ln>
+        </p:spPr>
+        <p:txBody>
+          <a:bodyPr xmlns:a="http://schemas.openxmlformats.org/drawingml/2006/main"/>
+          <a:lstStyle xmlns:a="http://schemas.openxmlformats.org/drawingml/2006/main"/>
+          <a:p xmlns:a="http://schemas.openxmlformats.org/drawingml/2006/main">
+            <a:pPr>
+              <a:buNone/>
+              <a:defRPr sz="1725" b="1">
+                <a:solidFill>
+                  <a:srgbClr val="111827"/>
+                </a:solidFill>
+              </a:defRPr>
+            </a:pPr>
+            <a:r>
+              <a:rPr sz="1725" b="1">
+                <a:solidFill>
+                  <a:srgbClr val="111827"/>
+                </a:solidFill>
+              </a:rPr>
+              <a:t>紀錄｜提交時間、作答內容</a:t>
             </a:r>
           </a:p>
         </p:txBody>
@@ -4517,7 +7390,7 @@
     </p:spTree>
     <p:extLst>
       <p:ext uri="{BB962C8B-B14F-4D97-AF65-F5344CB8AC3E}">
-        <p14:creationId xmlns:p14="http://schemas.microsoft.com/office/powerpoint/2010/main" val="800752072"/>
+        <p14:creationId xmlns:p14="http://schemas.microsoft.com/office/powerpoint/2010/main" val="445952414"/>
       </p:ext>
     </p:extLst>
   </p:cSld>
@@ -4545,10 +7418,10 @@
       </p:grpSpPr>
       <p:sp>
         <p:nvSpPr>
-          <p:cNvPr id="14" name="">
-            <a:extLst xmlns:a="http://schemas.openxmlformats.org/drawingml/2006/main">
-              <a:ext uri="{FF2B5EF4-FFF2-40B4-BE49-F238E27FC236}">
-                <a16:creationId xmlns:a16="http://schemas.microsoft.com/office/drawing/2014/main" id="{3417A025-532E-4C3D-8700-AF0303C4604F}"/>
+          <p:cNvPr id="8" name="">
+            <a:extLst xmlns:a="http://schemas.openxmlformats.org/drawingml/2006/main">
+              <a:ext uri="{FF2B5EF4-FFF2-40B4-BE49-F238E27FC236}">
+                <a16:creationId xmlns:a16="http://schemas.microsoft.com/office/drawing/2014/main" id="{0DC663EB-506A-4D2D-8E61-276E72B646C3}"/>
               </a:ext>
             </a:extLst>
           </p:cNvPr>
@@ -4576,6 +7449,7 @@
           <a:lstStyle xmlns:a="http://schemas.openxmlformats.org/drawingml/2006/main"/>
           <a:p xmlns:a="http://schemas.openxmlformats.org/drawingml/2006/main">
             <a:pPr>
+              <a:buNone/>
               <a:defRPr sz="975" b="1">
                 <a:solidFill>
                   <a:srgbClr val="3D8DFF"/>
@@ -4598,7 +7472,7 @@
           <p:cNvPr id="2" name="">
             <a:extLst xmlns:a="http://schemas.openxmlformats.org/drawingml/2006/main">
               <a:ext uri="{FF2B5EF4-FFF2-40B4-BE49-F238E27FC236}">
-                <a16:creationId xmlns:a16="http://schemas.microsoft.com/office/drawing/2014/main" id="{D907B33E-3AF4-47B0-9596-F9F097989206}"/>
+                <a16:creationId xmlns:a16="http://schemas.microsoft.com/office/drawing/2014/main" id="{DAF6CD03-4ED0-4523-B5F6-9DCFE4C4E061}"/>
               </a:ext>
             </a:extLst>
           </p:cNvPr>
@@ -4626,6 +7500,7 @@
           <a:lstStyle xmlns:a="http://schemas.openxmlformats.org/drawingml/2006/main"/>
           <a:p xmlns:a="http://schemas.openxmlformats.org/drawingml/2006/main">
             <a:pPr>
+              <a:buNone/>
               <a:defRPr sz="2700" b="1">
                 <a:solidFill>
                   <a:srgbClr val="111827"/>
@@ -4638,7 +7513,7 @@
                   <a:srgbClr val="111827"/>
                 </a:solidFill>
               </a:rPr>
-              <a:t>課堂實作</a:t>
+              <a:t>Code.gs 負責什麼？</a:t>
             </a:r>
           </a:p>
         </p:txBody>
@@ -4648,7 +7523,7 @@
           <p:cNvPr id="3" name="">
             <a:extLst xmlns:a="http://schemas.openxmlformats.org/drawingml/2006/main">
               <a:ext uri="{FF2B5EF4-FFF2-40B4-BE49-F238E27FC236}">
-                <a16:creationId xmlns:a16="http://schemas.microsoft.com/office/drawing/2014/main" id="{51CA61AD-978D-4FCF-8595-62154123DE25}"/>
+                <a16:creationId xmlns:a16="http://schemas.microsoft.com/office/drawing/2014/main" id="{54C7EC45-F803-405F-B350-5D2A9A49D15D}"/>
               </a:ext>
             </a:extLst>
           </p:cNvPr>
@@ -4676,6 +7551,7 @@
           <a:lstStyle xmlns:a="http://schemas.openxmlformats.org/drawingml/2006/main"/>
           <a:p xmlns:a="http://schemas.openxmlformats.org/drawingml/2006/main">
             <a:pPr algn="r">
+              <a:buNone/>
               <a:defRPr sz="1050" b="1">
                 <a:solidFill>
                   <a:srgbClr val="536273"/>
@@ -4698,7 +7574,7 @@
           <p:cNvPr id="4" name="">
             <a:extLst xmlns:a="http://schemas.openxmlformats.org/drawingml/2006/main">
               <a:ext uri="{FF2B5EF4-FFF2-40B4-BE49-F238E27FC236}">
-                <a16:creationId xmlns:a16="http://schemas.microsoft.com/office/drawing/2014/main" id="{68AE3A33-E97F-4DE5-9A39-97B5C3314BE8}"/>
+                <a16:creationId xmlns:a16="http://schemas.microsoft.com/office/drawing/2014/main" id="{B878B448-F85B-4F1D-BBCB-4EC51A232D15}"/>
               </a:ext>
             </a:extLst>
           </p:cNvPr>
@@ -4729,81 +7605,31 @@
           <p:cNvPr id="5" name="">
             <a:extLst xmlns:a="http://schemas.openxmlformats.org/drawingml/2006/main">
               <a:ext uri="{FF2B5EF4-FFF2-40B4-BE49-F238E27FC236}">
-                <a16:creationId xmlns:a16="http://schemas.microsoft.com/office/drawing/2014/main" id="{192478DD-DB87-4280-B1CD-7B937432D6A7}"/>
-              </a:ext>
-            </a:extLst>
-          </p:cNvPr>
-          <p:cNvSpPr>
-            <a:spLocks xmlns:a="http://schemas.openxmlformats.org/drawingml/2006/main" noGrp="1"/>
-          </p:cNvSpPr>
-          <p:nvPr/>
-        </p:nvSpPr>
-        <p:spPr>
-          <a:xfrm xmlns:a="http://schemas.openxmlformats.org/drawingml/2006/main">
-            <a:off x="609600" y="1695450"/>
-            <a:ext cx="9525000" cy="361950"/>
-          </a:xfrm>
-          <a:prstGeom xmlns:a="http://schemas.openxmlformats.org/drawingml/2006/main" prst="rect">
-            <a:avLst/>
-          </a:prstGeom>
-          <a:noFill xmlns:a="http://schemas.openxmlformats.org/drawingml/2006/main"/>
-          <a:ln xmlns:a="http://schemas.openxmlformats.org/drawingml/2006/main" w="0">
-            <a:noFill/>
-            <a:prstDash val="solid"/>
-          </a:ln>
-        </p:spPr>
-        <p:txBody>
-          <a:bodyPr xmlns:a="http://schemas.openxmlformats.org/drawingml/2006/main"/>
-          <a:lstStyle xmlns:a="http://schemas.openxmlformats.org/drawingml/2006/main"/>
-          <a:p xmlns:a="http://schemas.openxmlformats.org/drawingml/2006/main">
-            <a:pPr>
-              <a:defRPr sz="2025" b="1">
-                <a:solidFill>
-                  <a:srgbClr val="111827"/>
-                </a:solidFill>
-              </a:defRPr>
-            </a:pPr>
-            <a:r>
-              <a:rPr sz="2025" b="1">
-                <a:solidFill>
-                  <a:srgbClr val="111827"/>
-                </a:solidFill>
-              </a:rPr>
-              <a:t>請在課堂完成這個最小可行版本：</a:t>
-            </a:r>
-          </a:p>
-        </p:txBody>
-      </p:sp>
-      <p:sp>
-        <p:nvSpPr>
-          <p:cNvPr id="6" name="">
-            <a:extLst xmlns:a="http://schemas.openxmlformats.org/drawingml/2006/main">
-              <a:ext uri="{FF2B5EF4-FFF2-40B4-BE49-F238E27FC236}">
-                <a16:creationId xmlns:a16="http://schemas.microsoft.com/office/drawing/2014/main" id="{EC15BF06-440E-4341-8258-C3B75D06D274}"/>
-              </a:ext>
-            </a:extLst>
-          </p:cNvPr>
-          <p:cNvSpPr>
-            <a:spLocks xmlns:a="http://schemas.openxmlformats.org/drawingml/2006/main" noGrp="1"/>
-          </p:cNvSpPr>
-          <p:nvPr/>
-        </p:nvSpPr>
-        <p:spPr>
-          <a:xfrm xmlns:a="http://schemas.openxmlformats.org/drawingml/2006/main">
-            <a:off x="609600" y="2381250"/>
-            <a:ext cx="6858000" cy="2476500"/>
+                <a16:creationId xmlns:a16="http://schemas.microsoft.com/office/drawing/2014/main" id="{260337B0-1A72-4EC0-A66F-AB033147A278}"/>
+              </a:ext>
+            </a:extLst>
+          </p:cNvPr>
+          <p:cNvSpPr>
+            <a:spLocks xmlns:a="http://schemas.openxmlformats.org/drawingml/2006/main" noGrp="1"/>
+          </p:cNvSpPr>
+          <p:nvPr/>
+        </p:nvSpPr>
+        <p:spPr>
+          <a:xfrm xmlns:a="http://schemas.openxmlformats.org/drawingml/2006/main">
+            <a:off x="609600" y="1733550"/>
+            <a:ext cx="10953750" cy="3333750"/>
           </a:xfrm>
           <a:prstGeom xmlns:a="http://schemas.openxmlformats.org/drawingml/2006/main" prst="roundRect">
             <a:avLst>
-              <a:gd name="adj" fmla="val 3077"/>
+              <a:gd name="adj" fmla="val 2286"/>
             </a:avLst>
           </a:prstGeom>
           <a:solidFill xmlns:a="http://schemas.openxmlformats.org/drawingml/2006/main">
-            <a:srgbClr val="F3F6F8"/>
+            <a:srgbClr val="101827"/>
           </a:solidFill>
           <a:ln xmlns:a="http://schemas.openxmlformats.org/drawingml/2006/main" w="9525">
             <a:solidFill>
-              <a:srgbClr val="D7DEE7"/>
+              <a:srgbClr val="101827"/>
             </a:solidFill>
             <a:prstDash val="solid"/>
           </a:ln>
@@ -4811,22 +7637,77 @@
       </p:sp>
       <p:sp>
         <p:nvSpPr>
+          <p:cNvPr id="6" name="">
+            <a:extLst xmlns:a="http://schemas.openxmlformats.org/drawingml/2006/main">
+              <a:ext uri="{FF2B5EF4-FFF2-40B4-BE49-F238E27FC236}">
+                <a16:creationId xmlns:a16="http://schemas.microsoft.com/office/drawing/2014/main" id="{2036E42B-7519-452E-B6B6-17A7E5088647}"/>
+              </a:ext>
+            </a:extLst>
+          </p:cNvPr>
+          <p:cNvSpPr>
+            <a:spLocks xmlns:a="http://schemas.openxmlformats.org/drawingml/2006/main" noGrp="1"/>
+          </p:cNvSpPr>
+          <p:nvPr/>
+        </p:nvSpPr>
+        <p:spPr>
+          <a:xfrm xmlns:a="http://schemas.openxmlformats.org/drawingml/2006/main">
+            <a:off x="914400" y="2095500"/>
+            <a:ext cx="10287000" cy="2476500"/>
+          </a:xfrm>
+          <a:prstGeom xmlns:a="http://schemas.openxmlformats.org/drawingml/2006/main" prst="rect">
+            <a:avLst/>
+          </a:prstGeom>
+          <a:noFill xmlns:a="http://schemas.openxmlformats.org/drawingml/2006/main"/>
+          <a:ln xmlns:a="http://schemas.openxmlformats.org/drawingml/2006/main" w="0">
+            <a:noFill/>
+            <a:prstDash val="solid"/>
+          </a:ln>
+        </p:spPr>
+        <p:txBody>
+          <a:bodyPr xmlns:a="http://schemas.openxmlformats.org/drawingml/2006/main"/>
+          <a:lstStyle xmlns:a="http://schemas.openxmlformats.org/drawingml/2006/main"/>
+          <a:p xmlns:a="http://schemas.openxmlformats.org/drawingml/2006/main">
+            <a:pPr>
+              <a:buNone/>
+              <a:defRPr sz="1725">
+                <a:solidFill>
+                  <a:srgbClr val="FFFFFF"/>
+                </a:solidFill>
+              </a:defRPr>
+            </a:pPr>
+            <a:r>
+              <a:rPr sz="1725">
+                <a:solidFill>
+                  <a:srgbClr val="FFFFFF"/>
+                </a:solidFill>
+              </a:rPr>
+              <a:t>doGet() → 顯示 Index.html
+saveQuizResult(payload) → 驗證欄位
+找到／建立「測驗紀錄」
+appendRow → 新增一列
+成功回傳 success:true；錯誤回傳可理解訊息</a:t>
+            </a:r>
+          </a:p>
+        </p:txBody>
+      </p:sp>
+      <p:sp>
+        <p:nvSpPr>
           <p:cNvPr id="7" name="">
             <a:extLst xmlns:a="http://schemas.openxmlformats.org/drawingml/2006/main">
               <a:ext uri="{FF2B5EF4-FFF2-40B4-BE49-F238E27FC236}">
-                <a16:creationId xmlns:a16="http://schemas.microsoft.com/office/drawing/2014/main" id="{2AE1859E-5ED4-4DFD-ADEC-687EFA3A05D9}"/>
-              </a:ext>
-            </a:extLst>
-          </p:cNvPr>
-          <p:cNvSpPr>
-            <a:spLocks xmlns:a="http://schemas.openxmlformats.org/drawingml/2006/main" noGrp="1"/>
-          </p:cNvSpPr>
-          <p:nvPr/>
-        </p:nvSpPr>
-        <p:spPr>
-          <a:xfrm xmlns:a="http://schemas.openxmlformats.org/drawingml/2006/main">
-            <a:off x="952500" y="2762250"/>
-            <a:ext cx="6191250" cy="1428750"/>
+                <a16:creationId xmlns:a16="http://schemas.microsoft.com/office/drawing/2014/main" id="{C4AC558C-86CF-4E2E-AC9F-D720612F3C0D}"/>
+              </a:ext>
+            </a:extLst>
+          </p:cNvPr>
+          <p:cNvSpPr>
+            <a:spLocks xmlns:a="http://schemas.openxmlformats.org/drawingml/2006/main" noGrp="1"/>
+          </p:cNvSpPr>
+          <p:nvPr/>
+        </p:nvSpPr>
+        <p:spPr>
+          <a:xfrm xmlns:a="http://schemas.openxmlformats.org/drawingml/2006/main">
+            <a:off x="609600" y="5619750"/>
+            <a:ext cx="10477500" cy="304800"/>
           </a:xfrm>
           <a:prstGeom xmlns:a="http://schemas.openxmlformats.org/drawingml/2006/main" prst="rect">
             <a:avLst/>
@@ -4842,306 +7723,20 @@
           <a:lstStyle xmlns:a="http://schemas.openxmlformats.org/drawingml/2006/main"/>
           <a:p xmlns:a="http://schemas.openxmlformats.org/drawingml/2006/main">
             <a:pPr>
-              <a:defRPr sz="1875" b="1">
-                <a:solidFill>
-                  <a:srgbClr val="111827"/>
-                </a:solidFill>
-              </a:defRPr>
-            </a:pPr>
-            <a:r>
-              <a:rPr sz="1875" b="1">
-                <a:solidFill>
-                  <a:srgbClr val="111827"/>
-                </a:solidFill>
-              </a:rPr>
-              <a:t>設計一個自己的題庫：指定學習對象、題型、難度、答案、解析、標籤與成績欄位。</a:t>
-            </a:r>
-          </a:p>
-        </p:txBody>
-      </p:sp>
-      <p:sp>
-        <p:nvSpPr>
-          <p:cNvPr id="8" name="">
-            <a:extLst xmlns:a="http://schemas.openxmlformats.org/drawingml/2006/main">
-              <a:ext uri="{FF2B5EF4-FFF2-40B4-BE49-F238E27FC236}">
-                <a16:creationId xmlns:a16="http://schemas.microsoft.com/office/drawing/2014/main" id="{4947D7C9-2D2A-4CB5-AE2D-5DF06D45CCFB}"/>
-              </a:ext>
-            </a:extLst>
-          </p:cNvPr>
-          <p:cNvSpPr>
-            <a:spLocks xmlns:a="http://schemas.openxmlformats.org/drawingml/2006/main" noGrp="1"/>
-          </p:cNvSpPr>
-          <p:nvPr/>
-        </p:nvSpPr>
-        <p:spPr>
-          <a:xfrm xmlns:a="http://schemas.openxmlformats.org/drawingml/2006/main">
-            <a:off x="8096250" y="2381250"/>
-            <a:ext cx="3143250" cy="2476500"/>
-          </a:xfrm>
-          <a:prstGeom xmlns:a="http://schemas.openxmlformats.org/drawingml/2006/main" prst="roundRect">
-            <a:avLst>
-              <a:gd name="adj" fmla="val 3077"/>
-            </a:avLst>
-          </a:prstGeom>
-          <a:solidFill xmlns:a="http://schemas.openxmlformats.org/drawingml/2006/main">
-            <a:srgbClr val="3D8DFF">
-              <a:alpha val="13333"/>
-            </a:srgbClr>
-          </a:solidFill>
-          <a:ln xmlns:a="http://schemas.openxmlformats.org/drawingml/2006/main" w="9525">
-            <a:solidFill>
-              <a:srgbClr val="3D8DFF"/>
-            </a:solidFill>
-            <a:prstDash val="solid"/>
-          </a:ln>
-        </p:spPr>
-      </p:sp>
-      <p:sp>
-        <p:nvSpPr>
-          <p:cNvPr id="9" name="">
-            <a:extLst xmlns:a="http://schemas.openxmlformats.org/drawingml/2006/main">
-              <a:ext uri="{FF2B5EF4-FFF2-40B4-BE49-F238E27FC236}">
-                <a16:creationId xmlns:a16="http://schemas.microsoft.com/office/drawing/2014/main" id="{A460B031-83DF-4BFD-A96C-67B84E0688FE}"/>
-              </a:ext>
-            </a:extLst>
-          </p:cNvPr>
-          <p:cNvSpPr>
-            <a:spLocks xmlns:a="http://schemas.openxmlformats.org/drawingml/2006/main" noGrp="1"/>
-          </p:cNvSpPr>
-          <p:nvPr/>
-        </p:nvSpPr>
-        <p:spPr>
-          <a:xfrm xmlns:a="http://schemas.openxmlformats.org/drawingml/2006/main">
-            <a:off x="8477250" y="2762250"/>
-            <a:ext cx="2381250" cy="285750"/>
-          </a:xfrm>
-          <a:prstGeom xmlns:a="http://schemas.openxmlformats.org/drawingml/2006/main" prst="rect">
-            <a:avLst/>
-          </a:prstGeom>
-          <a:noFill xmlns:a="http://schemas.openxmlformats.org/drawingml/2006/main"/>
-          <a:ln xmlns:a="http://schemas.openxmlformats.org/drawingml/2006/main" w="0">
-            <a:noFill/>
-            <a:prstDash val="solid"/>
-          </a:ln>
-        </p:spPr>
-        <p:txBody>
-          <a:bodyPr xmlns:a="http://schemas.openxmlformats.org/drawingml/2006/main"/>
-          <a:lstStyle xmlns:a="http://schemas.openxmlformats.org/drawingml/2006/main"/>
-          <a:p xmlns:a="http://schemas.openxmlformats.org/drawingml/2006/main">
-            <a:pPr>
-              <a:defRPr sz="1800" b="1">
+              <a:buNone/>
+              <a:defRPr sz="1500" b="1">
                 <a:solidFill>
                   <a:srgbClr val="3D8DFF"/>
                 </a:solidFill>
               </a:defRPr>
             </a:pPr>
             <a:r>
-              <a:rPr sz="1800" b="1">
+              <a:rPr sz="1500" b="1">
                 <a:solidFill>
                   <a:srgbClr val="3D8DFF"/>
                 </a:solidFill>
               </a:rPr>
-              <a:t>講師檢查</a:t>
-            </a:r>
-          </a:p>
-        </p:txBody>
-      </p:sp>
-      <p:sp>
-        <p:nvSpPr>
-          <p:cNvPr id="10" name="">
-            <a:extLst xmlns:a="http://schemas.openxmlformats.org/drawingml/2006/main">
-              <a:ext uri="{FF2B5EF4-FFF2-40B4-BE49-F238E27FC236}">
-                <a16:creationId xmlns:a16="http://schemas.microsoft.com/office/drawing/2014/main" id="{2EB6DAF0-7837-40C8-AFB1-EB3189EE0678}"/>
-              </a:ext>
-            </a:extLst>
-          </p:cNvPr>
-          <p:cNvSpPr>
-            <a:spLocks xmlns:a="http://schemas.openxmlformats.org/drawingml/2006/main" noGrp="1"/>
-          </p:cNvSpPr>
-          <p:nvPr/>
-        </p:nvSpPr>
-        <p:spPr>
-          <a:xfrm xmlns:a="http://schemas.openxmlformats.org/drawingml/2006/main">
-            <a:off x="8477250" y="3333750"/>
-            <a:ext cx="2381250" cy="323850"/>
-          </a:xfrm>
-          <a:prstGeom xmlns:a="http://schemas.openxmlformats.org/drawingml/2006/main" prst="rect">
-            <a:avLst/>
-          </a:prstGeom>
-          <a:noFill xmlns:a="http://schemas.openxmlformats.org/drawingml/2006/main"/>
-          <a:ln xmlns:a="http://schemas.openxmlformats.org/drawingml/2006/main" w="0">
-            <a:noFill/>
-            <a:prstDash val="solid"/>
-          </a:ln>
-        </p:spPr>
-        <p:txBody>
-          <a:bodyPr xmlns:a="http://schemas.openxmlformats.org/drawingml/2006/main"/>
-          <a:lstStyle xmlns:a="http://schemas.openxmlformats.org/drawingml/2006/main"/>
-          <a:p xmlns:a="http://schemas.openxmlformats.org/drawingml/2006/main">
-            <a:pPr>
-              <a:defRPr sz="1500">
-                <a:solidFill>
-                  <a:srgbClr val="111827"/>
-                </a:solidFill>
-              </a:defRPr>
-            </a:pPr>
-            <a:r>
-              <a:rPr sz="1500">
-                <a:solidFill>
-                  <a:srgbClr val="111827"/>
-                </a:solidFill>
-              </a:rPr>
-              <a:t>• 能操作</a:t>
-            </a:r>
-          </a:p>
-        </p:txBody>
-      </p:sp>
-      <p:sp>
-        <p:nvSpPr>
-          <p:cNvPr id="11" name="">
-            <a:extLst xmlns:a="http://schemas.openxmlformats.org/drawingml/2006/main">
-              <a:ext uri="{FF2B5EF4-FFF2-40B4-BE49-F238E27FC236}">
-                <a16:creationId xmlns:a16="http://schemas.microsoft.com/office/drawing/2014/main" id="{867731C5-1426-42A6-9BDB-DF5882B17B6F}"/>
-              </a:ext>
-            </a:extLst>
-          </p:cNvPr>
-          <p:cNvSpPr>
-            <a:spLocks xmlns:a="http://schemas.openxmlformats.org/drawingml/2006/main" noGrp="1"/>
-          </p:cNvSpPr>
-          <p:nvPr/>
-        </p:nvSpPr>
-        <p:spPr>
-          <a:xfrm xmlns:a="http://schemas.openxmlformats.org/drawingml/2006/main">
-            <a:off x="8477250" y="3733800"/>
-            <a:ext cx="2381250" cy="323850"/>
-          </a:xfrm>
-          <a:prstGeom xmlns:a="http://schemas.openxmlformats.org/drawingml/2006/main" prst="rect">
-            <a:avLst/>
-          </a:prstGeom>
-          <a:noFill xmlns:a="http://schemas.openxmlformats.org/drawingml/2006/main"/>
-          <a:ln xmlns:a="http://schemas.openxmlformats.org/drawingml/2006/main" w="0">
-            <a:noFill/>
-            <a:prstDash val="solid"/>
-          </a:ln>
-        </p:spPr>
-        <p:txBody>
-          <a:bodyPr xmlns:a="http://schemas.openxmlformats.org/drawingml/2006/main"/>
-          <a:lstStyle xmlns:a="http://schemas.openxmlformats.org/drawingml/2006/main"/>
-          <a:p xmlns:a="http://schemas.openxmlformats.org/drawingml/2006/main">
-            <a:pPr>
-              <a:defRPr sz="1500">
-                <a:solidFill>
-                  <a:srgbClr val="111827"/>
-                </a:solidFill>
-              </a:defRPr>
-            </a:pPr>
-            <a:r>
-              <a:rPr sz="1500">
-                <a:solidFill>
-                  <a:srgbClr val="111827"/>
-                </a:solidFill>
-              </a:rPr>
-              <a:t>• 有輸入與輸出</a:t>
-            </a:r>
-          </a:p>
-        </p:txBody>
-      </p:sp>
-      <p:sp>
-        <p:nvSpPr>
-          <p:cNvPr id="12" name="">
-            <a:extLst xmlns:a="http://schemas.openxmlformats.org/drawingml/2006/main">
-              <a:ext uri="{FF2B5EF4-FFF2-40B4-BE49-F238E27FC236}">
-                <a16:creationId xmlns:a16="http://schemas.microsoft.com/office/drawing/2014/main" id="{9B738477-777C-4331-8600-6937817C795C}"/>
-              </a:ext>
-            </a:extLst>
-          </p:cNvPr>
-          <p:cNvSpPr>
-            <a:spLocks xmlns:a="http://schemas.openxmlformats.org/drawingml/2006/main" noGrp="1"/>
-          </p:cNvSpPr>
-          <p:nvPr/>
-        </p:nvSpPr>
-        <p:spPr>
-          <a:xfrm xmlns:a="http://schemas.openxmlformats.org/drawingml/2006/main">
-            <a:off x="8477250" y="4133850"/>
-            <a:ext cx="2381250" cy="323850"/>
-          </a:xfrm>
-          <a:prstGeom xmlns:a="http://schemas.openxmlformats.org/drawingml/2006/main" prst="rect">
-            <a:avLst/>
-          </a:prstGeom>
-          <a:noFill xmlns:a="http://schemas.openxmlformats.org/drawingml/2006/main"/>
-          <a:ln xmlns:a="http://schemas.openxmlformats.org/drawingml/2006/main" w="0">
-            <a:noFill/>
-            <a:prstDash val="solid"/>
-          </a:ln>
-        </p:spPr>
-        <p:txBody>
-          <a:bodyPr xmlns:a="http://schemas.openxmlformats.org/drawingml/2006/main"/>
-          <a:lstStyle xmlns:a="http://schemas.openxmlformats.org/drawingml/2006/main"/>
-          <a:p xmlns:a="http://schemas.openxmlformats.org/drawingml/2006/main">
-            <a:pPr>
-              <a:defRPr sz="1500">
-                <a:solidFill>
-                  <a:srgbClr val="111827"/>
-                </a:solidFill>
-              </a:defRPr>
-            </a:pPr>
-            <a:r>
-              <a:rPr sz="1500">
-                <a:solidFill>
-                  <a:srgbClr val="111827"/>
-                </a:solidFill>
-              </a:rPr>
-              <a:t>• 能說明限制</a:t>
-            </a:r>
-          </a:p>
-        </p:txBody>
-      </p:sp>
-      <p:sp>
-        <p:nvSpPr>
-          <p:cNvPr id="13" name="">
-            <a:extLst xmlns:a="http://schemas.openxmlformats.org/drawingml/2006/main">
-              <a:ext uri="{FF2B5EF4-FFF2-40B4-BE49-F238E27FC236}">
-                <a16:creationId xmlns:a16="http://schemas.microsoft.com/office/drawing/2014/main" id="{EA34A4FB-D928-43CE-AB0E-DE0BF0B06F85}"/>
-              </a:ext>
-            </a:extLst>
-          </p:cNvPr>
-          <p:cNvSpPr>
-            <a:spLocks xmlns:a="http://schemas.openxmlformats.org/drawingml/2006/main" noGrp="1"/>
-          </p:cNvSpPr>
-          <p:nvPr/>
-        </p:nvSpPr>
-        <p:spPr>
-          <a:xfrm xmlns:a="http://schemas.openxmlformats.org/drawingml/2006/main">
-            <a:off x="8477250" y="4533900"/>
-            <a:ext cx="2381250" cy="323850"/>
-          </a:xfrm>
-          <a:prstGeom xmlns:a="http://schemas.openxmlformats.org/drawingml/2006/main" prst="rect">
-            <a:avLst/>
-          </a:prstGeom>
-          <a:noFill xmlns:a="http://schemas.openxmlformats.org/drawingml/2006/main"/>
-          <a:ln xmlns:a="http://schemas.openxmlformats.org/drawingml/2006/main" w="0">
-            <a:noFill/>
-            <a:prstDash val="solid"/>
-          </a:ln>
-        </p:spPr>
-        <p:txBody>
-          <a:bodyPr xmlns:a="http://schemas.openxmlformats.org/drawingml/2006/main"/>
-          <a:lstStyle xmlns:a="http://schemas.openxmlformats.org/drawingml/2006/main"/>
-          <a:p xmlns:a="http://schemas.openxmlformats.org/drawingml/2006/main">
-            <a:pPr>
-              <a:defRPr sz="1500">
-                <a:solidFill>
-                  <a:srgbClr val="111827"/>
-                </a:solidFill>
-              </a:defRPr>
-            </a:pPr>
-            <a:r>
-              <a:rPr sz="1500">
-                <a:solidFill>
-                  <a:srgbClr val="111827"/>
-                </a:solidFill>
-              </a:rPr>
-              <a:t>• 留下版本紀錄</a:t>
+              <a:t>後端負責碰試算表；不要把金鑰或敏感資料送到前端。</a:t>
             </a:r>
           </a:p>
         </p:txBody>
@@ -5149,7 +7744,7 @@
     </p:spTree>
     <p:extLst>
       <p:ext uri="{BB962C8B-B14F-4D97-AF65-F5344CB8AC3E}">
-        <p14:creationId xmlns:p14="http://schemas.microsoft.com/office/powerpoint/2010/main" val="463995338"/>
+        <p14:creationId xmlns:p14="http://schemas.microsoft.com/office/powerpoint/2010/main" val="800752072"/>
       </p:ext>
     </p:extLst>
   </p:cSld>
@@ -5177,10 +7772,10 @@
       </p:grpSpPr>
       <p:sp>
         <p:nvSpPr>
-          <p:cNvPr id="16" name="">
-            <a:extLst xmlns:a="http://schemas.openxmlformats.org/drawingml/2006/main">
-              <a:ext uri="{FF2B5EF4-FFF2-40B4-BE49-F238E27FC236}">
-                <a16:creationId xmlns:a16="http://schemas.microsoft.com/office/drawing/2014/main" id="{51A75BCC-D9DB-4A76-BD41-A2C7D11898CE}"/>
+          <p:cNvPr id="8" name="">
+            <a:extLst xmlns:a="http://schemas.openxmlformats.org/drawingml/2006/main">
+              <a:ext uri="{FF2B5EF4-FFF2-40B4-BE49-F238E27FC236}">
+                <a16:creationId xmlns:a16="http://schemas.microsoft.com/office/drawing/2014/main" id="{0DC663EB-506A-4D2D-8E61-276E72B646C3}"/>
               </a:ext>
             </a:extLst>
           </p:cNvPr>
@@ -5208,6 +7803,7 @@
           <a:lstStyle xmlns:a="http://schemas.openxmlformats.org/drawingml/2006/main"/>
           <a:p xmlns:a="http://schemas.openxmlformats.org/drawingml/2006/main">
             <a:pPr>
+              <a:buNone/>
               <a:defRPr sz="975" b="1">
                 <a:solidFill>
                   <a:srgbClr val="3D8DFF"/>
@@ -5230,7 +7826,7 @@
           <p:cNvPr id="2" name="">
             <a:extLst xmlns:a="http://schemas.openxmlformats.org/drawingml/2006/main">
               <a:ext uri="{FF2B5EF4-FFF2-40B4-BE49-F238E27FC236}">
-                <a16:creationId xmlns:a16="http://schemas.microsoft.com/office/drawing/2014/main" id="{7ED9904D-9D07-4847-A411-DD5A8FA60B9A}"/>
+                <a16:creationId xmlns:a16="http://schemas.microsoft.com/office/drawing/2014/main" id="{DAF6CD03-4ED0-4523-B5F6-9DCFE4C4E061}"/>
               </a:ext>
             </a:extLst>
           </p:cNvPr>
@@ -5258,6 +7854,7 @@
           <a:lstStyle xmlns:a="http://schemas.openxmlformats.org/drawingml/2006/main"/>
           <a:p xmlns:a="http://schemas.openxmlformats.org/drawingml/2006/main">
             <a:pPr>
+              <a:buNone/>
               <a:defRPr sz="2700" b="1">
                 <a:solidFill>
                   <a:srgbClr val="111827"/>
@@ -5270,7 +7867,7 @@
                   <a:srgbClr val="111827"/>
                 </a:solidFill>
               </a:rPr>
-              <a:t>交付規格</a:t>
+              <a:t>Index.html 如何送出？</a:t>
             </a:r>
           </a:p>
         </p:txBody>
@@ -5280,7 +7877,7 @@
           <p:cNvPr id="3" name="">
             <a:extLst xmlns:a="http://schemas.openxmlformats.org/drawingml/2006/main">
               <a:ext uri="{FF2B5EF4-FFF2-40B4-BE49-F238E27FC236}">
-                <a16:creationId xmlns:a16="http://schemas.microsoft.com/office/drawing/2014/main" id="{DFC9F866-9731-4DAA-9BE4-1FDD1BF60E96}"/>
+                <a16:creationId xmlns:a16="http://schemas.microsoft.com/office/drawing/2014/main" id="{54C7EC45-F803-405F-B350-5D2A9A49D15D}"/>
               </a:ext>
             </a:extLst>
           </p:cNvPr>
@@ -5308,6 +7905,7 @@
           <a:lstStyle xmlns:a="http://schemas.openxmlformats.org/drawingml/2006/main"/>
           <a:p xmlns:a="http://schemas.openxmlformats.org/drawingml/2006/main">
             <a:pPr algn="r">
+              <a:buNone/>
               <a:defRPr sz="1050" b="1">
                 <a:solidFill>
                   <a:srgbClr val="536273"/>
@@ -5330,7 +7928,7 @@
           <p:cNvPr id="4" name="">
             <a:extLst xmlns:a="http://schemas.openxmlformats.org/drawingml/2006/main">
               <a:ext uri="{FF2B5EF4-FFF2-40B4-BE49-F238E27FC236}">
-                <a16:creationId xmlns:a16="http://schemas.microsoft.com/office/drawing/2014/main" id="{333F7C5E-66B0-4331-ADAE-051F02740D94}"/>
+                <a16:creationId xmlns:a16="http://schemas.microsoft.com/office/drawing/2014/main" id="{B878B448-F85B-4F1D-BBCB-4EC51A232D15}"/>
               </a:ext>
             </a:extLst>
           </p:cNvPr>
@@ -5361,127 +7959,31 @@
           <p:cNvPr id="5" name="">
             <a:extLst xmlns:a="http://schemas.openxmlformats.org/drawingml/2006/main">
               <a:ext uri="{FF2B5EF4-FFF2-40B4-BE49-F238E27FC236}">
-                <a16:creationId xmlns:a16="http://schemas.microsoft.com/office/drawing/2014/main" id="{818C6E11-C70A-4740-AF84-14CF77A6A359}"/>
-              </a:ext>
-            </a:extLst>
-          </p:cNvPr>
-          <p:cNvSpPr>
-            <a:spLocks xmlns:a="http://schemas.openxmlformats.org/drawingml/2006/main" noGrp="1"/>
-          </p:cNvSpPr>
-          <p:nvPr/>
-        </p:nvSpPr>
-        <p:spPr>
-          <a:xfrm xmlns:a="http://schemas.openxmlformats.org/drawingml/2006/main">
-            <a:off x="609600" y="1695450"/>
-            <a:ext cx="10477500" cy="381000"/>
-          </a:xfrm>
-          <a:prstGeom xmlns:a="http://schemas.openxmlformats.org/drawingml/2006/main" prst="rect">
-            <a:avLst/>
-          </a:prstGeom>
-          <a:noFill xmlns:a="http://schemas.openxmlformats.org/drawingml/2006/main"/>
-          <a:ln xmlns:a="http://schemas.openxmlformats.org/drawingml/2006/main" w="0">
-            <a:noFill/>
-            <a:prstDash val="solid"/>
-          </a:ln>
-        </p:spPr>
-        <p:txBody>
-          <a:bodyPr xmlns:a="http://schemas.openxmlformats.org/drawingml/2006/main"/>
-          <a:lstStyle xmlns:a="http://schemas.openxmlformats.org/drawingml/2006/main"/>
-          <a:p xmlns:a="http://schemas.openxmlformats.org/drawingml/2006/main">
-            <a:pPr>
-              <a:defRPr sz="2025" b="1">
-                <a:solidFill>
-                  <a:srgbClr val="111827"/>
-                </a:solidFill>
-              </a:defRPr>
-            </a:pPr>
-            <a:r>
-              <a:rPr sz="2025" b="1">
-                <a:solidFill>
-                  <a:srgbClr val="111827"/>
-                </a:solidFill>
-              </a:rPr>
-              <a:t>作品包必須讓另一個人接手後也看得懂。</a:t>
-            </a:r>
-          </a:p>
-        </p:txBody>
-      </p:sp>
-      <p:sp>
-        <p:nvSpPr>
-          <p:cNvPr id="6" name="">
-            <a:extLst xmlns:a="http://schemas.openxmlformats.org/drawingml/2006/main">
-              <a:ext uri="{FF2B5EF4-FFF2-40B4-BE49-F238E27FC236}">
-                <a16:creationId xmlns:a16="http://schemas.microsoft.com/office/drawing/2014/main" id="{7A3606CF-B0FD-45FB-BDAA-B52F7954D546}"/>
-              </a:ext>
-            </a:extLst>
-          </p:cNvPr>
-          <p:cNvSpPr>
-            <a:spLocks xmlns:a="http://schemas.openxmlformats.org/drawingml/2006/main" noGrp="1"/>
-          </p:cNvSpPr>
-          <p:nvPr/>
-        </p:nvSpPr>
-        <p:spPr>
-          <a:xfrm xmlns:a="http://schemas.openxmlformats.org/drawingml/2006/main">
-            <a:off x="1047750" y="2381250"/>
-            <a:ext cx="4953000" cy="285750"/>
-          </a:xfrm>
-          <a:prstGeom xmlns:a="http://schemas.openxmlformats.org/drawingml/2006/main" prst="rect">
-            <a:avLst/>
-          </a:prstGeom>
-          <a:noFill xmlns:a="http://schemas.openxmlformats.org/drawingml/2006/main"/>
-          <a:ln xmlns:a="http://schemas.openxmlformats.org/drawingml/2006/main" w="0">
-            <a:noFill/>
-            <a:prstDash val="solid"/>
-          </a:ln>
-        </p:spPr>
-        <p:txBody>
-          <a:bodyPr xmlns:a="http://schemas.openxmlformats.org/drawingml/2006/main"/>
-          <a:lstStyle xmlns:a="http://schemas.openxmlformats.org/drawingml/2006/main"/>
-          <a:p xmlns:a="http://schemas.openxmlformats.org/drawingml/2006/main">
-            <a:pPr>
-              <a:defRPr sz="1650" b="1">
-                <a:solidFill>
-                  <a:srgbClr val="3D8DFF"/>
-                </a:solidFill>
-              </a:defRPr>
-            </a:pPr>
-            <a:r>
-              <a:rPr sz="1650" b="1">
-                <a:solidFill>
-                  <a:srgbClr val="3D8DFF"/>
-                </a:solidFill>
-              </a:rPr>
-              <a:t>01｜成果檔案</a:t>
-            </a:r>
-          </a:p>
-        </p:txBody>
-      </p:sp>
-      <p:sp>
-        <p:nvSpPr>
-          <p:cNvPr id="7" name="">
-            <a:extLst xmlns:a="http://schemas.openxmlformats.org/drawingml/2006/main">
-              <a:ext uri="{FF2B5EF4-FFF2-40B4-BE49-F238E27FC236}">
-                <a16:creationId xmlns:a16="http://schemas.microsoft.com/office/drawing/2014/main" id="{2DEBE5A3-D71A-4E5D-A5BC-4F41A774B4B0}"/>
-              </a:ext>
-            </a:extLst>
-          </p:cNvPr>
-          <p:cNvSpPr>
-            <a:spLocks xmlns:a="http://schemas.openxmlformats.org/drawingml/2006/main" noGrp="1"/>
-          </p:cNvSpPr>
-          <p:nvPr/>
-        </p:nvSpPr>
-        <p:spPr>
-          <a:xfrm xmlns:a="http://schemas.openxmlformats.org/drawingml/2006/main">
-            <a:off x="1047750" y="2762250"/>
-            <a:ext cx="9620250" cy="0"/>
-          </a:xfrm>
-          <a:prstGeom xmlns:a="http://schemas.openxmlformats.org/drawingml/2006/main" prst="line">
-            <a:avLst/>
-          </a:prstGeom>
-          <a:noFill xmlns:a="http://schemas.openxmlformats.org/drawingml/2006/main"/>
+                <a16:creationId xmlns:a16="http://schemas.microsoft.com/office/drawing/2014/main" id="{260337B0-1A72-4EC0-A66F-AB033147A278}"/>
+              </a:ext>
+            </a:extLst>
+          </p:cNvPr>
+          <p:cNvSpPr>
+            <a:spLocks xmlns:a="http://schemas.openxmlformats.org/drawingml/2006/main" noGrp="1"/>
+          </p:cNvSpPr>
+          <p:nvPr/>
+        </p:nvSpPr>
+        <p:spPr>
+          <a:xfrm xmlns:a="http://schemas.openxmlformats.org/drawingml/2006/main">
+            <a:off x="609600" y="1733550"/>
+            <a:ext cx="10953750" cy="3333750"/>
+          </a:xfrm>
+          <a:prstGeom xmlns:a="http://schemas.openxmlformats.org/drawingml/2006/main" prst="roundRect">
+            <a:avLst>
+              <a:gd name="adj" fmla="val 2286"/>
+            </a:avLst>
+          </a:prstGeom>
+          <a:solidFill xmlns:a="http://schemas.openxmlformats.org/drawingml/2006/main">
+            <a:srgbClr val="101827"/>
+          </a:solidFill>
           <a:ln xmlns:a="http://schemas.openxmlformats.org/drawingml/2006/main" w="9525">
             <a:solidFill>
-              <a:srgbClr val="D7DEE7"/>
+              <a:srgbClr val="101827"/>
             </a:solidFill>
             <a:prstDash val="solid"/>
           </a:ln>
@@ -5489,22 +7991,22 @@
       </p:sp>
       <p:sp>
         <p:nvSpPr>
-          <p:cNvPr id="8" name="">
-            <a:extLst xmlns:a="http://schemas.openxmlformats.org/drawingml/2006/main">
-              <a:ext uri="{FF2B5EF4-FFF2-40B4-BE49-F238E27FC236}">
-                <a16:creationId xmlns:a16="http://schemas.microsoft.com/office/drawing/2014/main" id="{F86F96B7-07EA-44D4-8B11-F5E47248C842}"/>
-              </a:ext>
-            </a:extLst>
-          </p:cNvPr>
-          <p:cNvSpPr>
-            <a:spLocks xmlns:a="http://schemas.openxmlformats.org/drawingml/2006/main" noGrp="1"/>
-          </p:cNvSpPr>
-          <p:nvPr/>
-        </p:nvSpPr>
-        <p:spPr>
-          <a:xfrm xmlns:a="http://schemas.openxmlformats.org/drawingml/2006/main">
-            <a:off x="1047750" y="2981325"/>
-            <a:ext cx="4953000" cy="285750"/>
+          <p:cNvPr id="6" name="">
+            <a:extLst xmlns:a="http://schemas.openxmlformats.org/drawingml/2006/main">
+              <a:ext uri="{FF2B5EF4-FFF2-40B4-BE49-F238E27FC236}">
+                <a16:creationId xmlns:a16="http://schemas.microsoft.com/office/drawing/2014/main" id="{2036E42B-7519-452E-B6B6-17A7E5088647}"/>
+              </a:ext>
+            </a:extLst>
+          </p:cNvPr>
+          <p:cNvSpPr>
+            <a:spLocks xmlns:a="http://schemas.openxmlformats.org/drawingml/2006/main" noGrp="1"/>
+          </p:cNvSpPr>
+          <p:nvPr/>
+        </p:nvSpPr>
+        <p:spPr>
+          <a:xfrm xmlns:a="http://schemas.openxmlformats.org/drawingml/2006/main">
+            <a:off x="914400" y="2095500"/>
+            <a:ext cx="10287000" cy="2476500"/>
           </a:xfrm>
           <a:prstGeom xmlns:a="http://schemas.openxmlformats.org/drawingml/2006/main" prst="rect">
             <a:avLst/>
@@ -5520,72 +8022,46 @@
           <a:lstStyle xmlns:a="http://schemas.openxmlformats.org/drawingml/2006/main"/>
           <a:p xmlns:a="http://schemas.openxmlformats.org/drawingml/2006/main">
             <a:pPr>
-              <a:defRPr sz="1650" b="1">
-                <a:solidFill>
-                  <a:srgbClr val="111827"/>
-                </a:solidFill>
-              </a:defRPr>
-            </a:pPr>
-            <a:r>
-              <a:rPr sz="1650" b="1">
-                <a:solidFill>
-                  <a:srgbClr val="111827"/>
-                </a:solidFill>
-              </a:rPr>
-              <a:t>02｜提示詞或程式</a:t>
-            </a:r>
-          </a:p>
-        </p:txBody>
-      </p:sp>
-      <p:sp>
-        <p:nvSpPr>
-          <p:cNvPr id="9" name="">
-            <a:extLst xmlns:a="http://schemas.openxmlformats.org/drawingml/2006/main">
-              <a:ext uri="{FF2B5EF4-FFF2-40B4-BE49-F238E27FC236}">
-                <a16:creationId xmlns:a16="http://schemas.microsoft.com/office/drawing/2014/main" id="{34C565E7-8ADA-4909-9414-A632A5A27A55}"/>
-              </a:ext>
-            </a:extLst>
-          </p:cNvPr>
-          <p:cNvSpPr>
-            <a:spLocks xmlns:a="http://schemas.openxmlformats.org/drawingml/2006/main" noGrp="1"/>
-          </p:cNvSpPr>
-          <p:nvPr/>
-        </p:nvSpPr>
-        <p:spPr>
-          <a:xfrm xmlns:a="http://schemas.openxmlformats.org/drawingml/2006/main">
-            <a:off x="1047750" y="3362325"/>
-            <a:ext cx="9620250" cy="0"/>
-          </a:xfrm>
-          <a:prstGeom xmlns:a="http://schemas.openxmlformats.org/drawingml/2006/main" prst="line">
-            <a:avLst/>
-          </a:prstGeom>
-          <a:noFill xmlns:a="http://schemas.openxmlformats.org/drawingml/2006/main"/>
-          <a:ln xmlns:a="http://schemas.openxmlformats.org/drawingml/2006/main" w="9525">
-            <a:solidFill>
-              <a:srgbClr val="D7DEE7"/>
-            </a:solidFill>
-            <a:prstDash val="solid"/>
-          </a:ln>
-        </p:spPr>
-      </p:sp>
-      <p:sp>
-        <p:nvSpPr>
-          <p:cNvPr id="10" name="">
-            <a:extLst xmlns:a="http://schemas.openxmlformats.org/drawingml/2006/main">
-              <a:ext uri="{FF2B5EF4-FFF2-40B4-BE49-F238E27FC236}">
-                <a16:creationId xmlns:a16="http://schemas.microsoft.com/office/drawing/2014/main" id="{A573E64D-A0CC-4028-B46B-342914A99FB0}"/>
-              </a:ext>
-            </a:extLst>
-          </p:cNvPr>
-          <p:cNvSpPr>
-            <a:spLocks xmlns:a="http://schemas.openxmlformats.org/drawingml/2006/main" noGrp="1"/>
-          </p:cNvSpPr>
-          <p:nvPr/>
-        </p:nvSpPr>
-        <p:spPr>
-          <a:xfrm xmlns:a="http://schemas.openxmlformats.org/drawingml/2006/main">
-            <a:off x="1047750" y="3581400"/>
-            <a:ext cx="4953000" cy="285750"/>
+              <a:buNone/>
+              <a:defRPr sz="1725">
+                <a:solidFill>
+                  <a:srgbClr val="FFFFFF"/>
+                </a:solidFill>
+              </a:defRPr>
+            </a:pPr>
+            <a:r>
+              <a:rPr sz="1725">
+                <a:solidFill>
+                  <a:srgbClr val="FFFFFF"/>
+                </a:solidFill>
+              </a:rPr>
+              <a:t>完成測驗 → 建立 payload
+→ google.script.run
+→ withSuccessHandler 顯示已送出
+→ withFailureHandler 顯示錯誤並可重試
+傳送期間停用按鈕，避免重複資料。</a:t>
+            </a:r>
+          </a:p>
+        </p:txBody>
+      </p:sp>
+      <p:sp>
+        <p:nvSpPr>
+          <p:cNvPr id="7" name="">
+            <a:extLst xmlns:a="http://schemas.openxmlformats.org/drawingml/2006/main">
+              <a:ext uri="{FF2B5EF4-FFF2-40B4-BE49-F238E27FC236}">
+                <a16:creationId xmlns:a16="http://schemas.microsoft.com/office/drawing/2014/main" id="{C4AC558C-86CF-4E2E-AC9F-D720612F3C0D}"/>
+              </a:ext>
+            </a:extLst>
+          </p:cNvPr>
+          <p:cNvSpPr>
+            <a:spLocks xmlns:a="http://schemas.openxmlformats.org/drawingml/2006/main" noGrp="1"/>
+          </p:cNvSpPr>
+          <p:nvPr/>
+        </p:nvSpPr>
+        <p:spPr>
+          <a:xfrm xmlns:a="http://schemas.openxmlformats.org/drawingml/2006/main">
+            <a:off x="609600" y="5619750"/>
+            <a:ext cx="10477500" cy="304800"/>
           </a:xfrm>
           <a:prstGeom xmlns:a="http://schemas.openxmlformats.org/drawingml/2006/main" prst="rect">
             <a:avLst/>
@@ -5601,220 +8077,28 @@
           <a:lstStyle xmlns:a="http://schemas.openxmlformats.org/drawingml/2006/main"/>
           <a:p xmlns:a="http://schemas.openxmlformats.org/drawingml/2006/main">
             <a:pPr>
-              <a:defRPr sz="1650" b="1">
-                <a:solidFill>
-                  <a:srgbClr val="111827"/>
-                </a:solidFill>
-              </a:defRPr>
-            </a:pPr>
-            <a:r>
-              <a:rPr sz="1650" b="1">
-                <a:solidFill>
-                  <a:srgbClr val="111827"/>
-                </a:solidFill>
-              </a:rPr>
-              <a:t>03｜輸入資料與來源</a:t>
-            </a:r>
-          </a:p>
-        </p:txBody>
-      </p:sp>
-      <p:sp>
-        <p:nvSpPr>
-          <p:cNvPr id="11" name="">
-            <a:extLst xmlns:a="http://schemas.openxmlformats.org/drawingml/2006/main">
-              <a:ext uri="{FF2B5EF4-FFF2-40B4-BE49-F238E27FC236}">
-                <a16:creationId xmlns:a16="http://schemas.microsoft.com/office/drawing/2014/main" id="{0761394B-CD73-4D80-AC2E-47E960065902}"/>
-              </a:ext>
-            </a:extLst>
-          </p:cNvPr>
-          <p:cNvSpPr>
-            <a:spLocks xmlns:a="http://schemas.openxmlformats.org/drawingml/2006/main" noGrp="1"/>
-          </p:cNvSpPr>
-          <p:nvPr/>
-        </p:nvSpPr>
-        <p:spPr>
-          <a:xfrm xmlns:a="http://schemas.openxmlformats.org/drawingml/2006/main">
-            <a:off x="1047750" y="3962400"/>
-            <a:ext cx="9620250" cy="0"/>
-          </a:xfrm>
-          <a:prstGeom xmlns:a="http://schemas.openxmlformats.org/drawingml/2006/main" prst="line">
-            <a:avLst/>
-          </a:prstGeom>
-          <a:noFill xmlns:a="http://schemas.openxmlformats.org/drawingml/2006/main"/>
-          <a:ln xmlns:a="http://schemas.openxmlformats.org/drawingml/2006/main" w="9525">
-            <a:solidFill>
-              <a:srgbClr val="D7DEE7"/>
-            </a:solidFill>
-            <a:prstDash val="solid"/>
-          </a:ln>
-        </p:spPr>
-      </p:sp>
-      <p:sp>
-        <p:nvSpPr>
-          <p:cNvPr id="12" name="">
-            <a:extLst xmlns:a="http://schemas.openxmlformats.org/drawingml/2006/main">
-              <a:ext uri="{FF2B5EF4-FFF2-40B4-BE49-F238E27FC236}">
-                <a16:creationId xmlns:a16="http://schemas.microsoft.com/office/drawing/2014/main" id="{FFA45E53-63B4-4936-B753-769F932DB564}"/>
-              </a:ext>
-            </a:extLst>
-          </p:cNvPr>
-          <p:cNvSpPr>
-            <a:spLocks xmlns:a="http://schemas.openxmlformats.org/drawingml/2006/main" noGrp="1"/>
-          </p:cNvSpPr>
-          <p:nvPr/>
-        </p:nvSpPr>
-        <p:spPr>
-          <a:xfrm xmlns:a="http://schemas.openxmlformats.org/drawingml/2006/main">
-            <a:off x="1047750" y="4181475"/>
-            <a:ext cx="4953000" cy="285750"/>
-          </a:xfrm>
-          <a:prstGeom xmlns:a="http://schemas.openxmlformats.org/drawingml/2006/main" prst="rect">
-            <a:avLst/>
-          </a:prstGeom>
-          <a:noFill xmlns:a="http://schemas.openxmlformats.org/drawingml/2006/main"/>
-          <a:ln xmlns:a="http://schemas.openxmlformats.org/drawingml/2006/main" w="0">
-            <a:noFill/>
-            <a:prstDash val="solid"/>
-          </a:ln>
-        </p:spPr>
-        <p:txBody>
-          <a:bodyPr xmlns:a="http://schemas.openxmlformats.org/drawingml/2006/main"/>
-          <a:lstStyle xmlns:a="http://schemas.openxmlformats.org/drawingml/2006/main"/>
-          <a:p xmlns:a="http://schemas.openxmlformats.org/drawingml/2006/main">
-            <a:pPr>
-              <a:defRPr sz="1650" b="1">
-                <a:solidFill>
-                  <a:srgbClr val="111827"/>
-                </a:solidFill>
-              </a:defRPr>
-            </a:pPr>
-            <a:r>
-              <a:rPr sz="1650" b="1">
-                <a:solidFill>
-                  <a:srgbClr val="111827"/>
-                </a:solidFill>
-              </a:rPr>
-              <a:t>04｜測試／人工檢查紀錄</a:t>
-            </a:r>
-          </a:p>
-        </p:txBody>
-      </p:sp>
-      <p:sp>
-        <p:nvSpPr>
-          <p:cNvPr id="13" name="">
-            <a:extLst xmlns:a="http://schemas.openxmlformats.org/drawingml/2006/main">
-              <a:ext uri="{FF2B5EF4-FFF2-40B4-BE49-F238E27FC236}">
-                <a16:creationId xmlns:a16="http://schemas.microsoft.com/office/drawing/2014/main" id="{C1514B29-B272-4C29-A8B8-565FE392C9B6}"/>
-              </a:ext>
-            </a:extLst>
-          </p:cNvPr>
-          <p:cNvSpPr>
-            <a:spLocks xmlns:a="http://schemas.openxmlformats.org/drawingml/2006/main" noGrp="1"/>
-          </p:cNvSpPr>
-          <p:nvPr/>
-        </p:nvSpPr>
-        <p:spPr>
-          <a:xfrm xmlns:a="http://schemas.openxmlformats.org/drawingml/2006/main">
-            <a:off x="1047750" y="4562475"/>
-            <a:ext cx="9620250" cy="0"/>
-          </a:xfrm>
-          <a:prstGeom xmlns:a="http://schemas.openxmlformats.org/drawingml/2006/main" prst="line">
-            <a:avLst/>
-          </a:prstGeom>
-          <a:noFill xmlns:a="http://schemas.openxmlformats.org/drawingml/2006/main"/>
-          <a:ln xmlns:a="http://schemas.openxmlformats.org/drawingml/2006/main" w="9525">
-            <a:solidFill>
-              <a:srgbClr val="D7DEE7"/>
-            </a:solidFill>
-            <a:prstDash val="solid"/>
-          </a:ln>
-        </p:spPr>
-      </p:sp>
-      <p:sp>
-        <p:nvSpPr>
-          <p:cNvPr id="14" name="">
-            <a:extLst xmlns:a="http://schemas.openxmlformats.org/drawingml/2006/main">
-              <a:ext uri="{FF2B5EF4-FFF2-40B4-BE49-F238E27FC236}">
-                <a16:creationId xmlns:a16="http://schemas.microsoft.com/office/drawing/2014/main" id="{33BD78E3-4B7B-4CAD-B90A-ACAE0627FEB1}"/>
-              </a:ext>
-            </a:extLst>
-          </p:cNvPr>
-          <p:cNvSpPr>
-            <a:spLocks xmlns:a="http://schemas.openxmlformats.org/drawingml/2006/main" noGrp="1"/>
-          </p:cNvSpPr>
-          <p:nvPr/>
-        </p:nvSpPr>
-        <p:spPr>
-          <a:xfrm xmlns:a="http://schemas.openxmlformats.org/drawingml/2006/main">
-            <a:off x="1047750" y="4781550"/>
-            <a:ext cx="4953000" cy="285750"/>
-          </a:xfrm>
-          <a:prstGeom xmlns:a="http://schemas.openxmlformats.org/drawingml/2006/main" prst="rect">
-            <a:avLst/>
-          </a:prstGeom>
-          <a:noFill xmlns:a="http://schemas.openxmlformats.org/drawingml/2006/main"/>
-          <a:ln xmlns:a="http://schemas.openxmlformats.org/drawingml/2006/main" w="0">
-            <a:noFill/>
-            <a:prstDash val="solid"/>
-          </a:ln>
-        </p:spPr>
-        <p:txBody>
-          <a:bodyPr xmlns:a="http://schemas.openxmlformats.org/drawingml/2006/main"/>
-          <a:lstStyle xmlns:a="http://schemas.openxmlformats.org/drawingml/2006/main"/>
-          <a:p xmlns:a="http://schemas.openxmlformats.org/drawingml/2006/main">
-            <a:pPr>
-              <a:defRPr sz="1650" b="1">
-                <a:solidFill>
-                  <a:srgbClr val="111827"/>
-                </a:solidFill>
-              </a:defRPr>
-            </a:pPr>
-            <a:r>
-              <a:rPr sz="1650" b="1">
-                <a:solidFill>
-                  <a:srgbClr val="111827"/>
-                </a:solidFill>
-              </a:rPr>
-              <a:t>05｜操作說明與下一步</a:t>
-            </a:r>
-          </a:p>
-        </p:txBody>
-      </p:sp>
-      <p:sp>
-        <p:nvSpPr>
-          <p:cNvPr id="15" name="">
-            <a:extLst xmlns:a="http://schemas.openxmlformats.org/drawingml/2006/main">
-              <a:ext uri="{FF2B5EF4-FFF2-40B4-BE49-F238E27FC236}">
-                <a16:creationId xmlns:a16="http://schemas.microsoft.com/office/drawing/2014/main" id="{DF124CDB-33F2-4867-A8DB-811DAE2E229B}"/>
-              </a:ext>
-            </a:extLst>
-          </p:cNvPr>
-          <p:cNvSpPr>
-            <a:spLocks xmlns:a="http://schemas.openxmlformats.org/drawingml/2006/main" noGrp="1"/>
-          </p:cNvSpPr>
-          <p:nvPr/>
-        </p:nvSpPr>
-        <p:spPr>
-          <a:xfrm xmlns:a="http://schemas.openxmlformats.org/drawingml/2006/main">
-            <a:off x="1047750" y="5162550"/>
-            <a:ext cx="9620250" cy="0"/>
-          </a:xfrm>
-          <a:prstGeom xmlns:a="http://schemas.openxmlformats.org/drawingml/2006/main" prst="line">
-            <a:avLst/>
-          </a:prstGeom>
-          <a:noFill xmlns:a="http://schemas.openxmlformats.org/drawingml/2006/main"/>
-          <a:ln xmlns:a="http://schemas.openxmlformats.org/drawingml/2006/main" w="9525">
-            <a:solidFill>
-              <a:srgbClr val="D7DEE7"/>
-            </a:solidFill>
-            <a:prstDash val="solid"/>
-          </a:ln>
-        </p:spPr>
+              <a:buNone/>
+              <a:defRPr sz="1500" b="1">
+                <a:solidFill>
+                  <a:srgbClr val="3D8DFF"/>
+                </a:solidFill>
+              </a:defRPr>
+            </a:pPr>
+            <a:r>
+              <a:rPr sz="1500" b="1">
+                <a:solidFill>
+                  <a:srgbClr val="3D8DFF"/>
+                </a:solidFill>
+              </a:rPr>
+              <a:t>google.script.run 是非同步呼叫；成功與失敗都要有畫面回饋。</a:t>
+            </a:r>
+          </a:p>
+        </p:txBody>
       </p:sp>
     </p:spTree>
     <p:extLst>
       <p:ext uri="{BB962C8B-B14F-4D97-AF65-F5344CB8AC3E}">
-        <p14:creationId xmlns:p14="http://schemas.microsoft.com/office/powerpoint/2010/main" val="2076906398"/>
+        <p14:creationId xmlns:p14="http://schemas.microsoft.com/office/powerpoint/2010/main" val="800752072"/>
       </p:ext>
     </p:extLst>
   </p:cSld>
@@ -5842,10 +8126,10 @@
       </p:grpSpPr>
       <p:sp>
         <p:nvSpPr>
-          <p:cNvPr id="9" name="">
-            <a:extLst xmlns:a="http://schemas.openxmlformats.org/drawingml/2006/main">
-              <a:ext uri="{FF2B5EF4-FFF2-40B4-BE49-F238E27FC236}">
-                <a16:creationId xmlns:a16="http://schemas.microsoft.com/office/drawing/2014/main" id="{B6AF8305-7D56-4132-AE9A-2A128AF101C5}"/>
+          <p:cNvPr id="21" name="">
+            <a:extLst xmlns:a="http://schemas.openxmlformats.org/drawingml/2006/main">
+              <a:ext uri="{FF2B5EF4-FFF2-40B4-BE49-F238E27FC236}">
+                <a16:creationId xmlns:a16="http://schemas.microsoft.com/office/drawing/2014/main" id="{63A3043E-B6F6-4CC2-8048-9193993539BD}"/>
               </a:ext>
             </a:extLst>
           </p:cNvPr>
@@ -5873,6 +8157,7 @@
           <a:lstStyle xmlns:a="http://schemas.openxmlformats.org/drawingml/2006/main"/>
           <a:p xmlns:a="http://schemas.openxmlformats.org/drawingml/2006/main">
             <a:pPr>
+              <a:buNone/>
               <a:defRPr sz="975" b="1">
                 <a:solidFill>
                   <a:srgbClr val="3D8DFF"/>
@@ -5895,7 +8180,7 @@
           <p:cNvPr id="2" name="">
             <a:extLst xmlns:a="http://schemas.openxmlformats.org/drawingml/2006/main">
               <a:ext uri="{FF2B5EF4-FFF2-40B4-BE49-F238E27FC236}">
-                <a16:creationId xmlns:a16="http://schemas.microsoft.com/office/drawing/2014/main" id="{E4CEAB51-E956-4FA5-8326-E1A935BEA73A}"/>
+                <a16:creationId xmlns:a16="http://schemas.microsoft.com/office/drawing/2014/main" id="{77FA6CF0-F610-45B8-A116-FDFF50873F46}"/>
               </a:ext>
             </a:extLst>
           </p:cNvPr>
@@ -5923,6 +8208,7 @@
           <a:lstStyle xmlns:a="http://schemas.openxmlformats.org/drawingml/2006/main"/>
           <a:p xmlns:a="http://schemas.openxmlformats.org/drawingml/2006/main">
             <a:pPr>
+              <a:buNone/>
               <a:defRPr sz="2700" b="1">
                 <a:solidFill>
                   <a:srgbClr val="111827"/>
@@ -5935,7 +8221,7 @@
                   <a:srgbClr val="111827"/>
                 </a:solidFill>
               </a:rPr>
-              <a:t>課程總結</a:t>
+              <a:t>部署成學生網址</a:t>
             </a:r>
           </a:p>
         </p:txBody>
@@ -5945,7 +8231,7 @@
           <p:cNvPr id="3" name="">
             <a:extLst xmlns:a="http://schemas.openxmlformats.org/drawingml/2006/main">
               <a:ext uri="{FF2B5EF4-FFF2-40B4-BE49-F238E27FC236}">
-                <a16:creationId xmlns:a16="http://schemas.microsoft.com/office/drawing/2014/main" id="{05928997-BC42-4D45-B6E2-2DA94FDDEAE4}"/>
+                <a16:creationId xmlns:a16="http://schemas.microsoft.com/office/drawing/2014/main" id="{F947B0AD-2D0C-4104-B074-72386EB77BF4}"/>
               </a:ext>
             </a:extLst>
           </p:cNvPr>
@@ -5973,6 +8259,7 @@
           <a:lstStyle xmlns:a="http://schemas.openxmlformats.org/drawingml/2006/main"/>
           <a:p xmlns:a="http://schemas.openxmlformats.org/drawingml/2006/main">
             <a:pPr algn="r">
+              <a:buNone/>
               <a:defRPr sz="1050" b="1">
                 <a:solidFill>
                   <a:srgbClr val="536273"/>
@@ -5995,7 +8282,7 @@
           <p:cNvPr id="4" name="">
             <a:extLst xmlns:a="http://schemas.openxmlformats.org/drawingml/2006/main">
               <a:ext uri="{FF2B5EF4-FFF2-40B4-BE49-F238E27FC236}">
-                <a16:creationId xmlns:a16="http://schemas.microsoft.com/office/drawing/2014/main" id="{E80A4A7F-D531-43BB-8D5E-1D5C1CAFA94B}"/>
+                <a16:creationId xmlns:a16="http://schemas.microsoft.com/office/drawing/2014/main" id="{CE65D2F4-9A9B-47C6-8CB0-5494698365F9}"/>
               </a:ext>
             </a:extLst>
           </p:cNvPr>
@@ -6026,19 +8313,19 @@
           <p:cNvPr id="5" name="">
             <a:extLst xmlns:a="http://schemas.openxmlformats.org/drawingml/2006/main">
               <a:ext uri="{FF2B5EF4-FFF2-40B4-BE49-F238E27FC236}">
-                <a16:creationId xmlns:a16="http://schemas.microsoft.com/office/drawing/2014/main" id="{0BFEB924-E108-43F6-8915-DF780A623D28}"/>
-              </a:ext>
-            </a:extLst>
-          </p:cNvPr>
-          <p:cNvSpPr>
-            <a:spLocks xmlns:a="http://schemas.openxmlformats.org/drawingml/2006/main" noGrp="1"/>
-          </p:cNvSpPr>
-          <p:nvPr/>
-        </p:nvSpPr>
-        <p:spPr>
-          <a:xfrm xmlns:a="http://schemas.openxmlformats.org/drawingml/2006/main">
-            <a:off x="609600" y="1809750"/>
-            <a:ext cx="9525000" cy="762000"/>
+                <a16:creationId xmlns:a16="http://schemas.microsoft.com/office/drawing/2014/main" id="{38259E0F-6369-4B66-8B23-76C9EB6C8909}"/>
+              </a:ext>
+            </a:extLst>
+          </p:cNvPr>
+          <p:cNvSpPr>
+            <a:spLocks xmlns:a="http://schemas.openxmlformats.org/drawingml/2006/main" noGrp="1"/>
+          </p:cNvSpPr>
+          <p:nvPr/>
+        </p:nvSpPr>
+        <p:spPr>
+          <a:xfrm xmlns:a="http://schemas.openxmlformats.org/drawingml/2006/main">
+            <a:off x="609600" y="1695450"/>
+            <a:ext cx="8572500" cy="361950"/>
           </a:xfrm>
           <a:prstGeom xmlns:a="http://schemas.openxmlformats.org/drawingml/2006/main" prst="rect">
             <a:avLst/>
@@ -6054,19 +8341,20 @@
           <a:lstStyle xmlns:a="http://schemas.openxmlformats.org/drawingml/2006/main"/>
           <a:p xmlns:a="http://schemas.openxmlformats.org/drawingml/2006/main">
             <a:pPr>
-              <a:defRPr sz="2400" b="1">
-                <a:solidFill>
-                  <a:srgbClr val="111827"/>
-                </a:solidFill>
-              </a:defRPr>
-            </a:pPr>
-            <a:r>
-              <a:rPr sz="2400" b="1">
-                <a:solidFill>
-                  <a:srgbClr val="111827"/>
-                </a:solidFill>
-              </a:rPr>
-              <a:t>今天不是把工具玩過一次，而是留下可重複使用的流程。</a:t>
+              <a:buNone/>
+              <a:defRPr sz="2025" b="1">
+                <a:solidFill>
+                  <a:srgbClr val="111827"/>
+                </a:solidFill>
+              </a:defRPr>
+            </a:pPr>
+            <a:r>
+              <a:rPr sz="2025" b="1">
+                <a:solidFill>
+                  <a:srgbClr val="111827"/>
+                </a:solidFill>
+              </a:rPr>
+              <a:t>不要只在自己的編輯器裡成功：</a:t>
             </a:r>
           </a:p>
         </p:txBody>
@@ -6076,77 +8364,29 @@
           <p:cNvPr id="6" name="">
             <a:extLst xmlns:a="http://schemas.openxmlformats.org/drawingml/2006/main">
               <a:ext uri="{FF2B5EF4-FFF2-40B4-BE49-F238E27FC236}">
-                <a16:creationId xmlns:a16="http://schemas.microsoft.com/office/drawing/2014/main" id="{39768116-9286-4FFB-8A54-A456797C2797}"/>
-              </a:ext>
-            </a:extLst>
-          </p:cNvPr>
-          <p:cNvSpPr>
-            <a:spLocks xmlns:a="http://schemas.openxmlformats.org/drawingml/2006/main" noGrp="1"/>
-          </p:cNvSpPr>
-          <p:nvPr/>
-        </p:nvSpPr>
-        <p:spPr>
-          <a:xfrm xmlns:a="http://schemas.openxmlformats.org/drawingml/2006/main">
-            <a:off x="647700" y="3429000"/>
-            <a:ext cx="8572500" cy="476250"/>
-          </a:xfrm>
-          <a:prstGeom xmlns:a="http://schemas.openxmlformats.org/drawingml/2006/main" prst="rect">
-            <a:avLst/>
-          </a:prstGeom>
-          <a:noFill xmlns:a="http://schemas.openxmlformats.org/drawingml/2006/main"/>
-          <a:ln xmlns:a="http://schemas.openxmlformats.org/drawingml/2006/main" w="0">
-            <a:noFill/>
-            <a:prstDash val="solid"/>
-          </a:ln>
-        </p:spPr>
-        <p:txBody>
-          <a:bodyPr xmlns:a="http://schemas.openxmlformats.org/drawingml/2006/main"/>
-          <a:lstStyle xmlns:a="http://schemas.openxmlformats.org/drawingml/2006/main"/>
-          <a:p xmlns:a="http://schemas.openxmlformats.org/drawingml/2006/main">
-            <a:pPr>
-              <a:defRPr sz="1950" b="1">
-                <a:solidFill>
-                  <a:srgbClr val="3D8DFF"/>
-                </a:solidFill>
-              </a:defRPr>
-            </a:pPr>
-            <a:r>
-              <a:rPr sz="1950" b="1">
-                <a:solidFill>
-                  <a:srgbClr val="3D8DFF"/>
-                </a:solidFill>
-              </a:rPr>
-              <a:t>下一步：把成果放進你的 AI 備課工具箱。</a:t>
-            </a:r>
-          </a:p>
-        </p:txBody>
-      </p:sp>
-      <p:sp>
-        <p:nvSpPr>
-          <p:cNvPr id="7" name="">
-            <a:extLst xmlns:a="http://schemas.openxmlformats.org/drawingml/2006/main">
-              <a:ext uri="{FF2B5EF4-FFF2-40B4-BE49-F238E27FC236}">
-                <a16:creationId xmlns:a16="http://schemas.microsoft.com/office/drawing/2014/main" id="{6B9237D0-3757-469C-B343-975461C6ACF2}"/>
-              </a:ext>
-            </a:extLst>
-          </p:cNvPr>
-          <p:cNvSpPr>
-            <a:spLocks xmlns:a="http://schemas.openxmlformats.org/drawingml/2006/main" noGrp="1"/>
-          </p:cNvSpPr>
-          <p:nvPr/>
-        </p:nvSpPr>
-        <p:spPr>
-          <a:xfrm xmlns:a="http://schemas.openxmlformats.org/drawingml/2006/main">
-            <a:off x="8763000" y="1905000"/>
-            <a:ext cx="2095500" cy="2095500"/>
+                <a16:creationId xmlns:a16="http://schemas.microsoft.com/office/drawing/2014/main" id="{B7780C3C-5636-4699-8EDA-E1876269132D}"/>
+              </a:ext>
+            </a:extLst>
+          </p:cNvPr>
+          <p:cNvSpPr>
+            <a:spLocks xmlns:a="http://schemas.openxmlformats.org/drawingml/2006/main" noGrp="1"/>
+          </p:cNvSpPr>
+          <p:nvPr/>
+        </p:nvSpPr>
+        <p:spPr>
+          <a:xfrm xmlns:a="http://schemas.openxmlformats.org/drawingml/2006/main">
+            <a:off x="609600" y="2381250"/>
+            <a:ext cx="3048000" cy="857250"/>
           </a:xfrm>
           <a:prstGeom xmlns:a="http://schemas.openxmlformats.org/drawingml/2006/main" prst="roundRect">
             <a:avLst>
-              <a:gd name="adj" fmla="val 3636"/>
+              <a:gd name="adj" fmla="val 8889"/>
             </a:avLst>
           </a:prstGeom>
           <a:solidFill xmlns:a="http://schemas.openxmlformats.org/drawingml/2006/main">
-            <a:srgbClr val="3D8DFF"/>
+            <a:srgbClr val="3D8DFF">
+              <a:alpha val="13333"/>
+            </a:srgbClr>
           </a:solidFill>
           <a:ln xmlns:a="http://schemas.openxmlformats.org/drawingml/2006/main" w="9525">
             <a:solidFill>
@@ -6158,50 +8398,658 @@
       </p:sp>
       <p:sp>
         <p:nvSpPr>
+          <p:cNvPr id="7" name="">
+            <a:extLst xmlns:a="http://schemas.openxmlformats.org/drawingml/2006/main">
+              <a:ext uri="{FF2B5EF4-FFF2-40B4-BE49-F238E27FC236}">
+                <a16:creationId xmlns:a16="http://schemas.microsoft.com/office/drawing/2014/main" id="{3422DD70-C0F4-4EAD-8E0E-B6ED220FE711}"/>
+              </a:ext>
+            </a:extLst>
+          </p:cNvPr>
+          <p:cNvSpPr>
+            <a:spLocks xmlns:a="http://schemas.openxmlformats.org/drawingml/2006/main" noGrp="1"/>
+          </p:cNvSpPr>
+          <p:nvPr/>
+        </p:nvSpPr>
+        <p:spPr>
+          <a:xfrm xmlns:a="http://schemas.openxmlformats.org/drawingml/2006/main">
+            <a:off x="800100" y="2533650"/>
+            <a:ext cx="952500" cy="209550"/>
+          </a:xfrm>
+          <a:prstGeom xmlns:a="http://schemas.openxmlformats.org/drawingml/2006/main" prst="rect">
+            <a:avLst/>
+          </a:prstGeom>
+          <a:noFill xmlns:a="http://schemas.openxmlformats.org/drawingml/2006/main"/>
+          <a:ln xmlns:a="http://schemas.openxmlformats.org/drawingml/2006/main" w="0">
+            <a:noFill/>
+            <a:prstDash val="solid"/>
+          </a:ln>
+        </p:spPr>
+        <p:txBody>
+          <a:bodyPr xmlns:a="http://schemas.openxmlformats.org/drawingml/2006/main"/>
+          <a:lstStyle xmlns:a="http://schemas.openxmlformats.org/drawingml/2006/main"/>
+          <a:p xmlns:a="http://schemas.openxmlformats.org/drawingml/2006/main">
+            <a:pPr>
+              <a:buNone/>
+              <a:defRPr sz="1050" b="1">
+                <a:solidFill>
+                  <a:srgbClr val="3D8DFF"/>
+                </a:solidFill>
+              </a:defRPr>
+            </a:pPr>
+            <a:r>
+              <a:rPr sz="1050" b="1">
+                <a:solidFill>
+                  <a:srgbClr val="3D8DFF"/>
+                </a:solidFill>
+              </a:rPr>
+              <a:t>STEP 1</a:t>
+            </a:r>
+          </a:p>
+        </p:txBody>
+      </p:sp>
+      <p:sp>
+        <p:nvSpPr>
           <p:cNvPr id="8" name="">
             <a:extLst xmlns:a="http://schemas.openxmlformats.org/drawingml/2006/main">
               <a:ext uri="{FF2B5EF4-FFF2-40B4-BE49-F238E27FC236}">
-                <a16:creationId xmlns:a16="http://schemas.microsoft.com/office/drawing/2014/main" id="{E76A03A2-72FB-43AB-840C-BA0002ED0FEB}"/>
-              </a:ext>
-            </a:extLst>
-          </p:cNvPr>
-          <p:cNvSpPr>
-            <a:spLocks xmlns:a="http://schemas.openxmlformats.org/drawingml/2006/main" noGrp="1"/>
-          </p:cNvSpPr>
-          <p:nvPr/>
-        </p:nvSpPr>
-        <p:spPr>
-          <a:xfrm xmlns:a="http://schemas.openxmlformats.org/drawingml/2006/main">
-            <a:off x="9048750" y="2619375"/>
-            <a:ext cx="1524000" cy="523875"/>
-          </a:xfrm>
-          <a:prstGeom xmlns:a="http://schemas.openxmlformats.org/drawingml/2006/main" prst="rect">
-            <a:avLst/>
-          </a:prstGeom>
-          <a:noFill xmlns:a="http://schemas.openxmlformats.org/drawingml/2006/main"/>
-          <a:ln xmlns:a="http://schemas.openxmlformats.org/drawingml/2006/main" w="0">
-            <a:noFill/>
-            <a:prstDash val="solid"/>
-          </a:ln>
-        </p:spPr>
-        <p:txBody>
-          <a:bodyPr xmlns:a="http://schemas.openxmlformats.org/drawingml/2006/main"/>
-          <a:lstStyle xmlns:a="http://schemas.openxmlformats.org/drawingml/2006/main"/>
-          <a:p xmlns:a="http://schemas.openxmlformats.org/drawingml/2006/main">
-            <a:pPr algn="ctr">
-              <a:defRPr sz="3300" b="1">
-                <a:solidFill>
-                  <a:srgbClr val="FFFFFF"/>
-                </a:solidFill>
-              </a:defRPr>
-            </a:pPr>
-            <a:r>
-              <a:rPr sz="3300" b="1">
-                <a:solidFill>
-                  <a:srgbClr val="FFFFFF"/>
-                </a:solidFill>
-              </a:rPr>
-              <a:t>GO</a:t>
+                <a16:creationId xmlns:a16="http://schemas.microsoft.com/office/drawing/2014/main" id="{6349732E-F895-4D7E-B7A8-EB40B70F88B8}"/>
+              </a:ext>
+            </a:extLst>
+          </p:cNvPr>
+          <p:cNvSpPr>
+            <a:spLocks xmlns:a="http://schemas.openxmlformats.org/drawingml/2006/main" noGrp="1"/>
+          </p:cNvSpPr>
+          <p:nvPr/>
+        </p:nvSpPr>
+        <p:spPr>
+          <a:xfrm xmlns:a="http://schemas.openxmlformats.org/drawingml/2006/main">
+            <a:off x="800100" y="2819400"/>
+            <a:ext cx="2667000" cy="285750"/>
+          </a:xfrm>
+          <a:prstGeom xmlns:a="http://schemas.openxmlformats.org/drawingml/2006/main" prst="rect">
+            <a:avLst/>
+          </a:prstGeom>
+          <a:noFill xmlns:a="http://schemas.openxmlformats.org/drawingml/2006/main"/>
+          <a:ln xmlns:a="http://schemas.openxmlformats.org/drawingml/2006/main" w="0">
+            <a:noFill/>
+            <a:prstDash val="solid"/>
+          </a:ln>
+        </p:spPr>
+        <p:txBody>
+          <a:bodyPr xmlns:a="http://schemas.openxmlformats.org/drawingml/2006/main"/>
+          <a:lstStyle xmlns:a="http://schemas.openxmlformats.org/drawingml/2006/main"/>
+          <a:p xmlns:a="http://schemas.openxmlformats.org/drawingml/2006/main">
+            <a:pPr>
+              <a:buNone/>
+              <a:defRPr sz="1575" b="1">
+                <a:solidFill>
+                  <a:srgbClr val="111827"/>
+                </a:solidFill>
+              </a:defRPr>
+            </a:pPr>
+            <a:r>
+              <a:rPr sz="1575" b="1">
+                <a:solidFill>
+                  <a:srgbClr val="111827"/>
+                </a:solidFill>
+              </a:rPr>
+              <a:t>儲存程式</a:t>
+            </a:r>
+          </a:p>
+        </p:txBody>
+      </p:sp>
+      <p:sp>
+        <p:nvSpPr>
+          <p:cNvPr id="9" name="">
+            <a:extLst xmlns:a="http://schemas.openxmlformats.org/drawingml/2006/main">
+              <a:ext uri="{FF2B5EF4-FFF2-40B4-BE49-F238E27FC236}">
+                <a16:creationId xmlns:a16="http://schemas.microsoft.com/office/drawing/2014/main" id="{F7C7DB6D-BCBF-45F6-AFB6-B0D24125C5CF}"/>
+              </a:ext>
+            </a:extLst>
+          </p:cNvPr>
+          <p:cNvSpPr>
+            <a:spLocks xmlns:a="http://schemas.openxmlformats.org/drawingml/2006/main" noGrp="1"/>
+          </p:cNvSpPr>
+          <p:nvPr/>
+        </p:nvSpPr>
+        <p:spPr>
+          <a:xfrm xmlns:a="http://schemas.openxmlformats.org/drawingml/2006/main">
+            <a:off x="4229100" y="2381250"/>
+            <a:ext cx="3048000" cy="857250"/>
+          </a:xfrm>
+          <a:prstGeom xmlns:a="http://schemas.openxmlformats.org/drawingml/2006/main" prst="roundRect">
+            <a:avLst>
+              <a:gd name="adj" fmla="val 8889"/>
+            </a:avLst>
+          </a:prstGeom>
+          <a:solidFill xmlns:a="http://schemas.openxmlformats.org/drawingml/2006/main">
+            <a:srgbClr val="E3A62F">
+              <a:alpha val="20000"/>
+            </a:srgbClr>
+          </a:solidFill>
+          <a:ln xmlns:a="http://schemas.openxmlformats.org/drawingml/2006/main" w="9525">
+            <a:solidFill>
+              <a:srgbClr val="E3A62F"/>
+            </a:solidFill>
+            <a:prstDash val="solid"/>
+          </a:ln>
+        </p:spPr>
+      </p:sp>
+      <p:sp>
+        <p:nvSpPr>
+          <p:cNvPr id="10" name="">
+            <a:extLst xmlns:a="http://schemas.openxmlformats.org/drawingml/2006/main">
+              <a:ext uri="{FF2B5EF4-FFF2-40B4-BE49-F238E27FC236}">
+                <a16:creationId xmlns:a16="http://schemas.microsoft.com/office/drawing/2014/main" id="{859EF4A8-2025-4451-847D-D93D6D909468}"/>
+              </a:ext>
+            </a:extLst>
+          </p:cNvPr>
+          <p:cNvSpPr>
+            <a:spLocks xmlns:a="http://schemas.openxmlformats.org/drawingml/2006/main" noGrp="1"/>
+          </p:cNvSpPr>
+          <p:nvPr/>
+        </p:nvSpPr>
+        <p:spPr>
+          <a:xfrm xmlns:a="http://schemas.openxmlformats.org/drawingml/2006/main">
+            <a:off x="4419600" y="2533650"/>
+            <a:ext cx="952500" cy="209550"/>
+          </a:xfrm>
+          <a:prstGeom xmlns:a="http://schemas.openxmlformats.org/drawingml/2006/main" prst="rect">
+            <a:avLst/>
+          </a:prstGeom>
+          <a:noFill xmlns:a="http://schemas.openxmlformats.org/drawingml/2006/main"/>
+          <a:ln xmlns:a="http://schemas.openxmlformats.org/drawingml/2006/main" w="0">
+            <a:noFill/>
+            <a:prstDash val="solid"/>
+          </a:ln>
+        </p:spPr>
+        <p:txBody>
+          <a:bodyPr xmlns:a="http://schemas.openxmlformats.org/drawingml/2006/main"/>
+          <a:lstStyle xmlns:a="http://schemas.openxmlformats.org/drawingml/2006/main"/>
+          <a:p xmlns:a="http://schemas.openxmlformats.org/drawingml/2006/main">
+            <a:pPr>
+              <a:buNone/>
+              <a:defRPr sz="1050" b="1">
+                <a:solidFill>
+                  <a:srgbClr val="E3A62F"/>
+                </a:solidFill>
+              </a:defRPr>
+            </a:pPr>
+            <a:r>
+              <a:rPr sz="1050" b="1">
+                <a:solidFill>
+                  <a:srgbClr val="E3A62F"/>
+                </a:solidFill>
+              </a:rPr>
+              <a:t>STEP 2</a:t>
+            </a:r>
+          </a:p>
+        </p:txBody>
+      </p:sp>
+      <p:sp>
+        <p:nvSpPr>
+          <p:cNvPr id="11" name="">
+            <a:extLst xmlns:a="http://schemas.openxmlformats.org/drawingml/2006/main">
+              <a:ext uri="{FF2B5EF4-FFF2-40B4-BE49-F238E27FC236}">
+                <a16:creationId xmlns:a16="http://schemas.microsoft.com/office/drawing/2014/main" id="{A648CC2A-E84D-4A27-83BC-8A4FBD25FD70}"/>
+              </a:ext>
+            </a:extLst>
+          </p:cNvPr>
+          <p:cNvSpPr>
+            <a:spLocks xmlns:a="http://schemas.openxmlformats.org/drawingml/2006/main" noGrp="1"/>
+          </p:cNvSpPr>
+          <p:nvPr/>
+        </p:nvSpPr>
+        <p:spPr>
+          <a:xfrm xmlns:a="http://schemas.openxmlformats.org/drawingml/2006/main">
+            <a:off x="4419600" y="2819400"/>
+            <a:ext cx="2667000" cy="285750"/>
+          </a:xfrm>
+          <a:prstGeom xmlns:a="http://schemas.openxmlformats.org/drawingml/2006/main" prst="rect">
+            <a:avLst/>
+          </a:prstGeom>
+          <a:noFill xmlns:a="http://schemas.openxmlformats.org/drawingml/2006/main"/>
+          <a:ln xmlns:a="http://schemas.openxmlformats.org/drawingml/2006/main" w="0">
+            <a:noFill/>
+            <a:prstDash val="solid"/>
+          </a:ln>
+        </p:spPr>
+        <p:txBody>
+          <a:bodyPr xmlns:a="http://schemas.openxmlformats.org/drawingml/2006/main"/>
+          <a:lstStyle xmlns:a="http://schemas.openxmlformats.org/drawingml/2006/main"/>
+          <a:p xmlns:a="http://schemas.openxmlformats.org/drawingml/2006/main">
+            <a:pPr>
+              <a:buNone/>
+              <a:defRPr sz="1575" b="1">
+                <a:solidFill>
+                  <a:srgbClr val="111827"/>
+                </a:solidFill>
+              </a:defRPr>
+            </a:pPr>
+            <a:r>
+              <a:rPr sz="1575" b="1">
+                <a:solidFill>
+                  <a:srgbClr val="111827"/>
+                </a:solidFill>
+              </a:rPr>
+              <a:t>完成授權</a:t>
+            </a:r>
+          </a:p>
+        </p:txBody>
+      </p:sp>
+      <p:sp>
+        <p:nvSpPr>
+          <p:cNvPr id="12" name="">
+            <a:extLst xmlns:a="http://schemas.openxmlformats.org/drawingml/2006/main">
+              <a:ext uri="{FF2B5EF4-FFF2-40B4-BE49-F238E27FC236}">
+                <a16:creationId xmlns:a16="http://schemas.microsoft.com/office/drawing/2014/main" id="{7B8F03FE-B619-4924-8763-C9419F3D7F88}"/>
+              </a:ext>
+            </a:extLst>
+          </p:cNvPr>
+          <p:cNvSpPr>
+            <a:spLocks xmlns:a="http://schemas.openxmlformats.org/drawingml/2006/main" noGrp="1"/>
+          </p:cNvSpPr>
+          <p:nvPr/>
+        </p:nvSpPr>
+        <p:spPr>
+          <a:xfrm xmlns:a="http://schemas.openxmlformats.org/drawingml/2006/main">
+            <a:off x="7848600" y="2381250"/>
+            <a:ext cx="3048000" cy="857250"/>
+          </a:xfrm>
+          <a:prstGeom xmlns:a="http://schemas.openxmlformats.org/drawingml/2006/main" prst="roundRect">
+            <a:avLst>
+              <a:gd name="adj" fmla="val 8889"/>
+            </a:avLst>
+          </a:prstGeom>
+          <a:solidFill xmlns:a="http://schemas.openxmlformats.org/drawingml/2006/main">
+            <a:srgbClr val="3D8DFF">
+              <a:alpha val="13333"/>
+            </a:srgbClr>
+          </a:solidFill>
+          <a:ln xmlns:a="http://schemas.openxmlformats.org/drawingml/2006/main" w="9525">
+            <a:solidFill>
+              <a:srgbClr val="3D8DFF"/>
+            </a:solidFill>
+            <a:prstDash val="solid"/>
+          </a:ln>
+        </p:spPr>
+      </p:sp>
+      <p:sp>
+        <p:nvSpPr>
+          <p:cNvPr id="13" name="">
+            <a:extLst xmlns:a="http://schemas.openxmlformats.org/drawingml/2006/main">
+              <a:ext uri="{FF2B5EF4-FFF2-40B4-BE49-F238E27FC236}">
+                <a16:creationId xmlns:a16="http://schemas.microsoft.com/office/drawing/2014/main" id="{E6E5B351-67E9-46E6-9021-B9833086FC49}"/>
+              </a:ext>
+            </a:extLst>
+          </p:cNvPr>
+          <p:cNvSpPr>
+            <a:spLocks xmlns:a="http://schemas.openxmlformats.org/drawingml/2006/main" noGrp="1"/>
+          </p:cNvSpPr>
+          <p:nvPr/>
+        </p:nvSpPr>
+        <p:spPr>
+          <a:xfrm xmlns:a="http://schemas.openxmlformats.org/drawingml/2006/main">
+            <a:off x="8039100" y="2533650"/>
+            <a:ext cx="952500" cy="209550"/>
+          </a:xfrm>
+          <a:prstGeom xmlns:a="http://schemas.openxmlformats.org/drawingml/2006/main" prst="rect">
+            <a:avLst/>
+          </a:prstGeom>
+          <a:noFill xmlns:a="http://schemas.openxmlformats.org/drawingml/2006/main"/>
+          <a:ln xmlns:a="http://schemas.openxmlformats.org/drawingml/2006/main" w="0">
+            <a:noFill/>
+            <a:prstDash val="solid"/>
+          </a:ln>
+        </p:spPr>
+        <p:txBody>
+          <a:bodyPr xmlns:a="http://schemas.openxmlformats.org/drawingml/2006/main"/>
+          <a:lstStyle xmlns:a="http://schemas.openxmlformats.org/drawingml/2006/main"/>
+          <a:p xmlns:a="http://schemas.openxmlformats.org/drawingml/2006/main">
+            <a:pPr>
+              <a:buNone/>
+              <a:defRPr sz="1050" b="1">
+                <a:solidFill>
+                  <a:srgbClr val="3D8DFF"/>
+                </a:solidFill>
+              </a:defRPr>
+            </a:pPr>
+            <a:r>
+              <a:rPr sz="1050" b="1">
+                <a:solidFill>
+                  <a:srgbClr val="3D8DFF"/>
+                </a:solidFill>
+              </a:rPr>
+              <a:t>STEP 3</a:t>
+            </a:r>
+          </a:p>
+        </p:txBody>
+      </p:sp>
+      <p:sp>
+        <p:nvSpPr>
+          <p:cNvPr id="14" name="">
+            <a:extLst xmlns:a="http://schemas.openxmlformats.org/drawingml/2006/main">
+              <a:ext uri="{FF2B5EF4-FFF2-40B4-BE49-F238E27FC236}">
+                <a16:creationId xmlns:a16="http://schemas.microsoft.com/office/drawing/2014/main" id="{83AD6C09-746E-44C2-83AC-24E2A8BF86F8}"/>
+              </a:ext>
+            </a:extLst>
+          </p:cNvPr>
+          <p:cNvSpPr>
+            <a:spLocks xmlns:a="http://schemas.openxmlformats.org/drawingml/2006/main" noGrp="1"/>
+          </p:cNvSpPr>
+          <p:nvPr/>
+        </p:nvSpPr>
+        <p:spPr>
+          <a:xfrm xmlns:a="http://schemas.openxmlformats.org/drawingml/2006/main">
+            <a:off x="8039100" y="2819400"/>
+            <a:ext cx="2667000" cy="285750"/>
+          </a:xfrm>
+          <a:prstGeom xmlns:a="http://schemas.openxmlformats.org/drawingml/2006/main" prst="rect">
+            <a:avLst/>
+          </a:prstGeom>
+          <a:noFill xmlns:a="http://schemas.openxmlformats.org/drawingml/2006/main"/>
+          <a:ln xmlns:a="http://schemas.openxmlformats.org/drawingml/2006/main" w="0">
+            <a:noFill/>
+            <a:prstDash val="solid"/>
+          </a:ln>
+        </p:spPr>
+        <p:txBody>
+          <a:bodyPr xmlns:a="http://schemas.openxmlformats.org/drawingml/2006/main"/>
+          <a:lstStyle xmlns:a="http://schemas.openxmlformats.org/drawingml/2006/main"/>
+          <a:p xmlns:a="http://schemas.openxmlformats.org/drawingml/2006/main">
+            <a:pPr>
+              <a:buNone/>
+              <a:defRPr sz="1575" b="1">
+                <a:solidFill>
+                  <a:srgbClr val="111827"/>
+                </a:solidFill>
+              </a:defRPr>
+            </a:pPr>
+            <a:r>
+              <a:rPr sz="1575" b="1">
+                <a:solidFill>
+                  <a:srgbClr val="111827"/>
+                </a:solidFill>
+              </a:rPr>
+              <a:t>新增部署</a:t>
+            </a:r>
+          </a:p>
+        </p:txBody>
+      </p:sp>
+      <p:sp>
+        <p:nvSpPr>
+          <p:cNvPr id="15" name="">
+            <a:extLst xmlns:a="http://schemas.openxmlformats.org/drawingml/2006/main">
+              <a:ext uri="{FF2B5EF4-FFF2-40B4-BE49-F238E27FC236}">
+                <a16:creationId xmlns:a16="http://schemas.microsoft.com/office/drawing/2014/main" id="{A17DD600-65A5-4EFF-8F0F-88E44D37F287}"/>
+              </a:ext>
+            </a:extLst>
+          </p:cNvPr>
+          <p:cNvSpPr>
+            <a:spLocks xmlns:a="http://schemas.openxmlformats.org/drawingml/2006/main" noGrp="1"/>
+          </p:cNvSpPr>
+          <p:nvPr/>
+        </p:nvSpPr>
+        <p:spPr>
+          <a:xfrm xmlns:a="http://schemas.openxmlformats.org/drawingml/2006/main">
+            <a:off x="609600" y="3762375"/>
+            <a:ext cx="3048000" cy="857250"/>
+          </a:xfrm>
+          <a:prstGeom xmlns:a="http://schemas.openxmlformats.org/drawingml/2006/main" prst="roundRect">
+            <a:avLst>
+              <a:gd name="adj" fmla="val 8889"/>
+            </a:avLst>
+          </a:prstGeom>
+          <a:solidFill xmlns:a="http://schemas.openxmlformats.org/drawingml/2006/main">
+            <a:srgbClr val="E3A62F">
+              <a:alpha val="20000"/>
+            </a:srgbClr>
+          </a:solidFill>
+          <a:ln xmlns:a="http://schemas.openxmlformats.org/drawingml/2006/main" w="9525">
+            <a:solidFill>
+              <a:srgbClr val="E3A62F"/>
+            </a:solidFill>
+            <a:prstDash val="solid"/>
+          </a:ln>
+        </p:spPr>
+      </p:sp>
+      <p:sp>
+        <p:nvSpPr>
+          <p:cNvPr id="16" name="">
+            <a:extLst xmlns:a="http://schemas.openxmlformats.org/drawingml/2006/main">
+              <a:ext uri="{FF2B5EF4-FFF2-40B4-BE49-F238E27FC236}">
+                <a16:creationId xmlns:a16="http://schemas.microsoft.com/office/drawing/2014/main" id="{70340056-1E76-4DB6-8860-AE2572F69973}"/>
+              </a:ext>
+            </a:extLst>
+          </p:cNvPr>
+          <p:cNvSpPr>
+            <a:spLocks xmlns:a="http://schemas.openxmlformats.org/drawingml/2006/main" noGrp="1"/>
+          </p:cNvSpPr>
+          <p:nvPr/>
+        </p:nvSpPr>
+        <p:spPr>
+          <a:xfrm xmlns:a="http://schemas.openxmlformats.org/drawingml/2006/main">
+            <a:off x="800100" y="3914775"/>
+            <a:ext cx="952500" cy="209550"/>
+          </a:xfrm>
+          <a:prstGeom xmlns:a="http://schemas.openxmlformats.org/drawingml/2006/main" prst="rect">
+            <a:avLst/>
+          </a:prstGeom>
+          <a:noFill xmlns:a="http://schemas.openxmlformats.org/drawingml/2006/main"/>
+          <a:ln xmlns:a="http://schemas.openxmlformats.org/drawingml/2006/main" w="0">
+            <a:noFill/>
+            <a:prstDash val="solid"/>
+          </a:ln>
+        </p:spPr>
+        <p:txBody>
+          <a:bodyPr xmlns:a="http://schemas.openxmlformats.org/drawingml/2006/main"/>
+          <a:lstStyle xmlns:a="http://schemas.openxmlformats.org/drawingml/2006/main"/>
+          <a:p xmlns:a="http://schemas.openxmlformats.org/drawingml/2006/main">
+            <a:pPr>
+              <a:buNone/>
+              <a:defRPr sz="1050" b="1">
+                <a:solidFill>
+                  <a:srgbClr val="E3A62F"/>
+                </a:solidFill>
+              </a:defRPr>
+            </a:pPr>
+            <a:r>
+              <a:rPr sz="1050" b="1">
+                <a:solidFill>
+                  <a:srgbClr val="E3A62F"/>
+                </a:solidFill>
+              </a:rPr>
+              <a:t>STEP 4</a:t>
+            </a:r>
+          </a:p>
+        </p:txBody>
+      </p:sp>
+      <p:sp>
+        <p:nvSpPr>
+          <p:cNvPr id="17" name="">
+            <a:extLst xmlns:a="http://schemas.openxmlformats.org/drawingml/2006/main">
+              <a:ext uri="{FF2B5EF4-FFF2-40B4-BE49-F238E27FC236}">
+                <a16:creationId xmlns:a16="http://schemas.microsoft.com/office/drawing/2014/main" id="{67F49854-3052-4925-838E-7860A09C64CC}"/>
+              </a:ext>
+            </a:extLst>
+          </p:cNvPr>
+          <p:cNvSpPr>
+            <a:spLocks xmlns:a="http://schemas.openxmlformats.org/drawingml/2006/main" noGrp="1"/>
+          </p:cNvSpPr>
+          <p:nvPr/>
+        </p:nvSpPr>
+        <p:spPr>
+          <a:xfrm xmlns:a="http://schemas.openxmlformats.org/drawingml/2006/main">
+            <a:off x="800100" y="4200525"/>
+            <a:ext cx="2667000" cy="285750"/>
+          </a:xfrm>
+          <a:prstGeom xmlns:a="http://schemas.openxmlformats.org/drawingml/2006/main" prst="rect">
+            <a:avLst/>
+          </a:prstGeom>
+          <a:noFill xmlns:a="http://schemas.openxmlformats.org/drawingml/2006/main"/>
+          <a:ln xmlns:a="http://schemas.openxmlformats.org/drawingml/2006/main" w="0">
+            <a:noFill/>
+            <a:prstDash val="solid"/>
+          </a:ln>
+        </p:spPr>
+        <p:txBody>
+          <a:bodyPr xmlns:a="http://schemas.openxmlformats.org/drawingml/2006/main"/>
+          <a:lstStyle xmlns:a="http://schemas.openxmlformats.org/drawingml/2006/main"/>
+          <a:p xmlns:a="http://schemas.openxmlformats.org/drawingml/2006/main">
+            <a:pPr>
+              <a:buNone/>
+              <a:defRPr sz="1575" b="1">
+                <a:solidFill>
+                  <a:srgbClr val="111827"/>
+                </a:solidFill>
+              </a:defRPr>
+            </a:pPr>
+            <a:r>
+              <a:rPr sz="1575" b="1">
+                <a:solidFill>
+                  <a:srgbClr val="111827"/>
+                </a:solidFill>
+              </a:rPr>
+              <a:t>設定 Web App 權限</a:t>
+            </a:r>
+          </a:p>
+        </p:txBody>
+      </p:sp>
+      <p:sp>
+        <p:nvSpPr>
+          <p:cNvPr id="18" name="">
+            <a:extLst xmlns:a="http://schemas.openxmlformats.org/drawingml/2006/main">
+              <a:ext uri="{FF2B5EF4-FFF2-40B4-BE49-F238E27FC236}">
+                <a16:creationId xmlns:a16="http://schemas.microsoft.com/office/drawing/2014/main" id="{2E639B1A-D079-4CD4-B0DD-060015F88D50}"/>
+              </a:ext>
+            </a:extLst>
+          </p:cNvPr>
+          <p:cNvSpPr>
+            <a:spLocks xmlns:a="http://schemas.openxmlformats.org/drawingml/2006/main" noGrp="1"/>
+          </p:cNvSpPr>
+          <p:nvPr/>
+        </p:nvSpPr>
+        <p:spPr>
+          <a:xfrm xmlns:a="http://schemas.openxmlformats.org/drawingml/2006/main">
+            <a:off x="4229100" y="3762375"/>
+            <a:ext cx="3048000" cy="857250"/>
+          </a:xfrm>
+          <a:prstGeom xmlns:a="http://schemas.openxmlformats.org/drawingml/2006/main" prst="roundRect">
+            <a:avLst>
+              <a:gd name="adj" fmla="val 8889"/>
+            </a:avLst>
+          </a:prstGeom>
+          <a:solidFill xmlns:a="http://schemas.openxmlformats.org/drawingml/2006/main">
+            <a:srgbClr val="3D8DFF">
+              <a:alpha val="13333"/>
+            </a:srgbClr>
+          </a:solidFill>
+          <a:ln xmlns:a="http://schemas.openxmlformats.org/drawingml/2006/main" w="9525">
+            <a:solidFill>
+              <a:srgbClr val="3D8DFF"/>
+            </a:solidFill>
+            <a:prstDash val="solid"/>
+          </a:ln>
+        </p:spPr>
+      </p:sp>
+      <p:sp>
+        <p:nvSpPr>
+          <p:cNvPr id="19" name="">
+            <a:extLst xmlns:a="http://schemas.openxmlformats.org/drawingml/2006/main">
+              <a:ext uri="{FF2B5EF4-FFF2-40B4-BE49-F238E27FC236}">
+                <a16:creationId xmlns:a16="http://schemas.microsoft.com/office/drawing/2014/main" id="{BFCB4A6A-B003-4CE1-BC8F-B953C79BF08F}"/>
+              </a:ext>
+            </a:extLst>
+          </p:cNvPr>
+          <p:cNvSpPr>
+            <a:spLocks xmlns:a="http://schemas.openxmlformats.org/drawingml/2006/main" noGrp="1"/>
+          </p:cNvSpPr>
+          <p:nvPr/>
+        </p:nvSpPr>
+        <p:spPr>
+          <a:xfrm xmlns:a="http://schemas.openxmlformats.org/drawingml/2006/main">
+            <a:off x="4419600" y="3914775"/>
+            <a:ext cx="952500" cy="209550"/>
+          </a:xfrm>
+          <a:prstGeom xmlns:a="http://schemas.openxmlformats.org/drawingml/2006/main" prst="rect">
+            <a:avLst/>
+          </a:prstGeom>
+          <a:noFill xmlns:a="http://schemas.openxmlformats.org/drawingml/2006/main"/>
+          <a:ln xmlns:a="http://schemas.openxmlformats.org/drawingml/2006/main" w="0">
+            <a:noFill/>
+            <a:prstDash val="solid"/>
+          </a:ln>
+        </p:spPr>
+        <p:txBody>
+          <a:bodyPr xmlns:a="http://schemas.openxmlformats.org/drawingml/2006/main"/>
+          <a:lstStyle xmlns:a="http://schemas.openxmlformats.org/drawingml/2006/main"/>
+          <a:p xmlns:a="http://schemas.openxmlformats.org/drawingml/2006/main">
+            <a:pPr>
+              <a:buNone/>
+              <a:defRPr sz="1050" b="1">
+                <a:solidFill>
+                  <a:srgbClr val="3D8DFF"/>
+                </a:solidFill>
+              </a:defRPr>
+            </a:pPr>
+            <a:r>
+              <a:rPr sz="1050" b="1">
+                <a:solidFill>
+                  <a:srgbClr val="3D8DFF"/>
+                </a:solidFill>
+              </a:rPr>
+              <a:t>STEP 5</a:t>
+            </a:r>
+          </a:p>
+        </p:txBody>
+      </p:sp>
+      <p:sp>
+        <p:nvSpPr>
+          <p:cNvPr id="20" name="">
+            <a:extLst xmlns:a="http://schemas.openxmlformats.org/drawingml/2006/main">
+              <a:ext uri="{FF2B5EF4-FFF2-40B4-BE49-F238E27FC236}">
+                <a16:creationId xmlns:a16="http://schemas.microsoft.com/office/drawing/2014/main" id="{04FFBD56-DCB1-4F51-B06D-D4D25E9DD7ED}"/>
+              </a:ext>
+            </a:extLst>
+          </p:cNvPr>
+          <p:cNvSpPr>
+            <a:spLocks xmlns:a="http://schemas.openxmlformats.org/drawingml/2006/main" noGrp="1"/>
+          </p:cNvSpPr>
+          <p:nvPr/>
+        </p:nvSpPr>
+        <p:spPr>
+          <a:xfrm xmlns:a="http://schemas.openxmlformats.org/drawingml/2006/main">
+            <a:off x="4419600" y="4200525"/>
+            <a:ext cx="2667000" cy="285750"/>
+          </a:xfrm>
+          <a:prstGeom xmlns:a="http://schemas.openxmlformats.org/drawingml/2006/main" prst="rect">
+            <a:avLst/>
+          </a:prstGeom>
+          <a:noFill xmlns:a="http://schemas.openxmlformats.org/drawingml/2006/main"/>
+          <a:ln xmlns:a="http://schemas.openxmlformats.org/drawingml/2006/main" w="0">
+            <a:noFill/>
+            <a:prstDash val="solid"/>
+          </a:ln>
+        </p:spPr>
+        <p:txBody>
+          <a:bodyPr xmlns:a="http://schemas.openxmlformats.org/drawingml/2006/main"/>
+          <a:lstStyle xmlns:a="http://schemas.openxmlformats.org/drawingml/2006/main"/>
+          <a:p xmlns:a="http://schemas.openxmlformats.org/drawingml/2006/main">
+            <a:pPr>
+              <a:buNone/>
+              <a:defRPr sz="1575" b="1">
+                <a:solidFill>
+                  <a:srgbClr val="111827"/>
+                </a:solidFill>
+              </a:defRPr>
+            </a:pPr>
+            <a:r>
+              <a:rPr sz="1575" b="1">
+                <a:solidFill>
+                  <a:srgbClr val="111827"/>
+                </a:solidFill>
+              </a:rPr>
+              <a:t>另一帳號測試</a:t>
             </a:r>
           </a:p>
         </p:txBody>
@@ -6209,7 +9057,686 @@
     </p:spTree>
     <p:extLst>
       <p:ext uri="{BB962C8B-B14F-4D97-AF65-F5344CB8AC3E}">
-        <p14:creationId xmlns:p14="http://schemas.microsoft.com/office/powerpoint/2010/main" val="630496395"/>
+        <p14:creationId xmlns:p14="http://schemas.microsoft.com/office/powerpoint/2010/main" val="1363997945"/>
+      </p:ext>
+    </p:extLst>
+  </p:cSld>
+</p:sld>
+</file>
+
+<file path=ppt/slides/slide9.xml><?xml version="1.0" encoding="utf-8"?>
+<p:sld xmlns:p="http://schemas.openxmlformats.org/presentationml/2006/main">
+  <p:cSld>
+    <p:bg>
+      <p:bgPr>
+        <a:solidFill xmlns:a="http://schemas.openxmlformats.org/drawingml/2006/main">
+          <a:srgbClr val="FFFFFF"/>
+        </a:solidFill>
+      </p:bgPr>
+    </p:bg>
+    <p:spTree>
+      <p:nvGrpSpPr>
+        <p:cNvPr id="1" name=""/>
+        <p:cNvGrpSpPr/>
+        <p:nvPr/>
+      </p:nvGrpSpPr>
+      <p:grpSpPr>
+        <a:xfrm xmlns:a="http://schemas.openxmlformats.org/drawingml/2006/main"/>
+      </p:grpSpPr>
+      <p:sp>
+        <p:nvSpPr>
+          <p:cNvPr id="15" name="">
+            <a:extLst xmlns:a="http://schemas.openxmlformats.org/drawingml/2006/main">
+              <a:ext uri="{FF2B5EF4-FFF2-40B4-BE49-F238E27FC236}">
+                <a16:creationId xmlns:a16="http://schemas.microsoft.com/office/drawing/2014/main" id="{A4C043E3-EE81-4951-83C6-0827CDA54736}"/>
+              </a:ext>
+            </a:extLst>
+          </p:cNvPr>
+          <p:cNvSpPr>
+            <a:spLocks xmlns:a="http://schemas.openxmlformats.org/drawingml/2006/main" noGrp="1"/>
+          </p:cNvSpPr>
+          <p:nvPr/>
+        </p:nvSpPr>
+        <p:spPr>
+          <a:xfrm xmlns:a="http://schemas.openxmlformats.org/drawingml/2006/main">
+            <a:off x="609600" y="323850"/>
+            <a:ext cx="5715000" cy="228600"/>
+          </a:xfrm>
+          <a:prstGeom xmlns:a="http://schemas.openxmlformats.org/drawingml/2006/main" prst="rect">
+            <a:avLst/>
+          </a:prstGeom>
+          <a:noFill xmlns:a="http://schemas.openxmlformats.org/drawingml/2006/main"/>
+          <a:ln xmlns:a="http://schemas.openxmlformats.org/drawingml/2006/main" w="0">
+            <a:noFill/>
+            <a:prstDash val="solid"/>
+          </a:ln>
+        </p:spPr>
+        <p:txBody>
+          <a:bodyPr xmlns:a="http://schemas.openxmlformats.org/drawingml/2006/main"/>
+          <a:lstStyle xmlns:a="http://schemas.openxmlformats.org/drawingml/2006/main"/>
+          <a:p xmlns:a="http://schemas.openxmlformats.org/drawingml/2006/main">
+            <a:pPr>
+              <a:buNone/>
+              <a:defRPr sz="975" b="1">
+                <a:solidFill>
+                  <a:srgbClr val="3D8DFF"/>
+                </a:solidFill>
+              </a:defRPr>
+            </a:pPr>
+            <a:r>
+              <a:rPr sz="975" b="1">
+                <a:solidFill>
+                  <a:srgbClr val="3D8DFF"/>
+                </a:solidFill>
+              </a:rPr>
+              <a:t>AI 工具實戰進階班 / 第 03 堂</a:t>
+            </a:r>
+          </a:p>
+        </p:txBody>
+      </p:sp>
+      <p:sp>
+        <p:nvSpPr>
+          <p:cNvPr id="2" name="">
+            <a:extLst xmlns:a="http://schemas.openxmlformats.org/drawingml/2006/main">
+              <a:ext uri="{FF2B5EF4-FFF2-40B4-BE49-F238E27FC236}">
+                <a16:creationId xmlns:a16="http://schemas.microsoft.com/office/drawing/2014/main" id="{69C577AA-EE54-4BD5-A0E7-C7464CDA9866}"/>
+              </a:ext>
+            </a:extLst>
+          </p:cNvPr>
+          <p:cNvSpPr>
+            <a:spLocks xmlns:a="http://schemas.openxmlformats.org/drawingml/2006/main" noGrp="1"/>
+          </p:cNvSpPr>
+          <p:nvPr/>
+        </p:nvSpPr>
+        <p:spPr>
+          <a:xfrm xmlns:a="http://schemas.openxmlformats.org/drawingml/2006/main">
+            <a:off x="609600" y="647700"/>
+            <a:ext cx="10668000" cy="533400"/>
+          </a:xfrm>
+          <a:prstGeom xmlns:a="http://schemas.openxmlformats.org/drawingml/2006/main" prst="rect">
+            <a:avLst/>
+          </a:prstGeom>
+          <a:noFill xmlns:a="http://schemas.openxmlformats.org/drawingml/2006/main"/>
+          <a:ln xmlns:a="http://schemas.openxmlformats.org/drawingml/2006/main" w="0">
+            <a:noFill/>
+            <a:prstDash val="solid"/>
+          </a:ln>
+        </p:spPr>
+        <p:txBody>
+          <a:bodyPr xmlns:a="http://schemas.openxmlformats.org/drawingml/2006/main"/>
+          <a:lstStyle xmlns:a="http://schemas.openxmlformats.org/drawingml/2006/main"/>
+          <a:p xmlns:a="http://schemas.openxmlformats.org/drawingml/2006/main">
+            <a:pPr>
+              <a:buNone/>
+              <a:defRPr sz="2700" b="1">
+                <a:solidFill>
+                  <a:srgbClr val="111827"/>
+                </a:solidFill>
+              </a:defRPr>
+            </a:pPr>
+            <a:r>
+              <a:rPr sz="2700" b="1">
+                <a:solidFill>
+                  <a:srgbClr val="111827"/>
+                </a:solidFill>
+              </a:rPr>
+              <a:t>今天走哪一條？</a:t>
+            </a:r>
+          </a:p>
+        </p:txBody>
+      </p:sp>
+      <p:sp>
+        <p:nvSpPr>
+          <p:cNvPr id="3" name="">
+            <a:extLst xmlns:a="http://schemas.openxmlformats.org/drawingml/2006/main">
+              <a:ext uri="{FF2B5EF4-FFF2-40B4-BE49-F238E27FC236}">
+                <a16:creationId xmlns:a16="http://schemas.microsoft.com/office/drawing/2014/main" id="{F7C9993B-634D-4EE4-B1A7-4ED3F1E82F2C}"/>
+              </a:ext>
+            </a:extLst>
+          </p:cNvPr>
+          <p:cNvSpPr>
+            <a:spLocks xmlns:a="http://schemas.openxmlformats.org/drawingml/2006/main" noGrp="1"/>
+          </p:cNvSpPr>
+          <p:nvPr/>
+        </p:nvSpPr>
+        <p:spPr>
+          <a:xfrm xmlns:a="http://schemas.openxmlformats.org/drawingml/2006/main">
+            <a:off x="11049000" y="342900"/>
+            <a:ext cx="533400" cy="228600"/>
+          </a:xfrm>
+          <a:prstGeom xmlns:a="http://schemas.openxmlformats.org/drawingml/2006/main" prst="rect">
+            <a:avLst/>
+          </a:prstGeom>
+          <a:noFill xmlns:a="http://schemas.openxmlformats.org/drawingml/2006/main"/>
+          <a:ln xmlns:a="http://schemas.openxmlformats.org/drawingml/2006/main" w="0">
+            <a:noFill/>
+            <a:prstDash val="solid"/>
+          </a:ln>
+        </p:spPr>
+        <p:txBody>
+          <a:bodyPr xmlns:a="http://schemas.openxmlformats.org/drawingml/2006/main"/>
+          <a:lstStyle xmlns:a="http://schemas.openxmlformats.org/drawingml/2006/main"/>
+          <a:p xmlns:a="http://schemas.openxmlformats.org/drawingml/2006/main">
+            <a:pPr algn="r">
+              <a:buNone/>
+              <a:defRPr sz="1050" b="1">
+                <a:solidFill>
+                  <a:srgbClr val="536273"/>
+                </a:solidFill>
+              </a:defRPr>
+            </a:pPr>
+            <a:r>
+              <a:rPr sz="1050" b="1">
+                <a:solidFill>
+                  <a:srgbClr val="536273"/>
+                </a:solidFill>
+              </a:rPr>
+              <a:t>09</a:t>
+            </a:r>
+          </a:p>
+        </p:txBody>
+      </p:sp>
+      <p:sp>
+        <p:nvSpPr>
+          <p:cNvPr id="4" name="">
+            <a:extLst xmlns:a="http://schemas.openxmlformats.org/drawingml/2006/main">
+              <a:ext uri="{FF2B5EF4-FFF2-40B4-BE49-F238E27FC236}">
+                <a16:creationId xmlns:a16="http://schemas.microsoft.com/office/drawing/2014/main" id="{E2E2E8A2-C306-498A-A7B8-B3AE8DB324F1}"/>
+              </a:ext>
+            </a:extLst>
+          </p:cNvPr>
+          <p:cNvSpPr>
+            <a:spLocks xmlns:a="http://schemas.openxmlformats.org/drawingml/2006/main" noGrp="1"/>
+          </p:cNvSpPr>
+          <p:nvPr/>
+        </p:nvSpPr>
+        <p:spPr>
+          <a:xfrm xmlns:a="http://schemas.openxmlformats.org/drawingml/2006/main">
+            <a:off x="609600" y="1314450"/>
+            <a:ext cx="10972800" cy="0"/>
+          </a:xfrm>
+          <a:prstGeom xmlns:a="http://schemas.openxmlformats.org/drawingml/2006/main" prst="line">
+            <a:avLst/>
+          </a:prstGeom>
+          <a:noFill xmlns:a="http://schemas.openxmlformats.org/drawingml/2006/main"/>
+          <a:ln xmlns:a="http://schemas.openxmlformats.org/drawingml/2006/main" w="9525">
+            <a:solidFill>
+              <a:srgbClr val="D7DEE7"/>
+            </a:solidFill>
+            <a:prstDash val="solid"/>
+          </a:ln>
+        </p:spPr>
+      </p:sp>
+      <p:sp>
+        <p:nvSpPr>
+          <p:cNvPr id="5" name="">
+            <a:extLst xmlns:a="http://schemas.openxmlformats.org/drawingml/2006/main">
+              <a:ext uri="{FF2B5EF4-FFF2-40B4-BE49-F238E27FC236}">
+                <a16:creationId xmlns:a16="http://schemas.microsoft.com/office/drawing/2014/main" id="{28371DCF-ABB2-4F5D-9251-432FCEDE865E}"/>
+              </a:ext>
+            </a:extLst>
+          </p:cNvPr>
+          <p:cNvSpPr>
+            <a:spLocks xmlns:a="http://schemas.openxmlformats.org/drawingml/2006/main" noGrp="1"/>
+          </p:cNvSpPr>
+          <p:nvPr/>
+        </p:nvSpPr>
+        <p:spPr>
+          <a:xfrm xmlns:a="http://schemas.openxmlformats.org/drawingml/2006/main">
+            <a:off x="609600" y="1695450"/>
+            <a:ext cx="8572500" cy="361950"/>
+          </a:xfrm>
+          <a:prstGeom xmlns:a="http://schemas.openxmlformats.org/drawingml/2006/main" prst="rect">
+            <a:avLst/>
+          </a:prstGeom>
+          <a:noFill xmlns:a="http://schemas.openxmlformats.org/drawingml/2006/main"/>
+          <a:ln xmlns:a="http://schemas.openxmlformats.org/drawingml/2006/main" w="0">
+            <a:noFill/>
+            <a:prstDash val="solid"/>
+          </a:ln>
+        </p:spPr>
+        <p:txBody>
+          <a:bodyPr xmlns:a="http://schemas.openxmlformats.org/drawingml/2006/main"/>
+          <a:lstStyle xmlns:a="http://schemas.openxmlformats.org/drawingml/2006/main"/>
+          <a:p xmlns:a="http://schemas.openxmlformats.org/drawingml/2006/main">
+            <a:pPr>
+              <a:buNone/>
+              <a:defRPr sz="2025" b="1">
+                <a:solidFill>
+                  <a:srgbClr val="111827"/>
+                </a:solidFill>
+              </a:defRPr>
+            </a:pPr>
+            <a:r>
+              <a:rPr sz="2025" b="1">
+                <a:solidFill>
+                  <a:srgbClr val="111827"/>
+                </a:solidFill>
+              </a:rPr>
+              <a:t>同一個成品，依目前狀態選任務深度：</a:t>
+            </a:r>
+          </a:p>
+        </p:txBody>
+      </p:sp>
+      <p:sp>
+        <p:nvSpPr>
+          <p:cNvPr id="6" name="">
+            <a:extLst xmlns:a="http://schemas.openxmlformats.org/drawingml/2006/main">
+              <a:ext uri="{FF2B5EF4-FFF2-40B4-BE49-F238E27FC236}">
+                <a16:creationId xmlns:a16="http://schemas.microsoft.com/office/drawing/2014/main" id="{021C3157-DBD7-4940-B22D-AF88992DC3E8}"/>
+              </a:ext>
+            </a:extLst>
+          </p:cNvPr>
+          <p:cNvSpPr>
+            <a:spLocks xmlns:a="http://schemas.openxmlformats.org/drawingml/2006/main" noGrp="1"/>
+          </p:cNvSpPr>
+          <p:nvPr/>
+        </p:nvSpPr>
+        <p:spPr>
+          <a:xfrm xmlns:a="http://schemas.openxmlformats.org/drawingml/2006/main">
+            <a:off x="762000" y="2381250"/>
+            <a:ext cx="10287000" cy="666750"/>
+          </a:xfrm>
+          <a:prstGeom xmlns:a="http://schemas.openxmlformats.org/drawingml/2006/main" prst="roundRect">
+            <a:avLst>
+              <a:gd name="adj" fmla="val 11429"/>
+            </a:avLst>
+          </a:prstGeom>
+          <a:solidFill xmlns:a="http://schemas.openxmlformats.org/drawingml/2006/main">
+            <a:srgbClr val="3D8DFF">
+              <a:alpha val="9412"/>
+            </a:srgbClr>
+          </a:solidFill>
+          <a:ln xmlns:a="http://schemas.openxmlformats.org/drawingml/2006/main" w="9525">
+            <a:solidFill>
+              <a:srgbClr val="3D8DFF"/>
+            </a:solidFill>
+            <a:prstDash val="solid"/>
+          </a:ln>
+        </p:spPr>
+      </p:sp>
+      <p:sp>
+        <p:nvSpPr>
+          <p:cNvPr id="7" name="">
+            <a:extLst xmlns:a="http://schemas.openxmlformats.org/drawingml/2006/main">
+              <a:ext uri="{FF2B5EF4-FFF2-40B4-BE49-F238E27FC236}">
+                <a16:creationId xmlns:a16="http://schemas.microsoft.com/office/drawing/2014/main" id="{33F702DD-D314-4283-A22A-76A99A5BA704}"/>
+              </a:ext>
+            </a:extLst>
+          </p:cNvPr>
+          <p:cNvSpPr>
+            <a:spLocks xmlns:a="http://schemas.openxmlformats.org/drawingml/2006/main" noGrp="1"/>
+          </p:cNvSpPr>
+          <p:nvPr/>
+        </p:nvSpPr>
+        <p:spPr>
+          <a:xfrm xmlns:a="http://schemas.openxmlformats.org/drawingml/2006/main">
+            <a:off x="1028700" y="2571750"/>
+            <a:ext cx="523875" cy="266700"/>
+          </a:xfrm>
+          <a:prstGeom xmlns:a="http://schemas.openxmlformats.org/drawingml/2006/main" prst="rect">
+            <a:avLst/>
+          </a:prstGeom>
+          <a:noFill xmlns:a="http://schemas.openxmlformats.org/drawingml/2006/main"/>
+          <a:ln xmlns:a="http://schemas.openxmlformats.org/drawingml/2006/main" w="0">
+            <a:noFill/>
+            <a:prstDash val="solid"/>
+          </a:ln>
+        </p:spPr>
+        <p:txBody>
+          <a:bodyPr xmlns:a="http://schemas.openxmlformats.org/drawingml/2006/main"/>
+          <a:lstStyle xmlns:a="http://schemas.openxmlformats.org/drawingml/2006/main"/>
+          <a:p xmlns:a="http://schemas.openxmlformats.org/drawingml/2006/main">
+            <a:pPr>
+              <a:buNone/>
+              <a:defRPr sz="1575" b="1">
+                <a:solidFill>
+                  <a:srgbClr val="3D8DFF"/>
+                </a:solidFill>
+              </a:defRPr>
+            </a:pPr>
+            <a:r>
+              <a:rPr sz="1575" b="1">
+                <a:solidFill>
+                  <a:srgbClr val="3D8DFF"/>
+                </a:solidFill>
+              </a:rPr>
+              <a:t>01</a:t>
+            </a:r>
+          </a:p>
+        </p:txBody>
+      </p:sp>
+      <p:sp>
+        <p:nvSpPr>
+          <p:cNvPr id="8" name="">
+            <a:extLst xmlns:a="http://schemas.openxmlformats.org/drawingml/2006/main">
+              <a:ext uri="{FF2B5EF4-FFF2-40B4-BE49-F238E27FC236}">
+                <a16:creationId xmlns:a16="http://schemas.microsoft.com/office/drawing/2014/main" id="{DA217730-4651-49C7-9226-1B43ECC357FE}"/>
+              </a:ext>
+            </a:extLst>
+          </p:cNvPr>
+          <p:cNvSpPr>
+            <a:spLocks xmlns:a="http://schemas.openxmlformats.org/drawingml/2006/main" noGrp="1"/>
+          </p:cNvSpPr>
+          <p:nvPr/>
+        </p:nvSpPr>
+        <p:spPr>
+          <a:xfrm xmlns:a="http://schemas.openxmlformats.org/drawingml/2006/main">
+            <a:off x="1809750" y="2552700"/>
+            <a:ext cx="8572500" cy="304800"/>
+          </a:xfrm>
+          <a:prstGeom xmlns:a="http://schemas.openxmlformats.org/drawingml/2006/main" prst="rect">
+            <a:avLst/>
+          </a:prstGeom>
+          <a:noFill xmlns:a="http://schemas.openxmlformats.org/drawingml/2006/main"/>
+          <a:ln xmlns:a="http://schemas.openxmlformats.org/drawingml/2006/main" w="0">
+            <a:noFill/>
+            <a:prstDash val="solid"/>
+          </a:ln>
+        </p:spPr>
+        <p:txBody>
+          <a:bodyPr xmlns:a="http://schemas.openxmlformats.org/drawingml/2006/main"/>
+          <a:lstStyle xmlns:a="http://schemas.openxmlformats.org/drawingml/2006/main"/>
+          <a:p xmlns:a="http://schemas.openxmlformats.org/drawingml/2006/main">
+            <a:pPr>
+              <a:buNone/>
+              <a:defRPr sz="1725" b="1">
+                <a:solidFill>
+                  <a:srgbClr val="111827"/>
+                </a:solidFill>
+              </a:defRPr>
+            </a:pPr>
+            <a:r>
+              <a:rPr sz="1725" b="1">
+                <a:solidFill>
+                  <a:srgbClr val="111827"/>
+                </a:solidFill>
+              </a:rPr>
+              <a:t>救援卡｜試算表收到一列就通關</a:t>
+            </a:r>
+          </a:p>
+        </p:txBody>
+      </p:sp>
+      <p:sp>
+        <p:nvSpPr>
+          <p:cNvPr id="9" name="">
+            <a:extLst xmlns:a="http://schemas.openxmlformats.org/drawingml/2006/main">
+              <a:ext uri="{FF2B5EF4-FFF2-40B4-BE49-F238E27FC236}">
+                <a16:creationId xmlns:a16="http://schemas.microsoft.com/office/drawing/2014/main" id="{B9ED5A78-F3E4-452B-B9B7-DBA523BFF102}"/>
+              </a:ext>
+            </a:extLst>
+          </p:cNvPr>
+          <p:cNvSpPr>
+            <a:spLocks xmlns:a="http://schemas.openxmlformats.org/drawingml/2006/main" noGrp="1"/>
+          </p:cNvSpPr>
+          <p:nvPr/>
+        </p:nvSpPr>
+        <p:spPr>
+          <a:xfrm xmlns:a="http://schemas.openxmlformats.org/drawingml/2006/main">
+            <a:off x="762000" y="3333750"/>
+            <a:ext cx="10287000" cy="666750"/>
+          </a:xfrm>
+          <a:prstGeom xmlns:a="http://schemas.openxmlformats.org/drawingml/2006/main" prst="roundRect">
+            <a:avLst>
+              <a:gd name="adj" fmla="val 11429"/>
+            </a:avLst>
+          </a:prstGeom>
+          <a:solidFill xmlns:a="http://schemas.openxmlformats.org/drawingml/2006/main">
+            <a:srgbClr val="F3F6F8"/>
+          </a:solidFill>
+          <a:ln xmlns:a="http://schemas.openxmlformats.org/drawingml/2006/main" w="9525">
+            <a:solidFill>
+              <a:srgbClr val="D7DEE7"/>
+            </a:solidFill>
+            <a:prstDash val="solid"/>
+          </a:ln>
+        </p:spPr>
+      </p:sp>
+      <p:sp>
+        <p:nvSpPr>
+          <p:cNvPr id="10" name="">
+            <a:extLst xmlns:a="http://schemas.openxmlformats.org/drawingml/2006/main">
+              <a:ext uri="{FF2B5EF4-FFF2-40B4-BE49-F238E27FC236}">
+                <a16:creationId xmlns:a16="http://schemas.microsoft.com/office/drawing/2014/main" id="{AF0ABDEA-CB29-4AD3-97FF-173789A913B7}"/>
+              </a:ext>
+            </a:extLst>
+          </p:cNvPr>
+          <p:cNvSpPr>
+            <a:spLocks xmlns:a="http://schemas.openxmlformats.org/drawingml/2006/main" noGrp="1"/>
+          </p:cNvSpPr>
+          <p:nvPr/>
+        </p:nvSpPr>
+        <p:spPr>
+          <a:xfrm xmlns:a="http://schemas.openxmlformats.org/drawingml/2006/main">
+            <a:off x="1028700" y="3524250"/>
+            <a:ext cx="523875" cy="266700"/>
+          </a:xfrm>
+          <a:prstGeom xmlns:a="http://schemas.openxmlformats.org/drawingml/2006/main" prst="rect">
+            <a:avLst/>
+          </a:prstGeom>
+          <a:noFill xmlns:a="http://schemas.openxmlformats.org/drawingml/2006/main"/>
+          <a:ln xmlns:a="http://schemas.openxmlformats.org/drawingml/2006/main" w="0">
+            <a:noFill/>
+            <a:prstDash val="solid"/>
+          </a:ln>
+        </p:spPr>
+        <p:txBody>
+          <a:bodyPr xmlns:a="http://schemas.openxmlformats.org/drawingml/2006/main"/>
+          <a:lstStyle xmlns:a="http://schemas.openxmlformats.org/drawingml/2006/main"/>
+          <a:p xmlns:a="http://schemas.openxmlformats.org/drawingml/2006/main">
+            <a:pPr>
+              <a:buNone/>
+              <a:defRPr sz="1575" b="1">
+                <a:solidFill>
+                  <a:srgbClr val="3D8DFF"/>
+                </a:solidFill>
+              </a:defRPr>
+            </a:pPr>
+            <a:r>
+              <a:rPr sz="1575" b="1">
+                <a:solidFill>
+                  <a:srgbClr val="3D8DFF"/>
+                </a:solidFill>
+              </a:rPr>
+              <a:t>02</a:t>
+            </a:r>
+          </a:p>
+        </p:txBody>
+      </p:sp>
+      <p:sp>
+        <p:nvSpPr>
+          <p:cNvPr id="11" name="">
+            <a:extLst xmlns:a="http://schemas.openxmlformats.org/drawingml/2006/main">
+              <a:ext uri="{FF2B5EF4-FFF2-40B4-BE49-F238E27FC236}">
+                <a16:creationId xmlns:a16="http://schemas.microsoft.com/office/drawing/2014/main" id="{7E86B52F-F70A-42EB-AFEF-CE15ECB65D0F}"/>
+              </a:ext>
+            </a:extLst>
+          </p:cNvPr>
+          <p:cNvSpPr>
+            <a:spLocks xmlns:a="http://schemas.openxmlformats.org/drawingml/2006/main" noGrp="1"/>
+          </p:cNvSpPr>
+          <p:nvPr/>
+        </p:nvSpPr>
+        <p:spPr>
+          <a:xfrm xmlns:a="http://schemas.openxmlformats.org/drawingml/2006/main">
+            <a:off x="1809750" y="3505200"/>
+            <a:ext cx="8572500" cy="304800"/>
+          </a:xfrm>
+          <a:prstGeom xmlns:a="http://schemas.openxmlformats.org/drawingml/2006/main" prst="rect">
+            <a:avLst/>
+          </a:prstGeom>
+          <a:noFill xmlns:a="http://schemas.openxmlformats.org/drawingml/2006/main"/>
+          <a:ln xmlns:a="http://schemas.openxmlformats.org/drawingml/2006/main" w="0">
+            <a:noFill/>
+            <a:prstDash val="solid"/>
+          </a:ln>
+        </p:spPr>
+        <p:txBody>
+          <a:bodyPr xmlns:a="http://schemas.openxmlformats.org/drawingml/2006/main"/>
+          <a:lstStyle xmlns:a="http://schemas.openxmlformats.org/drawingml/2006/main"/>
+          <a:p xmlns:a="http://schemas.openxmlformats.org/drawingml/2006/main">
+            <a:pPr>
+              <a:buNone/>
+              <a:defRPr sz="1725" b="1">
+                <a:solidFill>
+                  <a:srgbClr val="111827"/>
+                </a:solidFill>
+              </a:defRPr>
+            </a:pPr>
+            <a:r>
+              <a:rPr sz="1725" b="1">
+                <a:solidFill>
+                  <a:srgbClr val="111827"/>
+                </a:solidFill>
+              </a:rPr>
+              <a:t>共同主線｜驗證、狀態與防重複</a:t>
+            </a:r>
+          </a:p>
+        </p:txBody>
+      </p:sp>
+      <p:sp>
+        <p:nvSpPr>
+          <p:cNvPr id="12" name="">
+            <a:extLst xmlns:a="http://schemas.openxmlformats.org/drawingml/2006/main">
+              <a:ext uri="{FF2B5EF4-FFF2-40B4-BE49-F238E27FC236}">
+                <a16:creationId xmlns:a16="http://schemas.microsoft.com/office/drawing/2014/main" id="{9003B62E-20CA-4984-9118-ADE24A392304}"/>
+              </a:ext>
+            </a:extLst>
+          </p:cNvPr>
+          <p:cNvSpPr>
+            <a:spLocks xmlns:a="http://schemas.openxmlformats.org/drawingml/2006/main" noGrp="1"/>
+          </p:cNvSpPr>
+          <p:nvPr/>
+        </p:nvSpPr>
+        <p:spPr>
+          <a:xfrm xmlns:a="http://schemas.openxmlformats.org/drawingml/2006/main">
+            <a:off x="762000" y="4286250"/>
+            <a:ext cx="10287000" cy="666750"/>
+          </a:xfrm>
+          <a:prstGeom xmlns:a="http://schemas.openxmlformats.org/drawingml/2006/main" prst="roundRect">
+            <a:avLst>
+              <a:gd name="adj" fmla="val 11429"/>
+            </a:avLst>
+          </a:prstGeom>
+          <a:solidFill xmlns:a="http://schemas.openxmlformats.org/drawingml/2006/main">
+            <a:srgbClr val="3D8DFF">
+              <a:alpha val="9412"/>
+            </a:srgbClr>
+          </a:solidFill>
+          <a:ln xmlns:a="http://schemas.openxmlformats.org/drawingml/2006/main" w="9525">
+            <a:solidFill>
+              <a:srgbClr val="3D8DFF"/>
+            </a:solidFill>
+            <a:prstDash val="solid"/>
+          </a:ln>
+        </p:spPr>
+      </p:sp>
+      <p:sp>
+        <p:nvSpPr>
+          <p:cNvPr id="13" name="">
+            <a:extLst xmlns:a="http://schemas.openxmlformats.org/drawingml/2006/main">
+              <a:ext uri="{FF2B5EF4-FFF2-40B4-BE49-F238E27FC236}">
+                <a16:creationId xmlns:a16="http://schemas.microsoft.com/office/drawing/2014/main" id="{2E41C2BF-133B-4482-8022-09E15EB88622}"/>
+              </a:ext>
+            </a:extLst>
+          </p:cNvPr>
+          <p:cNvSpPr>
+            <a:spLocks xmlns:a="http://schemas.openxmlformats.org/drawingml/2006/main" noGrp="1"/>
+          </p:cNvSpPr>
+          <p:nvPr/>
+        </p:nvSpPr>
+        <p:spPr>
+          <a:xfrm xmlns:a="http://schemas.openxmlformats.org/drawingml/2006/main">
+            <a:off x="1028700" y="4476750"/>
+            <a:ext cx="523875" cy="266700"/>
+          </a:xfrm>
+          <a:prstGeom xmlns:a="http://schemas.openxmlformats.org/drawingml/2006/main" prst="rect">
+            <a:avLst/>
+          </a:prstGeom>
+          <a:noFill xmlns:a="http://schemas.openxmlformats.org/drawingml/2006/main"/>
+          <a:ln xmlns:a="http://schemas.openxmlformats.org/drawingml/2006/main" w="0">
+            <a:noFill/>
+            <a:prstDash val="solid"/>
+          </a:ln>
+        </p:spPr>
+        <p:txBody>
+          <a:bodyPr xmlns:a="http://schemas.openxmlformats.org/drawingml/2006/main"/>
+          <a:lstStyle xmlns:a="http://schemas.openxmlformats.org/drawingml/2006/main"/>
+          <a:p xmlns:a="http://schemas.openxmlformats.org/drawingml/2006/main">
+            <a:pPr>
+              <a:buNone/>
+              <a:defRPr sz="1575" b="1">
+                <a:solidFill>
+                  <a:srgbClr val="3D8DFF"/>
+                </a:solidFill>
+              </a:defRPr>
+            </a:pPr>
+            <a:r>
+              <a:rPr sz="1575" b="1">
+                <a:solidFill>
+                  <a:srgbClr val="3D8DFF"/>
+                </a:solidFill>
+              </a:rPr>
+              <a:t>03</a:t>
+            </a:r>
+          </a:p>
+        </p:txBody>
+      </p:sp>
+      <p:sp>
+        <p:nvSpPr>
+          <p:cNvPr id="14" name="">
+            <a:extLst xmlns:a="http://schemas.openxmlformats.org/drawingml/2006/main">
+              <a:ext uri="{FF2B5EF4-FFF2-40B4-BE49-F238E27FC236}">
+                <a16:creationId xmlns:a16="http://schemas.microsoft.com/office/drawing/2014/main" id="{688B69A2-D390-49CD-8C69-71022AD3BA12}"/>
+              </a:ext>
+            </a:extLst>
+          </p:cNvPr>
+          <p:cNvSpPr>
+            <a:spLocks xmlns:a="http://schemas.openxmlformats.org/drawingml/2006/main" noGrp="1"/>
+          </p:cNvSpPr>
+          <p:nvPr/>
+        </p:nvSpPr>
+        <p:spPr>
+          <a:xfrm xmlns:a="http://schemas.openxmlformats.org/drawingml/2006/main">
+            <a:off x="1809750" y="4457700"/>
+            <a:ext cx="8572500" cy="304800"/>
+          </a:xfrm>
+          <a:prstGeom xmlns:a="http://schemas.openxmlformats.org/drawingml/2006/main" prst="rect">
+            <a:avLst/>
+          </a:prstGeom>
+          <a:noFill xmlns:a="http://schemas.openxmlformats.org/drawingml/2006/main"/>
+          <a:ln xmlns:a="http://schemas.openxmlformats.org/drawingml/2006/main" w="0">
+            <a:noFill/>
+            <a:prstDash val="solid"/>
+          </a:ln>
+        </p:spPr>
+        <p:txBody>
+          <a:bodyPr xmlns:a="http://schemas.openxmlformats.org/drawingml/2006/main"/>
+          <a:lstStyle xmlns:a="http://schemas.openxmlformats.org/drawingml/2006/main"/>
+          <a:p xmlns:a="http://schemas.openxmlformats.org/drawingml/2006/main">
+            <a:pPr>
+              <a:buNone/>
+              <a:defRPr sz="1725" b="1">
+                <a:solidFill>
+                  <a:srgbClr val="111827"/>
+                </a:solidFill>
+              </a:defRPr>
+            </a:pPr>
+            <a:r>
+              <a:rPr sz="1725" b="1">
+                <a:solidFill>
+                  <a:srgbClr val="111827"/>
+                </a:solidFill>
+              </a:rPr>
+              <a:t>支線任務｜答對率、平均或教師頁</a:t>
+            </a:r>
+          </a:p>
+        </p:txBody>
+      </p:sp>
+    </p:spTree>
+    <p:extLst>
+      <p:ext uri="{BB962C8B-B14F-4D97-AF65-F5344CB8AC3E}">
+        <p14:creationId xmlns:p14="http://schemas.microsoft.com/office/powerpoint/2010/main" val="445952414"/>
       </p:ext>
     </p:extLst>
   </p:cSld>
